--- a/presentation/calypso-knowledge-hub.pptx
+++ b/presentation/calypso-knowledge-hub.pptx
@@ -3114,7 +3114,7 @@
             <a:avLst/>
           </a:prstGeom>
           <a:solidFill>
-            <a:srgbClr val="0F1B3D"/>
+            <a:srgbClr val="E8622C"/>
           </a:solidFill>
           <a:ln>
             <a:noFill/>
@@ -3145,14 +3145,58 @@
       </p:sp>
       <p:sp>
         <p:nvSpPr>
-          <p:cNvPr id="3" name="TextBox 2"/>
+          <p:cNvPr id="3" name="Rectangle 2"/>
+          <p:cNvSpPr/>
+          <p:nvPr/>
+        </p:nvSpPr>
+        <p:spPr>
+          <a:xfrm>
+            <a:off x="10607040" y="548640"/>
+            <a:ext cx="822960" cy="822960"/>
+          </a:xfrm>
+          <a:prstGeom prst="rect">
+            <a:avLst/>
+          </a:prstGeom>
+          <a:solidFill>
+            <a:srgbClr val="F08A5E"/>
+          </a:solidFill>
+          <a:ln>
+            <a:noFill/>
+          </a:ln>
+          <a:effectLst/>
+        </p:spPr>
+        <p:style>
+          <a:lnRef idx="1">
+            <a:schemeClr val="accent1"/>
+          </a:lnRef>
+          <a:fillRef idx="3">
+            <a:schemeClr val="accent1"/>
+          </a:fillRef>
+          <a:effectRef idx="2">
+            <a:schemeClr val="accent1"/>
+          </a:effectRef>
+          <a:fontRef idx="minor">
+            <a:schemeClr val="lt1"/>
+          </a:fontRef>
+        </p:style>
+        <p:txBody>
+          <a:bodyPr rtlCol="0" anchor="ctr"/>
+          <a:lstStyle/>
+          <a:p>
+            <a:pPr algn="ctr"/>
+          </a:p>
+        </p:txBody>
+      </p:sp>
+      <p:sp>
+        <p:nvSpPr>
+          <p:cNvPr id="4" name="TextBox 3"/>
           <p:cNvSpPr txBox="1"/>
           <p:nvPr/>
         </p:nvSpPr>
         <p:spPr>
           <a:xfrm>
-            <a:off x="457200" y="2377440"/>
-            <a:ext cx="11247120" cy="1097280"/>
+            <a:off x="822960" y="2468880"/>
+            <a:ext cx="10058400" cy="365760"/>
           </a:xfrm>
           <a:prstGeom prst="rect">
             <a:avLst/>
@@ -3165,29 +3209,29 @@
           </a:bodyPr>
           <a:lstStyle/>
           <a:p>
-            <a:pPr algn="ctr"/>
-            <a:r>
-              <a:rPr sz="4800" b="1">
-                <a:solidFill>
-                  <a:srgbClr val="FFFFFF"/>
+            <a:pPr algn="l"/>
+            <a:r>
+              <a:rPr sz="1300" b="1">
+                <a:solidFill>
+                  <a:srgbClr val="FBD9C7"/>
                 </a:solidFill>
                 <a:latin typeface="Calibri"/>
               </a:rPr>
-              <a:t>Calypso Knowledge Hub</a:t>
-            </a:r>
-          </a:p>
-        </p:txBody>
-      </p:sp>
-      <p:sp>
-        <p:nvSpPr>
-          <p:cNvPr id="4" name="TextBox 3"/>
+              <a:t>HACKATÓN INTERNA · CLAUDE CODE</a:t>
+            </a:r>
+          </a:p>
+        </p:txBody>
+      </p:sp>
+      <p:sp>
+        <p:nvSpPr>
+          <p:cNvPr id="5" name="TextBox 4"/>
           <p:cNvSpPr txBox="1"/>
           <p:nvPr/>
         </p:nvSpPr>
         <p:spPr>
           <a:xfrm>
-            <a:off x="457200" y="3291840"/>
-            <a:ext cx="11247120" cy="640080"/>
+            <a:off x="822960" y="2880360"/>
+            <a:ext cx="10515600" cy="1005840"/>
           </a:xfrm>
           <a:prstGeom prst="rect">
             <a:avLst/>
@@ -3200,29 +3244,29 @@
           </a:bodyPr>
           <a:lstStyle/>
           <a:p>
-            <a:pPr algn="ctr"/>
-            <a:r>
-              <a:rPr sz="2200" b="0">
-                <a:solidFill>
-                  <a:srgbClr val="9FB0D8"/>
+            <a:pPr algn="l"/>
+            <a:r>
+              <a:rPr sz="4600" b="1">
+                <a:solidFill>
+                  <a:srgbClr val="FFFFFF"/>
                 </a:solidFill>
                 <a:latin typeface="Calibri"/>
               </a:rPr>
-              <a:t>IA agéntica aplicada a capacitación financiera interna</a:t>
-            </a:r>
-          </a:p>
-        </p:txBody>
-      </p:sp>
-      <p:sp>
-        <p:nvSpPr>
-          <p:cNvPr id="5" name="TextBox 4"/>
+              <a:t>Calypso Knowledge Hub</a:t>
+            </a:r>
+          </a:p>
+        </p:txBody>
+      </p:sp>
+      <p:sp>
+        <p:nvSpPr>
+          <p:cNvPr id="6" name="TextBox 5"/>
           <p:cNvSpPr txBox="1"/>
           <p:nvPr/>
         </p:nvSpPr>
         <p:spPr>
           <a:xfrm>
-            <a:off x="457200" y="4023360"/>
-            <a:ext cx="11247120" cy="457200"/>
+            <a:off x="822960" y="3749039"/>
+            <a:ext cx="10058400" cy="548640"/>
           </a:xfrm>
           <a:prstGeom prst="rect">
             <a:avLst/>
@@ -3235,15 +3279,15 @@
           </a:bodyPr>
           <a:lstStyle/>
           <a:p>
-            <a:pPr algn="ctr"/>
-            <a:r>
-              <a:rPr sz="1300" b="1">
-                <a:solidFill>
-                  <a:srgbClr val="2563EB"/>
+            <a:pPr algn="l"/>
+            <a:r>
+              <a:rPr sz="2000" b="0">
+                <a:solidFill>
+                  <a:srgbClr val="FCE3D6"/>
                 </a:solidFill>
                 <a:latin typeface="Calibri"/>
               </a:rPr>
-              <a:t>HACKATÓN INTERNA · CLAUDE CODE</a:t>
+              <a:t>IA agéntica aplicada a capacitación financiera interna</a:t>
             </a:r>
           </a:p>
         </p:txBody>
@@ -3268,14 +3312,58 @@
       <p:grpSpPr/>
       <p:sp>
         <p:nvSpPr>
-          <p:cNvPr id="2" name="TextBox 1"/>
+          <p:cNvPr id="2" name="Rectangle 1"/>
+          <p:cNvSpPr/>
+          <p:nvPr/>
+        </p:nvSpPr>
+        <p:spPr>
+          <a:xfrm>
+            <a:off x="548640" y="320040"/>
+            <a:ext cx="109728" cy="109728"/>
+          </a:xfrm>
+          <a:prstGeom prst="rect">
+            <a:avLst/>
+          </a:prstGeom>
+          <a:solidFill>
+            <a:srgbClr val="E8622C"/>
+          </a:solidFill>
+          <a:ln>
+            <a:noFill/>
+          </a:ln>
+          <a:effectLst/>
+        </p:spPr>
+        <p:style>
+          <a:lnRef idx="1">
+            <a:schemeClr val="accent1"/>
+          </a:lnRef>
+          <a:fillRef idx="3">
+            <a:schemeClr val="accent1"/>
+          </a:fillRef>
+          <a:effectRef idx="2">
+            <a:schemeClr val="accent1"/>
+          </a:effectRef>
+          <a:fontRef idx="minor">
+            <a:schemeClr val="lt1"/>
+          </a:fontRef>
+        </p:style>
+        <p:txBody>
+          <a:bodyPr rtlCol="0" anchor="ctr"/>
+          <a:lstStyle/>
+          <a:p>
+            <a:pPr algn="ctr"/>
+          </a:p>
+        </p:txBody>
+      </p:sp>
+      <p:sp>
+        <p:nvSpPr>
+          <p:cNvPr id="3" name="TextBox 2"/>
           <p:cNvSpPr txBox="1"/>
           <p:nvPr/>
         </p:nvSpPr>
         <p:spPr>
           <a:xfrm>
-            <a:off x="548640" y="365760"/>
-            <a:ext cx="5486400" cy="365760"/>
+            <a:off x="749808" y="256032"/>
+            <a:ext cx="1828800" cy="274320"/>
           </a:xfrm>
           <a:prstGeom prst="rect">
             <a:avLst/>
@@ -3290,27 +3378,71 @@
           <a:p>
             <a:pPr algn="l"/>
             <a:r>
-              <a:rPr sz="1300" b="1">
-                <a:solidFill>
-                  <a:srgbClr val="2563EB"/>
+              <a:rPr sz="1100" b="1">
+                <a:solidFill>
+                  <a:srgbClr val="6B7280"/>
                 </a:solidFill>
                 <a:latin typeface="Calibri"/>
               </a:rPr>
-              <a:t>VALOR PARA EL NEGOCIO</a:t>
-            </a:r>
-          </a:p>
-        </p:txBody>
-      </p:sp>
-      <p:sp>
-        <p:nvSpPr>
-          <p:cNvPr id="3" name="TextBox 2"/>
+              <a:t>CALYPSO HUB</a:t>
+            </a:r>
+          </a:p>
+        </p:txBody>
+      </p:sp>
+      <p:sp>
+        <p:nvSpPr>
+          <p:cNvPr id="4" name="Rectangle 3"/>
+          <p:cNvSpPr/>
+          <p:nvPr/>
+        </p:nvSpPr>
+        <p:spPr>
+          <a:xfrm>
+            <a:off x="11612880" y="0"/>
+            <a:ext cx="576072" cy="502920"/>
+          </a:xfrm>
+          <a:prstGeom prst="rect">
+            <a:avLst/>
+          </a:prstGeom>
+          <a:solidFill>
+            <a:srgbClr val="E8622C"/>
+          </a:solidFill>
+          <a:ln>
+            <a:noFill/>
+          </a:ln>
+          <a:effectLst/>
+        </p:spPr>
+        <p:style>
+          <a:lnRef idx="1">
+            <a:schemeClr val="accent1"/>
+          </a:lnRef>
+          <a:fillRef idx="3">
+            <a:schemeClr val="accent1"/>
+          </a:fillRef>
+          <a:effectRef idx="2">
+            <a:schemeClr val="accent1"/>
+          </a:effectRef>
+          <a:fontRef idx="minor">
+            <a:schemeClr val="lt1"/>
+          </a:fontRef>
+        </p:style>
+        <p:txBody>
+          <a:bodyPr rtlCol="0" anchor="ctr"/>
+          <a:lstStyle/>
+          <a:p>
+            <a:pPr algn="ctr"/>
+          </a:p>
+        </p:txBody>
+      </p:sp>
+      <p:sp>
+        <p:nvSpPr>
+          <p:cNvPr id="5" name="TextBox 4"/>
           <p:cNvSpPr txBox="1"/>
           <p:nvPr/>
         </p:nvSpPr>
         <p:spPr>
           <a:xfrm>
-            <a:off x="548640" y="685800"/>
-            <a:ext cx="10058400" cy="731520"/>
+            <a:off x="548640" y="868680"/>
+            <a:ext cx="5486400" cy="320040"/>
           </a:xfrm>
           <a:prstGeom prst="rect">
             <a:avLst/>
@@ -3325,27 +3457,27 @@
           <a:p>
             <a:pPr algn="l"/>
             <a:r>
-              <a:rPr sz="3000" b="1">
-                <a:solidFill>
-                  <a:srgbClr val="0F1B3D"/>
+              <a:rPr sz="1200" b="1">
+                <a:solidFill>
+                  <a:srgbClr val="E8622C"/>
                 </a:solidFill>
                 <a:latin typeface="Calibri"/>
               </a:rPr>
-              <a:t>Por qué esto importa</a:t>
-            </a:r>
-          </a:p>
-        </p:txBody>
-      </p:sp>
-      <p:sp>
-        <p:nvSpPr>
-          <p:cNvPr id="4" name="TextBox 3"/>
+              <a:t>VALOR PARA EL NEGOCIO</a:t>
+            </a:r>
+          </a:p>
+        </p:txBody>
+      </p:sp>
+      <p:sp>
+        <p:nvSpPr>
+          <p:cNvPr id="6" name="TextBox 5"/>
           <p:cNvSpPr txBox="1"/>
           <p:nvPr/>
         </p:nvSpPr>
         <p:spPr>
           <a:xfrm>
-            <a:off x="548640" y="1554480"/>
-            <a:ext cx="10789920" cy="4572000"/>
+            <a:off x="548640" y="1188720"/>
+            <a:ext cx="10515600" cy="640080"/>
           </a:xfrm>
           <a:prstGeom prst="rect">
             <a:avLst/>
@@ -3358,67 +3490,921 @@
           </a:bodyPr>
           <a:lstStyle/>
           <a:p>
-            <a:pPr>
-              <a:spcAft>
-                <a:spcPts val="1000"/>
-              </a:spcAft>
-              <a:defRPr sz="2000">
-                <a:solidFill>
-                  <a:srgbClr val="475569"/>
+            <a:pPr algn="l"/>
+            <a:r>
+              <a:rPr sz="2800" b="1">
+                <a:solidFill>
+                  <a:srgbClr val="1F2430"/>
                 </a:solidFill>
                 <a:latin typeface="Calibri"/>
-              </a:defRPr>
-            </a:pPr>
-            <a:r>
-              <a:t>•  Reduce la curva de aprendizaje de nuevos analistas y consultores Calypso.</a:t>
-            </a:r>
-          </a:p>
-          <a:p>
-            <a:pPr>
-              <a:spcAft>
-                <a:spcPts val="1000"/>
-              </a:spcAft>
-              <a:defRPr sz="2000">
-                <a:solidFill>
-                  <a:srgbClr val="475569"/>
+              </a:rPr>
+              <a:t>Por qué esto importa</a:t>
+            </a:r>
+          </a:p>
+        </p:txBody>
+      </p:sp>
+      <p:sp>
+        <p:nvSpPr>
+          <p:cNvPr id="7" name="Rounded Rectangle 6"/>
+          <p:cNvSpPr/>
+          <p:nvPr/>
+        </p:nvSpPr>
+        <p:spPr>
+          <a:xfrm>
+            <a:off x="548640" y="1965960"/>
+            <a:ext cx="3520440" cy="960120"/>
+          </a:xfrm>
+          <a:prstGeom prst="roundRect">
+            <a:avLst/>
+          </a:prstGeom>
+          <a:solidFill>
+            <a:srgbClr val="E8622C"/>
+          </a:solidFill>
+          <a:ln>
+            <a:noFill/>
+          </a:ln>
+          <a:effectLst/>
+        </p:spPr>
+        <p:style>
+          <a:lnRef idx="1">
+            <a:schemeClr val="accent1"/>
+          </a:lnRef>
+          <a:fillRef idx="3">
+            <a:schemeClr val="accent1"/>
+          </a:fillRef>
+          <a:effectRef idx="2">
+            <a:schemeClr val="accent1"/>
+          </a:effectRef>
+          <a:fontRef idx="minor">
+            <a:schemeClr val="lt1"/>
+          </a:fontRef>
+        </p:style>
+        <p:txBody>
+          <a:bodyPr rtlCol="0" anchor="ctr"/>
+          <a:lstStyle/>
+          <a:p>
+            <a:pPr algn="ctr"/>
+          </a:p>
+        </p:txBody>
+      </p:sp>
+      <p:sp>
+        <p:nvSpPr>
+          <p:cNvPr id="8" name="TextBox 7"/>
+          <p:cNvSpPr txBox="1"/>
+          <p:nvPr/>
+        </p:nvSpPr>
+        <p:spPr>
+          <a:xfrm>
+            <a:off x="731520" y="2057400"/>
+            <a:ext cx="3108960" cy="457200"/>
+          </a:xfrm>
+          <a:prstGeom prst="rect">
+            <a:avLst/>
+          </a:prstGeom>
+          <a:noFill/>
+        </p:spPr>
+        <p:txBody>
+          <a:bodyPr wrap="square">
+            <a:spAutoFit/>
+          </a:bodyPr>
+          <a:lstStyle/>
+          <a:p>
+            <a:pPr algn="l"/>
+            <a:r>
+              <a:rPr sz="2200" b="1">
+                <a:solidFill>
+                  <a:srgbClr val="FFFFFF"/>
                 </a:solidFill>
                 <a:latin typeface="Calibri"/>
-              </a:defRPr>
-            </a:pPr>
-            <a:r>
-              <a:t>•  Costo marginal prácticamente nulo en esta etapa: sin licencias, sin backend pagado.</a:t>
-            </a:r>
-          </a:p>
-          <a:p>
-            <a:pPr>
-              <a:spcAft>
-                <a:spcPts val="1000"/>
-              </a:spcAft>
-              <a:defRPr sz="2000">
-                <a:solidFill>
-                  <a:srgbClr val="475569"/>
+              </a:rPr>
+              <a:t>↓</a:t>
+            </a:r>
+          </a:p>
+        </p:txBody>
+      </p:sp>
+      <p:sp>
+        <p:nvSpPr>
+          <p:cNvPr id="9" name="TextBox 8"/>
+          <p:cNvSpPr txBox="1"/>
+          <p:nvPr/>
+        </p:nvSpPr>
+        <p:spPr>
+          <a:xfrm>
+            <a:off x="731520" y="2514600"/>
+            <a:ext cx="3200400" cy="365760"/>
+          </a:xfrm>
+          <a:prstGeom prst="rect">
+            <a:avLst/>
+          </a:prstGeom>
+          <a:noFill/>
+        </p:spPr>
+        <p:txBody>
+          <a:bodyPr wrap="square">
+            <a:spAutoFit/>
+          </a:bodyPr>
+          <a:lstStyle/>
+          <a:p>
+            <a:pPr algn="l"/>
+            <a:r>
+              <a:rPr sz="1100" b="0">
+                <a:solidFill>
+                  <a:srgbClr val="FFFFFF"/>
                 </a:solidFill>
                 <a:latin typeface="Calibri"/>
-              </a:defRPr>
-            </a:pPr>
-            <a:r>
-              <a:t>•  Arquitectura lista para escalar a un back office real, sin reescribir el motor de cálculo ni la interfaz.</a:t>
-            </a:r>
-          </a:p>
-          <a:p>
-            <a:pPr>
-              <a:spcAft>
-                <a:spcPts val="1000"/>
-              </a:spcAft>
-              <a:defRPr sz="2000">
-                <a:solidFill>
-                  <a:srgbClr val="475569"/>
+              </a:rPr>
+              <a:t>Menor curva de aprendizaje</a:t>
+            </a:r>
+          </a:p>
+        </p:txBody>
+      </p:sp>
+      <p:sp>
+        <p:nvSpPr>
+          <p:cNvPr id="10" name="Rounded Rectangle 9"/>
+          <p:cNvSpPr/>
+          <p:nvPr/>
+        </p:nvSpPr>
+        <p:spPr>
+          <a:xfrm>
+            <a:off x="4251959" y="1965960"/>
+            <a:ext cx="3520440" cy="960120"/>
+          </a:xfrm>
+          <a:prstGeom prst="roundRect">
+            <a:avLst/>
+          </a:prstGeom>
+          <a:solidFill>
+            <a:srgbClr val="E8622C"/>
+          </a:solidFill>
+          <a:ln>
+            <a:noFill/>
+          </a:ln>
+          <a:effectLst/>
+        </p:spPr>
+        <p:style>
+          <a:lnRef idx="1">
+            <a:schemeClr val="accent1"/>
+          </a:lnRef>
+          <a:fillRef idx="3">
+            <a:schemeClr val="accent1"/>
+          </a:fillRef>
+          <a:effectRef idx="2">
+            <a:schemeClr val="accent1"/>
+          </a:effectRef>
+          <a:fontRef idx="minor">
+            <a:schemeClr val="lt1"/>
+          </a:fontRef>
+        </p:style>
+        <p:txBody>
+          <a:bodyPr rtlCol="0" anchor="ctr"/>
+          <a:lstStyle/>
+          <a:p>
+            <a:pPr algn="ctr"/>
+          </a:p>
+        </p:txBody>
+      </p:sp>
+      <p:sp>
+        <p:nvSpPr>
+          <p:cNvPr id="11" name="TextBox 10"/>
+          <p:cNvSpPr txBox="1"/>
+          <p:nvPr/>
+        </p:nvSpPr>
+        <p:spPr>
+          <a:xfrm>
+            <a:off x="4434840" y="2057400"/>
+            <a:ext cx="3108960" cy="457200"/>
+          </a:xfrm>
+          <a:prstGeom prst="rect">
+            <a:avLst/>
+          </a:prstGeom>
+          <a:noFill/>
+        </p:spPr>
+        <p:txBody>
+          <a:bodyPr wrap="square">
+            <a:spAutoFit/>
+          </a:bodyPr>
+          <a:lstStyle/>
+          <a:p>
+            <a:pPr algn="l"/>
+            <a:r>
+              <a:rPr sz="2200" b="1">
+                <a:solidFill>
+                  <a:srgbClr val="FFFFFF"/>
                 </a:solidFill>
                 <a:latin typeface="Calibri"/>
-              </a:defRPr>
-            </a:pPr>
-            <a:r>
-              <a:t>•  Metodología reusable: el mismo enfoque de IA agéntica aplica a otras herramientas internas de la empresa.</a:t>
+              </a:rPr>
+              <a:t>$0</a:t>
+            </a:r>
+          </a:p>
+        </p:txBody>
+      </p:sp>
+      <p:sp>
+        <p:nvSpPr>
+          <p:cNvPr id="12" name="TextBox 11"/>
+          <p:cNvSpPr txBox="1"/>
+          <p:nvPr/>
+        </p:nvSpPr>
+        <p:spPr>
+          <a:xfrm>
+            <a:off x="4434840" y="2514600"/>
+            <a:ext cx="3200400" cy="365760"/>
+          </a:xfrm>
+          <a:prstGeom prst="rect">
+            <a:avLst/>
+          </a:prstGeom>
+          <a:noFill/>
+        </p:spPr>
+        <p:txBody>
+          <a:bodyPr wrap="square">
+            <a:spAutoFit/>
+          </a:bodyPr>
+          <a:lstStyle/>
+          <a:p>
+            <a:pPr algn="l"/>
+            <a:r>
+              <a:rPr sz="1100" b="0">
+                <a:solidFill>
+                  <a:srgbClr val="FFFFFF"/>
+                </a:solidFill>
+                <a:latin typeface="Calibri"/>
+              </a:rPr>
+              <a:t>Costo marginal en esta etapa</a:t>
+            </a:r>
+          </a:p>
+        </p:txBody>
+      </p:sp>
+      <p:sp>
+        <p:nvSpPr>
+          <p:cNvPr id="13" name="Rounded Rectangle 12"/>
+          <p:cNvSpPr/>
+          <p:nvPr/>
+        </p:nvSpPr>
+        <p:spPr>
+          <a:xfrm>
+            <a:off x="7955279" y="1965960"/>
+            <a:ext cx="3520440" cy="960120"/>
+          </a:xfrm>
+          <a:prstGeom prst="roundRect">
+            <a:avLst/>
+          </a:prstGeom>
+          <a:solidFill>
+            <a:srgbClr val="E8622C"/>
+          </a:solidFill>
+          <a:ln>
+            <a:noFill/>
+          </a:ln>
+          <a:effectLst/>
+        </p:spPr>
+        <p:style>
+          <a:lnRef idx="1">
+            <a:schemeClr val="accent1"/>
+          </a:lnRef>
+          <a:fillRef idx="3">
+            <a:schemeClr val="accent1"/>
+          </a:fillRef>
+          <a:effectRef idx="2">
+            <a:schemeClr val="accent1"/>
+          </a:effectRef>
+          <a:fontRef idx="minor">
+            <a:schemeClr val="lt1"/>
+          </a:fontRef>
+        </p:style>
+        <p:txBody>
+          <a:bodyPr rtlCol="0" anchor="ctr"/>
+          <a:lstStyle/>
+          <a:p>
+            <a:pPr algn="ctr"/>
+          </a:p>
+        </p:txBody>
+      </p:sp>
+      <p:sp>
+        <p:nvSpPr>
+          <p:cNvPr id="14" name="TextBox 13"/>
+          <p:cNvSpPr txBox="1"/>
+          <p:nvPr/>
+        </p:nvSpPr>
+        <p:spPr>
+          <a:xfrm>
+            <a:off x="8138159" y="2057400"/>
+            <a:ext cx="3108960" cy="457200"/>
+          </a:xfrm>
+          <a:prstGeom prst="rect">
+            <a:avLst/>
+          </a:prstGeom>
+          <a:noFill/>
+        </p:spPr>
+        <p:txBody>
+          <a:bodyPr wrap="square">
+            <a:spAutoFit/>
+          </a:bodyPr>
+          <a:lstStyle/>
+          <a:p>
+            <a:pPr algn="l"/>
+            <a:r>
+              <a:rPr sz="2200" b="1">
+                <a:solidFill>
+                  <a:srgbClr val="FFFFFF"/>
+                </a:solidFill>
+                <a:latin typeface="Calibri"/>
+              </a:rPr>
+              <a:t>N</a:t>
+            </a:r>
+          </a:p>
+        </p:txBody>
+      </p:sp>
+      <p:sp>
+        <p:nvSpPr>
+          <p:cNvPr id="15" name="TextBox 14"/>
+          <p:cNvSpPr txBox="1"/>
+          <p:nvPr/>
+        </p:nvSpPr>
+        <p:spPr>
+          <a:xfrm>
+            <a:off x="8138159" y="2514600"/>
+            <a:ext cx="3200400" cy="365760"/>
+          </a:xfrm>
+          <a:prstGeom prst="rect">
+            <a:avLst/>
+          </a:prstGeom>
+          <a:noFill/>
+        </p:spPr>
+        <p:txBody>
+          <a:bodyPr wrap="square">
+            <a:spAutoFit/>
+          </a:bodyPr>
+          <a:lstStyle/>
+          <a:p>
+            <a:pPr algn="l"/>
+            <a:r>
+              <a:rPr sz="1100" b="0">
+                <a:solidFill>
+                  <a:srgbClr val="FFFFFF"/>
+                </a:solidFill>
+                <a:latin typeface="Calibri"/>
+              </a:rPr>
+              <a:t>Productos escalables sin reescribir motor</a:t>
+            </a:r>
+          </a:p>
+        </p:txBody>
+      </p:sp>
+      <p:sp>
+        <p:nvSpPr>
+          <p:cNvPr id="16" name="Rounded Rectangle 15"/>
+          <p:cNvSpPr/>
+          <p:nvPr/>
+        </p:nvSpPr>
+        <p:spPr>
+          <a:xfrm>
+            <a:off x="548640" y="3200400"/>
+            <a:ext cx="10881360" cy="594360"/>
+          </a:xfrm>
+          <a:prstGeom prst="roundRect">
+            <a:avLst/>
+          </a:prstGeom>
+          <a:solidFill>
+            <a:srgbClr val="FFFFFF"/>
+          </a:solidFill>
+          <a:ln w="12700">
+            <a:solidFill>
+              <a:srgbClr val="ECE7E2"/>
+            </a:solidFill>
+          </a:ln>
+          <a:effectLst/>
+        </p:spPr>
+        <p:style>
+          <a:lnRef idx="1">
+            <a:schemeClr val="accent1"/>
+          </a:lnRef>
+          <a:fillRef idx="3">
+            <a:schemeClr val="accent1"/>
+          </a:fillRef>
+          <a:effectRef idx="2">
+            <a:schemeClr val="accent1"/>
+          </a:effectRef>
+          <a:fontRef idx="minor">
+            <a:schemeClr val="lt1"/>
+          </a:fontRef>
+        </p:style>
+        <p:txBody>
+          <a:bodyPr rtlCol="0" anchor="ctr"/>
+          <a:lstStyle/>
+          <a:p>
+            <a:pPr algn="ctr"/>
+          </a:p>
+        </p:txBody>
+      </p:sp>
+      <p:sp>
+        <p:nvSpPr>
+          <p:cNvPr id="17" name="Rounded Rectangle 16"/>
+          <p:cNvSpPr/>
+          <p:nvPr/>
+        </p:nvSpPr>
+        <p:spPr>
+          <a:xfrm>
+            <a:off x="685800" y="3310128"/>
+            <a:ext cx="411480" cy="365760"/>
+          </a:xfrm>
+          <a:prstGeom prst="roundRect">
+            <a:avLst/>
+          </a:prstGeom>
+          <a:solidFill>
+            <a:srgbClr val="FBEAE2"/>
+          </a:solidFill>
+          <a:ln>
+            <a:noFill/>
+          </a:ln>
+          <a:effectLst/>
+        </p:spPr>
+        <p:style>
+          <a:lnRef idx="1">
+            <a:schemeClr val="accent1"/>
+          </a:lnRef>
+          <a:fillRef idx="3">
+            <a:schemeClr val="accent1"/>
+          </a:fillRef>
+          <a:effectRef idx="2">
+            <a:schemeClr val="accent1"/>
+          </a:effectRef>
+          <a:fontRef idx="minor">
+            <a:schemeClr val="lt1"/>
+          </a:fontRef>
+        </p:style>
+        <p:txBody>
+          <a:bodyPr rtlCol="0" anchor="ctr"/>
+          <a:lstStyle/>
+          <a:p>
+            <a:pPr algn="ctr"/>
+            <a:r>
+              <a:rPr sz="1200" b="1">
+                <a:solidFill>
+                  <a:srgbClr val="C84A1E"/>
+                </a:solidFill>
+              </a:rPr>
+              <a:t>01</a:t>
+            </a:r>
+          </a:p>
+        </p:txBody>
+      </p:sp>
+      <p:sp>
+        <p:nvSpPr>
+          <p:cNvPr id="18" name="TextBox 17"/>
+          <p:cNvSpPr txBox="1"/>
+          <p:nvPr/>
+        </p:nvSpPr>
+        <p:spPr>
+          <a:xfrm>
+            <a:off x="1234440" y="3264408"/>
+            <a:ext cx="10012680" cy="466344"/>
+          </a:xfrm>
+          <a:prstGeom prst="rect">
+            <a:avLst/>
+          </a:prstGeom>
+          <a:noFill/>
+        </p:spPr>
+        <p:txBody>
+          <a:bodyPr wrap="square">
+            <a:spAutoFit/>
+          </a:bodyPr>
+          <a:lstStyle/>
+          <a:p>
+            <a:r>
+              <a:rPr b="1" sz="1300">
+                <a:solidFill>
+                  <a:srgbClr val="1F2430"/>
+                </a:solidFill>
+              </a:rPr>
+              <a:t>Onboarding más rápido</a:t>
+            </a:r>
+          </a:p>
+          <a:p>
+            <a:r>
+              <a:rPr sz="1100">
+                <a:solidFill>
+                  <a:srgbClr val="6B7280"/>
+                </a:solidFill>
+              </a:rPr>
+              <a:t>Reduce la curva de aprendizaje de nuevos analistas y consultores Calypso.</a:t>
+            </a:r>
+          </a:p>
+        </p:txBody>
+      </p:sp>
+      <p:sp>
+        <p:nvSpPr>
+          <p:cNvPr id="19" name="Rounded Rectangle 18"/>
+          <p:cNvSpPr/>
+          <p:nvPr/>
+        </p:nvSpPr>
+        <p:spPr>
+          <a:xfrm>
+            <a:off x="548640" y="3913632"/>
+            <a:ext cx="10881360" cy="594360"/>
+          </a:xfrm>
+          <a:prstGeom prst="roundRect">
+            <a:avLst/>
+          </a:prstGeom>
+          <a:solidFill>
+            <a:srgbClr val="FFFFFF"/>
+          </a:solidFill>
+          <a:ln w="12700">
+            <a:solidFill>
+              <a:srgbClr val="ECE7E2"/>
+            </a:solidFill>
+          </a:ln>
+          <a:effectLst/>
+        </p:spPr>
+        <p:style>
+          <a:lnRef idx="1">
+            <a:schemeClr val="accent1"/>
+          </a:lnRef>
+          <a:fillRef idx="3">
+            <a:schemeClr val="accent1"/>
+          </a:fillRef>
+          <a:effectRef idx="2">
+            <a:schemeClr val="accent1"/>
+          </a:effectRef>
+          <a:fontRef idx="minor">
+            <a:schemeClr val="lt1"/>
+          </a:fontRef>
+        </p:style>
+        <p:txBody>
+          <a:bodyPr rtlCol="0" anchor="ctr"/>
+          <a:lstStyle/>
+          <a:p>
+            <a:pPr algn="ctr"/>
+          </a:p>
+        </p:txBody>
+      </p:sp>
+      <p:sp>
+        <p:nvSpPr>
+          <p:cNvPr id="20" name="Rounded Rectangle 19"/>
+          <p:cNvSpPr/>
+          <p:nvPr/>
+        </p:nvSpPr>
+        <p:spPr>
+          <a:xfrm>
+            <a:off x="685800" y="4023360"/>
+            <a:ext cx="411480" cy="365760"/>
+          </a:xfrm>
+          <a:prstGeom prst="roundRect">
+            <a:avLst/>
+          </a:prstGeom>
+          <a:solidFill>
+            <a:srgbClr val="FBEAE2"/>
+          </a:solidFill>
+          <a:ln>
+            <a:noFill/>
+          </a:ln>
+          <a:effectLst/>
+        </p:spPr>
+        <p:style>
+          <a:lnRef idx="1">
+            <a:schemeClr val="accent1"/>
+          </a:lnRef>
+          <a:fillRef idx="3">
+            <a:schemeClr val="accent1"/>
+          </a:fillRef>
+          <a:effectRef idx="2">
+            <a:schemeClr val="accent1"/>
+          </a:effectRef>
+          <a:fontRef idx="minor">
+            <a:schemeClr val="lt1"/>
+          </a:fontRef>
+        </p:style>
+        <p:txBody>
+          <a:bodyPr rtlCol="0" anchor="ctr"/>
+          <a:lstStyle/>
+          <a:p>
+            <a:pPr algn="ctr"/>
+            <a:r>
+              <a:rPr sz="1200" b="1">
+                <a:solidFill>
+                  <a:srgbClr val="C84A1E"/>
+                </a:solidFill>
+              </a:rPr>
+              <a:t>02</a:t>
+            </a:r>
+          </a:p>
+        </p:txBody>
+      </p:sp>
+      <p:sp>
+        <p:nvSpPr>
+          <p:cNvPr id="21" name="TextBox 20"/>
+          <p:cNvSpPr txBox="1"/>
+          <p:nvPr/>
+        </p:nvSpPr>
+        <p:spPr>
+          <a:xfrm>
+            <a:off x="1234440" y="3977640"/>
+            <a:ext cx="10012680" cy="466344"/>
+          </a:xfrm>
+          <a:prstGeom prst="rect">
+            <a:avLst/>
+          </a:prstGeom>
+          <a:noFill/>
+        </p:spPr>
+        <p:txBody>
+          <a:bodyPr wrap="square">
+            <a:spAutoFit/>
+          </a:bodyPr>
+          <a:lstStyle/>
+          <a:p>
+            <a:r>
+              <a:rPr b="1" sz="1300">
+                <a:solidFill>
+                  <a:srgbClr val="1F2430"/>
+                </a:solidFill>
+              </a:rPr>
+              <a:t>Costo casi nulo</a:t>
+            </a:r>
+          </a:p>
+          <a:p>
+            <a:r>
+              <a:rPr sz="1100">
+                <a:solidFill>
+                  <a:srgbClr val="6B7280"/>
+                </a:solidFill>
+              </a:rPr>
+              <a:t>Sin licencias, sin backend pagado en esta etapa de demo.</a:t>
+            </a:r>
+          </a:p>
+        </p:txBody>
+      </p:sp>
+      <p:sp>
+        <p:nvSpPr>
+          <p:cNvPr id="22" name="Rounded Rectangle 21"/>
+          <p:cNvSpPr/>
+          <p:nvPr/>
+        </p:nvSpPr>
+        <p:spPr>
+          <a:xfrm>
+            <a:off x="548640" y="4626864"/>
+            <a:ext cx="10881360" cy="594360"/>
+          </a:xfrm>
+          <a:prstGeom prst="roundRect">
+            <a:avLst/>
+          </a:prstGeom>
+          <a:solidFill>
+            <a:srgbClr val="FFFFFF"/>
+          </a:solidFill>
+          <a:ln w="12700">
+            <a:solidFill>
+              <a:srgbClr val="ECE7E2"/>
+            </a:solidFill>
+          </a:ln>
+          <a:effectLst/>
+        </p:spPr>
+        <p:style>
+          <a:lnRef idx="1">
+            <a:schemeClr val="accent1"/>
+          </a:lnRef>
+          <a:fillRef idx="3">
+            <a:schemeClr val="accent1"/>
+          </a:fillRef>
+          <a:effectRef idx="2">
+            <a:schemeClr val="accent1"/>
+          </a:effectRef>
+          <a:fontRef idx="minor">
+            <a:schemeClr val="lt1"/>
+          </a:fontRef>
+        </p:style>
+        <p:txBody>
+          <a:bodyPr rtlCol="0" anchor="ctr"/>
+          <a:lstStyle/>
+          <a:p>
+            <a:pPr algn="ctr"/>
+          </a:p>
+        </p:txBody>
+      </p:sp>
+      <p:sp>
+        <p:nvSpPr>
+          <p:cNvPr id="23" name="Rounded Rectangle 22"/>
+          <p:cNvSpPr/>
+          <p:nvPr/>
+        </p:nvSpPr>
+        <p:spPr>
+          <a:xfrm>
+            <a:off x="685800" y="4736592"/>
+            <a:ext cx="411480" cy="365760"/>
+          </a:xfrm>
+          <a:prstGeom prst="roundRect">
+            <a:avLst/>
+          </a:prstGeom>
+          <a:solidFill>
+            <a:srgbClr val="FBEAE2"/>
+          </a:solidFill>
+          <a:ln>
+            <a:noFill/>
+          </a:ln>
+          <a:effectLst/>
+        </p:spPr>
+        <p:style>
+          <a:lnRef idx="1">
+            <a:schemeClr val="accent1"/>
+          </a:lnRef>
+          <a:fillRef idx="3">
+            <a:schemeClr val="accent1"/>
+          </a:fillRef>
+          <a:effectRef idx="2">
+            <a:schemeClr val="accent1"/>
+          </a:effectRef>
+          <a:fontRef idx="minor">
+            <a:schemeClr val="lt1"/>
+          </a:fontRef>
+        </p:style>
+        <p:txBody>
+          <a:bodyPr rtlCol="0" anchor="ctr"/>
+          <a:lstStyle/>
+          <a:p>
+            <a:pPr algn="ctr"/>
+            <a:r>
+              <a:rPr sz="1200" b="1">
+                <a:solidFill>
+                  <a:srgbClr val="C84A1E"/>
+                </a:solidFill>
+              </a:rPr>
+              <a:t>03</a:t>
+            </a:r>
+          </a:p>
+        </p:txBody>
+      </p:sp>
+      <p:sp>
+        <p:nvSpPr>
+          <p:cNvPr id="24" name="TextBox 23"/>
+          <p:cNvSpPr txBox="1"/>
+          <p:nvPr/>
+        </p:nvSpPr>
+        <p:spPr>
+          <a:xfrm>
+            <a:off x="1234440" y="4690872"/>
+            <a:ext cx="10012680" cy="466344"/>
+          </a:xfrm>
+          <a:prstGeom prst="rect">
+            <a:avLst/>
+          </a:prstGeom>
+          <a:noFill/>
+        </p:spPr>
+        <p:txBody>
+          <a:bodyPr wrap="square">
+            <a:spAutoFit/>
+          </a:bodyPr>
+          <a:lstStyle/>
+          <a:p>
+            <a:r>
+              <a:rPr b="1" sz="1300">
+                <a:solidFill>
+                  <a:srgbClr val="1F2430"/>
+                </a:solidFill>
+              </a:rPr>
+              <a:t>Lista para escalar</a:t>
+            </a:r>
+          </a:p>
+          <a:p>
+            <a:r>
+              <a:rPr sz="1100">
+                <a:solidFill>
+                  <a:srgbClr val="6B7280"/>
+                </a:solidFill>
+              </a:rPr>
+              <a:t>Arquitectura preparada para un back office real, sin reescribir motor ni interfaz.</a:t>
+            </a:r>
+          </a:p>
+        </p:txBody>
+      </p:sp>
+      <p:sp>
+        <p:nvSpPr>
+          <p:cNvPr id="25" name="Rounded Rectangle 24"/>
+          <p:cNvSpPr/>
+          <p:nvPr/>
+        </p:nvSpPr>
+        <p:spPr>
+          <a:xfrm>
+            <a:off x="548640" y="5340096"/>
+            <a:ext cx="10881360" cy="594360"/>
+          </a:xfrm>
+          <a:prstGeom prst="roundRect">
+            <a:avLst/>
+          </a:prstGeom>
+          <a:solidFill>
+            <a:srgbClr val="FFFFFF"/>
+          </a:solidFill>
+          <a:ln w="12700">
+            <a:solidFill>
+              <a:srgbClr val="ECE7E2"/>
+            </a:solidFill>
+          </a:ln>
+          <a:effectLst/>
+        </p:spPr>
+        <p:style>
+          <a:lnRef idx="1">
+            <a:schemeClr val="accent1"/>
+          </a:lnRef>
+          <a:fillRef idx="3">
+            <a:schemeClr val="accent1"/>
+          </a:fillRef>
+          <a:effectRef idx="2">
+            <a:schemeClr val="accent1"/>
+          </a:effectRef>
+          <a:fontRef idx="minor">
+            <a:schemeClr val="lt1"/>
+          </a:fontRef>
+        </p:style>
+        <p:txBody>
+          <a:bodyPr rtlCol="0" anchor="ctr"/>
+          <a:lstStyle/>
+          <a:p>
+            <a:pPr algn="ctr"/>
+          </a:p>
+        </p:txBody>
+      </p:sp>
+      <p:sp>
+        <p:nvSpPr>
+          <p:cNvPr id="26" name="Rounded Rectangle 25"/>
+          <p:cNvSpPr/>
+          <p:nvPr/>
+        </p:nvSpPr>
+        <p:spPr>
+          <a:xfrm>
+            <a:off x="685800" y="5449824"/>
+            <a:ext cx="411480" cy="365760"/>
+          </a:xfrm>
+          <a:prstGeom prst="roundRect">
+            <a:avLst/>
+          </a:prstGeom>
+          <a:solidFill>
+            <a:srgbClr val="FBEAE2"/>
+          </a:solidFill>
+          <a:ln>
+            <a:noFill/>
+          </a:ln>
+          <a:effectLst/>
+        </p:spPr>
+        <p:style>
+          <a:lnRef idx="1">
+            <a:schemeClr val="accent1"/>
+          </a:lnRef>
+          <a:fillRef idx="3">
+            <a:schemeClr val="accent1"/>
+          </a:fillRef>
+          <a:effectRef idx="2">
+            <a:schemeClr val="accent1"/>
+          </a:effectRef>
+          <a:fontRef idx="minor">
+            <a:schemeClr val="lt1"/>
+          </a:fontRef>
+        </p:style>
+        <p:txBody>
+          <a:bodyPr rtlCol="0" anchor="ctr"/>
+          <a:lstStyle/>
+          <a:p>
+            <a:pPr algn="ctr"/>
+            <a:r>
+              <a:rPr sz="1200" b="1">
+                <a:solidFill>
+                  <a:srgbClr val="C84A1E"/>
+                </a:solidFill>
+              </a:rPr>
+              <a:t>04</a:t>
+            </a:r>
+          </a:p>
+        </p:txBody>
+      </p:sp>
+      <p:sp>
+        <p:nvSpPr>
+          <p:cNvPr id="27" name="TextBox 26"/>
+          <p:cNvSpPr txBox="1"/>
+          <p:nvPr/>
+        </p:nvSpPr>
+        <p:spPr>
+          <a:xfrm>
+            <a:off x="1234440" y="5404104"/>
+            <a:ext cx="10012680" cy="466344"/>
+          </a:xfrm>
+          <a:prstGeom prst="rect">
+            <a:avLst/>
+          </a:prstGeom>
+          <a:noFill/>
+        </p:spPr>
+        <p:txBody>
+          <a:bodyPr wrap="square">
+            <a:spAutoFit/>
+          </a:bodyPr>
+          <a:lstStyle/>
+          <a:p>
+            <a:r>
+              <a:rPr b="1" sz="1300">
+                <a:solidFill>
+                  <a:srgbClr val="1F2430"/>
+                </a:solidFill>
+              </a:rPr>
+              <a:t>Metodología reusable</a:t>
+            </a:r>
+          </a:p>
+          <a:p>
+            <a:r>
+              <a:rPr sz="1100">
+                <a:solidFill>
+                  <a:srgbClr val="6B7280"/>
+                </a:solidFill>
+              </a:rPr>
+              <a:t>El mismo enfoque de IA agéntica aplica a otras herramientas internas de la empresa.</a:t>
             </a:r>
           </a:p>
         </p:txBody>
@@ -3443,14 +4429,58 @@
       <p:grpSpPr/>
       <p:sp>
         <p:nvSpPr>
-          <p:cNvPr id="2" name="TextBox 1"/>
+          <p:cNvPr id="2" name="Rectangle 1"/>
+          <p:cNvSpPr/>
+          <p:nvPr/>
+        </p:nvSpPr>
+        <p:spPr>
+          <a:xfrm>
+            <a:off x="548640" y="320040"/>
+            <a:ext cx="109728" cy="109728"/>
+          </a:xfrm>
+          <a:prstGeom prst="rect">
+            <a:avLst/>
+          </a:prstGeom>
+          <a:solidFill>
+            <a:srgbClr val="E8622C"/>
+          </a:solidFill>
+          <a:ln>
+            <a:noFill/>
+          </a:ln>
+          <a:effectLst/>
+        </p:spPr>
+        <p:style>
+          <a:lnRef idx="1">
+            <a:schemeClr val="accent1"/>
+          </a:lnRef>
+          <a:fillRef idx="3">
+            <a:schemeClr val="accent1"/>
+          </a:fillRef>
+          <a:effectRef idx="2">
+            <a:schemeClr val="accent1"/>
+          </a:effectRef>
+          <a:fontRef idx="minor">
+            <a:schemeClr val="lt1"/>
+          </a:fontRef>
+        </p:style>
+        <p:txBody>
+          <a:bodyPr rtlCol="0" anchor="ctr"/>
+          <a:lstStyle/>
+          <a:p>
+            <a:pPr algn="ctr"/>
+          </a:p>
+        </p:txBody>
+      </p:sp>
+      <p:sp>
+        <p:nvSpPr>
+          <p:cNvPr id="3" name="TextBox 2"/>
           <p:cNvSpPr txBox="1"/>
           <p:nvPr/>
         </p:nvSpPr>
         <p:spPr>
           <a:xfrm>
-            <a:off x="548640" y="365760"/>
-            <a:ext cx="5486400" cy="365760"/>
+            <a:off x="749808" y="256032"/>
+            <a:ext cx="1828800" cy="274320"/>
           </a:xfrm>
           <a:prstGeom prst="rect">
             <a:avLst/>
@@ -3465,27 +4495,71 @@
           <a:p>
             <a:pPr algn="l"/>
             <a:r>
-              <a:rPr sz="1300" b="1">
-                <a:solidFill>
-                  <a:srgbClr val="2563EB"/>
+              <a:rPr sz="1100" b="1">
+                <a:solidFill>
+                  <a:srgbClr val="6B7280"/>
                 </a:solidFill>
                 <a:latin typeface="Calibri"/>
               </a:rPr>
-              <a:t>PRÓXIMOS PASOS</a:t>
-            </a:r>
-          </a:p>
-        </p:txBody>
-      </p:sp>
-      <p:sp>
-        <p:nvSpPr>
-          <p:cNvPr id="3" name="TextBox 2"/>
+              <a:t>CALYPSO HUB</a:t>
+            </a:r>
+          </a:p>
+        </p:txBody>
+      </p:sp>
+      <p:sp>
+        <p:nvSpPr>
+          <p:cNvPr id="4" name="Rectangle 3"/>
+          <p:cNvSpPr/>
+          <p:nvPr/>
+        </p:nvSpPr>
+        <p:spPr>
+          <a:xfrm>
+            <a:off x="11612880" y="0"/>
+            <a:ext cx="576072" cy="502920"/>
+          </a:xfrm>
+          <a:prstGeom prst="rect">
+            <a:avLst/>
+          </a:prstGeom>
+          <a:solidFill>
+            <a:srgbClr val="E8622C"/>
+          </a:solidFill>
+          <a:ln>
+            <a:noFill/>
+          </a:ln>
+          <a:effectLst/>
+        </p:spPr>
+        <p:style>
+          <a:lnRef idx="1">
+            <a:schemeClr val="accent1"/>
+          </a:lnRef>
+          <a:fillRef idx="3">
+            <a:schemeClr val="accent1"/>
+          </a:fillRef>
+          <a:effectRef idx="2">
+            <a:schemeClr val="accent1"/>
+          </a:effectRef>
+          <a:fontRef idx="minor">
+            <a:schemeClr val="lt1"/>
+          </a:fontRef>
+        </p:style>
+        <p:txBody>
+          <a:bodyPr rtlCol="0" anchor="ctr"/>
+          <a:lstStyle/>
+          <a:p>
+            <a:pPr algn="ctr"/>
+          </a:p>
+        </p:txBody>
+      </p:sp>
+      <p:sp>
+        <p:nvSpPr>
+          <p:cNvPr id="5" name="TextBox 4"/>
           <p:cNvSpPr txBox="1"/>
           <p:nvPr/>
         </p:nvSpPr>
         <p:spPr>
           <a:xfrm>
-            <a:off x="548640" y="685800"/>
-            <a:ext cx="10058400" cy="731520"/>
+            <a:off x="548640" y="868680"/>
+            <a:ext cx="5486400" cy="320040"/>
           </a:xfrm>
           <a:prstGeom prst="rect">
             <a:avLst/>
@@ -3500,27 +4574,27 @@
           <a:p>
             <a:pPr algn="l"/>
             <a:r>
-              <a:rPr sz="3000" b="1">
-                <a:solidFill>
-                  <a:srgbClr val="0F1B3D"/>
+              <a:rPr sz="1200" b="1">
+                <a:solidFill>
+                  <a:srgbClr val="E8622C"/>
                 </a:solidFill>
                 <a:latin typeface="Calibri"/>
               </a:rPr>
-              <a:t>Roadmap</a:t>
-            </a:r>
-          </a:p>
-        </p:txBody>
-      </p:sp>
-      <p:sp>
-        <p:nvSpPr>
-          <p:cNvPr id="4" name="TextBox 3"/>
+              <a:t>PRÓXIMOS PASOS</a:t>
+            </a:r>
+          </a:p>
+        </p:txBody>
+      </p:sp>
+      <p:sp>
+        <p:nvSpPr>
+          <p:cNvPr id="6" name="TextBox 5"/>
           <p:cNvSpPr txBox="1"/>
           <p:nvPr/>
         </p:nvSpPr>
         <p:spPr>
           <a:xfrm>
-            <a:off x="548640" y="1554480"/>
-            <a:ext cx="10789920" cy="4572000"/>
+            <a:off x="548640" y="1188720"/>
+            <a:ext cx="10515600" cy="640080"/>
           </a:xfrm>
           <a:prstGeom prst="rect">
             <a:avLst/>
@@ -3533,67 +4607,579 @@
           </a:bodyPr>
           <a:lstStyle/>
           <a:p>
-            <a:pPr>
-              <a:spcAft>
-                <a:spcPts val="1000"/>
-              </a:spcAft>
-              <a:defRPr sz="2000">
-                <a:solidFill>
-                  <a:srgbClr val="475569"/>
+            <a:pPr algn="l"/>
+            <a:r>
+              <a:rPr sz="2800" b="1">
+                <a:solidFill>
+                  <a:srgbClr val="1F2430"/>
                 </a:solidFill>
                 <a:latin typeface="Calibri"/>
-              </a:defRPr>
-            </a:pPr>
-            <a:r>
-              <a:t>•  Back office: gestión de usuarios, persistencia real y versionado de contenido.</a:t>
-            </a:r>
-          </a:p>
-          <a:p>
-            <a:pPr>
-              <a:spcAft>
-                <a:spcPts val="1000"/>
-              </a:spcAft>
-              <a:defRPr sz="2000">
-                <a:solidFill>
-                  <a:srgbClr val="475569"/>
-                </a:solidFill>
-                <a:latin typeface="Calibri"/>
-              </a:defRPr>
-            </a:pPr>
-            <a:r>
-              <a:t>•  Ficha de configuración de producto generada por IA.</a:t>
-            </a:r>
-          </a:p>
-          <a:p>
-            <a:pPr>
-              <a:spcAft>
-                <a:spcPts val="1000"/>
-              </a:spcAft>
-              <a:defRPr sz="2000">
-                <a:solidFill>
-                  <a:srgbClr val="475569"/>
-                </a:solidFill>
-                <a:latin typeface="Calibri"/>
-              </a:defRPr>
-            </a:pPr>
-            <a:r>
-              <a:t>•  Más productos financieros en el simulador.</a:t>
-            </a:r>
-          </a:p>
-          <a:p>
-            <a:pPr>
-              <a:spcAft>
-                <a:spcPts val="1000"/>
-              </a:spcAft>
-              <a:defRPr sz="2000">
-                <a:solidFill>
-                  <a:srgbClr val="475569"/>
-                </a:solidFill>
-                <a:latin typeface="Calibri"/>
-              </a:defRPr>
-            </a:pPr>
-            <a:r>
-              <a:t>•  Más colaboradores aportando al diccionario.</a:t>
+              </a:rPr>
+              <a:t>Roadmap</a:t>
+            </a:r>
+          </a:p>
+        </p:txBody>
+      </p:sp>
+      <p:sp>
+        <p:nvSpPr>
+          <p:cNvPr id="7" name="Rounded Rectangle 6"/>
+          <p:cNvSpPr/>
+          <p:nvPr/>
+        </p:nvSpPr>
+        <p:spPr>
+          <a:xfrm>
+            <a:off x="548640" y="1965960"/>
+            <a:ext cx="7863840" cy="713232"/>
+          </a:xfrm>
+          <a:prstGeom prst="roundRect">
+            <a:avLst/>
+          </a:prstGeom>
+          <a:solidFill>
+            <a:srgbClr val="FFFFFF"/>
+          </a:solidFill>
+          <a:ln w="12700">
+            <a:solidFill>
+              <a:srgbClr val="ECE7E2"/>
+            </a:solidFill>
+          </a:ln>
+          <a:effectLst/>
+        </p:spPr>
+        <p:style>
+          <a:lnRef idx="1">
+            <a:schemeClr val="accent1"/>
+          </a:lnRef>
+          <a:fillRef idx="3">
+            <a:schemeClr val="accent1"/>
+          </a:fillRef>
+          <a:effectRef idx="2">
+            <a:schemeClr val="accent1"/>
+          </a:effectRef>
+          <a:fontRef idx="minor">
+            <a:schemeClr val="lt1"/>
+          </a:fontRef>
+        </p:style>
+        <p:txBody>
+          <a:bodyPr rtlCol="0" anchor="ctr"/>
+          <a:lstStyle/>
+          <a:p>
+            <a:pPr algn="ctr"/>
+          </a:p>
+        </p:txBody>
+      </p:sp>
+      <p:sp>
+        <p:nvSpPr>
+          <p:cNvPr id="8" name="Rounded Rectangle 7"/>
+          <p:cNvSpPr/>
+          <p:nvPr/>
+        </p:nvSpPr>
+        <p:spPr>
+          <a:xfrm>
+            <a:off x="685800" y="2075688"/>
+            <a:ext cx="411480" cy="365760"/>
+          </a:xfrm>
+          <a:prstGeom prst="roundRect">
+            <a:avLst/>
+          </a:prstGeom>
+          <a:solidFill>
+            <a:srgbClr val="FBEAE2"/>
+          </a:solidFill>
+          <a:ln>
+            <a:noFill/>
+          </a:ln>
+          <a:effectLst/>
+        </p:spPr>
+        <p:style>
+          <a:lnRef idx="1">
+            <a:schemeClr val="accent1"/>
+          </a:lnRef>
+          <a:fillRef idx="3">
+            <a:schemeClr val="accent1"/>
+          </a:fillRef>
+          <a:effectRef idx="2">
+            <a:schemeClr val="accent1"/>
+          </a:effectRef>
+          <a:fontRef idx="minor">
+            <a:schemeClr val="lt1"/>
+          </a:fontRef>
+        </p:style>
+        <p:txBody>
+          <a:bodyPr rtlCol="0" anchor="ctr"/>
+          <a:lstStyle/>
+          <a:p>
+            <a:pPr algn="ctr"/>
+            <a:r>
+              <a:rPr sz="1200" b="1">
+                <a:solidFill>
+                  <a:srgbClr val="C84A1E"/>
+                </a:solidFill>
+              </a:rPr>
+              <a:t>01</a:t>
+            </a:r>
+          </a:p>
+        </p:txBody>
+      </p:sp>
+      <p:sp>
+        <p:nvSpPr>
+          <p:cNvPr id="9" name="TextBox 8"/>
+          <p:cNvSpPr txBox="1"/>
+          <p:nvPr/>
+        </p:nvSpPr>
+        <p:spPr>
+          <a:xfrm>
+            <a:off x="1234440" y="2029968"/>
+            <a:ext cx="6995160" cy="585216"/>
+          </a:xfrm>
+          <a:prstGeom prst="rect">
+            <a:avLst/>
+          </a:prstGeom>
+          <a:noFill/>
+        </p:spPr>
+        <p:txBody>
+          <a:bodyPr wrap="square">
+            <a:spAutoFit/>
+          </a:bodyPr>
+          <a:lstStyle/>
+          <a:p>
+            <a:r>
+              <a:rPr b="1" sz="1300">
+                <a:solidFill>
+                  <a:srgbClr val="1F2430"/>
+                </a:solidFill>
+              </a:rPr>
+              <a:t>Back office</a:t>
+            </a:r>
+          </a:p>
+          <a:p>
+            <a:r>
+              <a:rPr sz="1100">
+                <a:solidFill>
+                  <a:srgbClr val="6B7280"/>
+                </a:solidFill>
+              </a:rPr>
+              <a:t>Gestión de usuarios, persistencia real y versionado de contenido.</a:t>
+            </a:r>
+          </a:p>
+        </p:txBody>
+      </p:sp>
+      <p:sp>
+        <p:nvSpPr>
+          <p:cNvPr id="10" name="Rounded Rectangle 9"/>
+          <p:cNvSpPr/>
+          <p:nvPr/>
+        </p:nvSpPr>
+        <p:spPr>
+          <a:xfrm>
+            <a:off x="548640" y="2807208"/>
+            <a:ext cx="7863840" cy="713232"/>
+          </a:xfrm>
+          <a:prstGeom prst="roundRect">
+            <a:avLst/>
+          </a:prstGeom>
+          <a:solidFill>
+            <a:srgbClr val="FFFFFF"/>
+          </a:solidFill>
+          <a:ln w="12700">
+            <a:solidFill>
+              <a:srgbClr val="ECE7E2"/>
+            </a:solidFill>
+          </a:ln>
+          <a:effectLst/>
+        </p:spPr>
+        <p:style>
+          <a:lnRef idx="1">
+            <a:schemeClr val="accent1"/>
+          </a:lnRef>
+          <a:fillRef idx="3">
+            <a:schemeClr val="accent1"/>
+          </a:fillRef>
+          <a:effectRef idx="2">
+            <a:schemeClr val="accent1"/>
+          </a:effectRef>
+          <a:fontRef idx="minor">
+            <a:schemeClr val="lt1"/>
+          </a:fontRef>
+        </p:style>
+        <p:txBody>
+          <a:bodyPr rtlCol="0" anchor="ctr"/>
+          <a:lstStyle/>
+          <a:p>
+            <a:pPr algn="ctr"/>
+          </a:p>
+        </p:txBody>
+      </p:sp>
+      <p:sp>
+        <p:nvSpPr>
+          <p:cNvPr id="11" name="Rounded Rectangle 10"/>
+          <p:cNvSpPr/>
+          <p:nvPr/>
+        </p:nvSpPr>
+        <p:spPr>
+          <a:xfrm>
+            <a:off x="685800" y="2916936"/>
+            <a:ext cx="411480" cy="365760"/>
+          </a:xfrm>
+          <a:prstGeom prst="roundRect">
+            <a:avLst/>
+          </a:prstGeom>
+          <a:solidFill>
+            <a:srgbClr val="FBEAE2"/>
+          </a:solidFill>
+          <a:ln>
+            <a:noFill/>
+          </a:ln>
+          <a:effectLst/>
+        </p:spPr>
+        <p:style>
+          <a:lnRef idx="1">
+            <a:schemeClr val="accent1"/>
+          </a:lnRef>
+          <a:fillRef idx="3">
+            <a:schemeClr val="accent1"/>
+          </a:fillRef>
+          <a:effectRef idx="2">
+            <a:schemeClr val="accent1"/>
+          </a:effectRef>
+          <a:fontRef idx="minor">
+            <a:schemeClr val="lt1"/>
+          </a:fontRef>
+        </p:style>
+        <p:txBody>
+          <a:bodyPr rtlCol="0" anchor="ctr"/>
+          <a:lstStyle/>
+          <a:p>
+            <a:pPr algn="ctr"/>
+            <a:r>
+              <a:rPr sz="1200" b="1">
+                <a:solidFill>
+                  <a:srgbClr val="C84A1E"/>
+                </a:solidFill>
+              </a:rPr>
+              <a:t>02</a:t>
+            </a:r>
+          </a:p>
+        </p:txBody>
+      </p:sp>
+      <p:sp>
+        <p:nvSpPr>
+          <p:cNvPr id="12" name="TextBox 11"/>
+          <p:cNvSpPr txBox="1"/>
+          <p:nvPr/>
+        </p:nvSpPr>
+        <p:spPr>
+          <a:xfrm>
+            <a:off x="1234440" y="2871216"/>
+            <a:ext cx="6995160" cy="585216"/>
+          </a:xfrm>
+          <a:prstGeom prst="rect">
+            <a:avLst/>
+          </a:prstGeom>
+          <a:noFill/>
+        </p:spPr>
+        <p:txBody>
+          <a:bodyPr wrap="square">
+            <a:spAutoFit/>
+          </a:bodyPr>
+          <a:lstStyle/>
+          <a:p>
+            <a:r>
+              <a:rPr b="1" sz="1300">
+                <a:solidFill>
+                  <a:srgbClr val="1F2430"/>
+                </a:solidFill>
+              </a:rPr>
+              <a:t>Ficha de producto por IA</a:t>
+            </a:r>
+          </a:p>
+          <a:p>
+            <a:r>
+              <a:rPr sz="1100">
+                <a:solidFill>
+                  <a:srgbClr val="6B7280"/>
+                </a:solidFill>
+              </a:rPr>
+              <a:t>Generación asistida de la ficha de configuración del producto simulado.</a:t>
+            </a:r>
+          </a:p>
+        </p:txBody>
+      </p:sp>
+      <p:sp>
+        <p:nvSpPr>
+          <p:cNvPr id="13" name="Rounded Rectangle 12"/>
+          <p:cNvSpPr/>
+          <p:nvPr/>
+        </p:nvSpPr>
+        <p:spPr>
+          <a:xfrm>
+            <a:off x="548640" y="3648456"/>
+            <a:ext cx="7863840" cy="713232"/>
+          </a:xfrm>
+          <a:prstGeom prst="roundRect">
+            <a:avLst/>
+          </a:prstGeom>
+          <a:solidFill>
+            <a:srgbClr val="FFFFFF"/>
+          </a:solidFill>
+          <a:ln w="12700">
+            <a:solidFill>
+              <a:srgbClr val="ECE7E2"/>
+            </a:solidFill>
+          </a:ln>
+          <a:effectLst/>
+        </p:spPr>
+        <p:style>
+          <a:lnRef idx="1">
+            <a:schemeClr val="accent1"/>
+          </a:lnRef>
+          <a:fillRef idx="3">
+            <a:schemeClr val="accent1"/>
+          </a:fillRef>
+          <a:effectRef idx="2">
+            <a:schemeClr val="accent1"/>
+          </a:effectRef>
+          <a:fontRef idx="minor">
+            <a:schemeClr val="lt1"/>
+          </a:fontRef>
+        </p:style>
+        <p:txBody>
+          <a:bodyPr rtlCol="0" anchor="ctr"/>
+          <a:lstStyle/>
+          <a:p>
+            <a:pPr algn="ctr"/>
+          </a:p>
+        </p:txBody>
+      </p:sp>
+      <p:sp>
+        <p:nvSpPr>
+          <p:cNvPr id="14" name="Rounded Rectangle 13"/>
+          <p:cNvSpPr/>
+          <p:nvPr/>
+        </p:nvSpPr>
+        <p:spPr>
+          <a:xfrm>
+            <a:off x="685800" y="3758184"/>
+            <a:ext cx="411480" cy="365760"/>
+          </a:xfrm>
+          <a:prstGeom prst="roundRect">
+            <a:avLst/>
+          </a:prstGeom>
+          <a:solidFill>
+            <a:srgbClr val="FBEAE2"/>
+          </a:solidFill>
+          <a:ln>
+            <a:noFill/>
+          </a:ln>
+          <a:effectLst/>
+        </p:spPr>
+        <p:style>
+          <a:lnRef idx="1">
+            <a:schemeClr val="accent1"/>
+          </a:lnRef>
+          <a:fillRef idx="3">
+            <a:schemeClr val="accent1"/>
+          </a:fillRef>
+          <a:effectRef idx="2">
+            <a:schemeClr val="accent1"/>
+          </a:effectRef>
+          <a:fontRef idx="minor">
+            <a:schemeClr val="lt1"/>
+          </a:fontRef>
+        </p:style>
+        <p:txBody>
+          <a:bodyPr rtlCol="0" anchor="ctr"/>
+          <a:lstStyle/>
+          <a:p>
+            <a:pPr algn="ctr"/>
+            <a:r>
+              <a:rPr sz="1200" b="1">
+                <a:solidFill>
+                  <a:srgbClr val="C84A1E"/>
+                </a:solidFill>
+              </a:rPr>
+              <a:t>03</a:t>
+            </a:r>
+          </a:p>
+        </p:txBody>
+      </p:sp>
+      <p:sp>
+        <p:nvSpPr>
+          <p:cNvPr id="15" name="TextBox 14"/>
+          <p:cNvSpPr txBox="1"/>
+          <p:nvPr/>
+        </p:nvSpPr>
+        <p:spPr>
+          <a:xfrm>
+            <a:off x="1234440" y="3712464"/>
+            <a:ext cx="6995160" cy="585216"/>
+          </a:xfrm>
+          <a:prstGeom prst="rect">
+            <a:avLst/>
+          </a:prstGeom>
+          <a:noFill/>
+        </p:spPr>
+        <p:txBody>
+          <a:bodyPr wrap="square">
+            <a:spAutoFit/>
+          </a:bodyPr>
+          <a:lstStyle/>
+          <a:p>
+            <a:r>
+              <a:rPr b="1" sz="1300">
+                <a:solidFill>
+                  <a:srgbClr val="1F2430"/>
+                </a:solidFill>
+              </a:rPr>
+              <a:t>Más productos financieros</a:t>
+            </a:r>
+          </a:p>
+          <a:p>
+            <a:r>
+              <a:rPr sz="1100">
+                <a:solidFill>
+                  <a:srgbClr val="6B7280"/>
+                </a:solidFill>
+              </a:rPr>
+              <a:t>Ampliar el simulador a nuevos instrumentos.</a:t>
+            </a:r>
+          </a:p>
+        </p:txBody>
+      </p:sp>
+      <p:sp>
+        <p:nvSpPr>
+          <p:cNvPr id="16" name="Rounded Rectangle 15"/>
+          <p:cNvSpPr/>
+          <p:nvPr/>
+        </p:nvSpPr>
+        <p:spPr>
+          <a:xfrm>
+            <a:off x="548640" y="4489704"/>
+            <a:ext cx="7863840" cy="713232"/>
+          </a:xfrm>
+          <a:prstGeom prst="roundRect">
+            <a:avLst/>
+          </a:prstGeom>
+          <a:solidFill>
+            <a:srgbClr val="FFFFFF"/>
+          </a:solidFill>
+          <a:ln w="12700">
+            <a:solidFill>
+              <a:srgbClr val="ECE7E2"/>
+            </a:solidFill>
+          </a:ln>
+          <a:effectLst/>
+        </p:spPr>
+        <p:style>
+          <a:lnRef idx="1">
+            <a:schemeClr val="accent1"/>
+          </a:lnRef>
+          <a:fillRef idx="3">
+            <a:schemeClr val="accent1"/>
+          </a:fillRef>
+          <a:effectRef idx="2">
+            <a:schemeClr val="accent1"/>
+          </a:effectRef>
+          <a:fontRef idx="minor">
+            <a:schemeClr val="lt1"/>
+          </a:fontRef>
+        </p:style>
+        <p:txBody>
+          <a:bodyPr rtlCol="0" anchor="ctr"/>
+          <a:lstStyle/>
+          <a:p>
+            <a:pPr algn="ctr"/>
+          </a:p>
+        </p:txBody>
+      </p:sp>
+      <p:sp>
+        <p:nvSpPr>
+          <p:cNvPr id="17" name="Rounded Rectangle 16"/>
+          <p:cNvSpPr/>
+          <p:nvPr/>
+        </p:nvSpPr>
+        <p:spPr>
+          <a:xfrm>
+            <a:off x="685800" y="4599432"/>
+            <a:ext cx="411480" cy="365760"/>
+          </a:xfrm>
+          <a:prstGeom prst="roundRect">
+            <a:avLst/>
+          </a:prstGeom>
+          <a:solidFill>
+            <a:srgbClr val="FBEAE2"/>
+          </a:solidFill>
+          <a:ln>
+            <a:noFill/>
+          </a:ln>
+          <a:effectLst/>
+        </p:spPr>
+        <p:style>
+          <a:lnRef idx="1">
+            <a:schemeClr val="accent1"/>
+          </a:lnRef>
+          <a:fillRef idx="3">
+            <a:schemeClr val="accent1"/>
+          </a:fillRef>
+          <a:effectRef idx="2">
+            <a:schemeClr val="accent1"/>
+          </a:effectRef>
+          <a:fontRef idx="minor">
+            <a:schemeClr val="lt1"/>
+          </a:fontRef>
+        </p:style>
+        <p:txBody>
+          <a:bodyPr rtlCol="0" anchor="ctr"/>
+          <a:lstStyle/>
+          <a:p>
+            <a:pPr algn="ctr"/>
+            <a:r>
+              <a:rPr sz="1200" b="1">
+                <a:solidFill>
+                  <a:srgbClr val="C84A1E"/>
+                </a:solidFill>
+              </a:rPr>
+              <a:t>04</a:t>
+            </a:r>
+          </a:p>
+        </p:txBody>
+      </p:sp>
+      <p:sp>
+        <p:nvSpPr>
+          <p:cNvPr id="18" name="TextBox 17"/>
+          <p:cNvSpPr txBox="1"/>
+          <p:nvPr/>
+        </p:nvSpPr>
+        <p:spPr>
+          <a:xfrm>
+            <a:off x="1234440" y="4553712"/>
+            <a:ext cx="6995160" cy="585216"/>
+          </a:xfrm>
+          <a:prstGeom prst="rect">
+            <a:avLst/>
+          </a:prstGeom>
+          <a:noFill/>
+        </p:spPr>
+        <p:txBody>
+          <a:bodyPr wrap="square">
+            <a:spAutoFit/>
+          </a:bodyPr>
+          <a:lstStyle/>
+          <a:p>
+            <a:r>
+              <a:rPr b="1" sz="1300">
+                <a:solidFill>
+                  <a:srgbClr val="1F2430"/>
+                </a:solidFill>
+              </a:rPr>
+              <a:t>Más colaboradores</a:t>
+            </a:r>
+          </a:p>
+          <a:p>
+            <a:r>
+              <a:rPr sz="1100">
+                <a:solidFill>
+                  <a:srgbClr val="6B7280"/>
+                </a:solidFill>
+              </a:rPr>
+              <a:t>Crecer el diccionario con aportes del equipo.</a:t>
             </a:r>
           </a:p>
         </p:txBody>
@@ -3631,7 +5217,7 @@
             <a:avLst/>
           </a:prstGeom>
           <a:solidFill>
-            <a:srgbClr val="0F1B3D"/>
+            <a:srgbClr val="E8622C"/>
           </a:solidFill>
           <a:ln>
             <a:noFill/>
@@ -3684,7 +5270,7 @@
           <a:p>
             <a:pPr algn="ctr"/>
             <a:r>
-              <a:rPr sz="6000" b="1">
+              <a:rPr sz="5800" b="1">
                 <a:solidFill>
                   <a:srgbClr val="FFFFFF"/>
                 </a:solidFill>
@@ -3715,14 +5301,58 @@
       <p:grpSpPr/>
       <p:sp>
         <p:nvSpPr>
-          <p:cNvPr id="2" name="TextBox 1"/>
+          <p:cNvPr id="2" name="Rectangle 1"/>
+          <p:cNvSpPr/>
+          <p:nvPr/>
+        </p:nvSpPr>
+        <p:spPr>
+          <a:xfrm>
+            <a:off x="548640" y="320040"/>
+            <a:ext cx="109728" cy="109728"/>
+          </a:xfrm>
+          <a:prstGeom prst="rect">
+            <a:avLst/>
+          </a:prstGeom>
+          <a:solidFill>
+            <a:srgbClr val="E8622C"/>
+          </a:solidFill>
+          <a:ln>
+            <a:noFill/>
+          </a:ln>
+          <a:effectLst/>
+        </p:spPr>
+        <p:style>
+          <a:lnRef idx="1">
+            <a:schemeClr val="accent1"/>
+          </a:lnRef>
+          <a:fillRef idx="3">
+            <a:schemeClr val="accent1"/>
+          </a:fillRef>
+          <a:effectRef idx="2">
+            <a:schemeClr val="accent1"/>
+          </a:effectRef>
+          <a:fontRef idx="minor">
+            <a:schemeClr val="lt1"/>
+          </a:fontRef>
+        </p:style>
+        <p:txBody>
+          <a:bodyPr rtlCol="0" anchor="ctr"/>
+          <a:lstStyle/>
+          <a:p>
+            <a:pPr algn="ctr"/>
+          </a:p>
+        </p:txBody>
+      </p:sp>
+      <p:sp>
+        <p:nvSpPr>
+          <p:cNvPr id="3" name="TextBox 2"/>
           <p:cNvSpPr txBox="1"/>
           <p:nvPr/>
         </p:nvSpPr>
         <p:spPr>
           <a:xfrm>
-            <a:off x="548640" y="365760"/>
-            <a:ext cx="5486400" cy="365760"/>
+            <a:off x="749808" y="256032"/>
+            <a:ext cx="1828800" cy="274320"/>
           </a:xfrm>
           <a:prstGeom prst="rect">
             <a:avLst/>
@@ -3737,27 +5367,71 @@
           <a:p>
             <a:pPr algn="l"/>
             <a:r>
-              <a:rPr sz="1300" b="1">
-                <a:solidFill>
-                  <a:srgbClr val="2563EB"/>
+              <a:rPr sz="1100" b="1">
+                <a:solidFill>
+                  <a:srgbClr val="6B7280"/>
                 </a:solidFill>
                 <a:latin typeface="Calibri"/>
               </a:rPr>
-              <a:t>EL PROBLEMA</a:t>
-            </a:r>
-          </a:p>
-        </p:txBody>
-      </p:sp>
-      <p:sp>
-        <p:nvSpPr>
-          <p:cNvPr id="3" name="TextBox 2"/>
+              <a:t>CALYPSO HUB</a:t>
+            </a:r>
+          </a:p>
+        </p:txBody>
+      </p:sp>
+      <p:sp>
+        <p:nvSpPr>
+          <p:cNvPr id="4" name="Rectangle 3"/>
+          <p:cNvSpPr/>
+          <p:nvPr/>
+        </p:nvSpPr>
+        <p:spPr>
+          <a:xfrm>
+            <a:off x="11612880" y="0"/>
+            <a:ext cx="576072" cy="502920"/>
+          </a:xfrm>
+          <a:prstGeom prst="rect">
+            <a:avLst/>
+          </a:prstGeom>
+          <a:solidFill>
+            <a:srgbClr val="E8622C"/>
+          </a:solidFill>
+          <a:ln>
+            <a:noFill/>
+          </a:ln>
+          <a:effectLst/>
+        </p:spPr>
+        <p:style>
+          <a:lnRef idx="1">
+            <a:schemeClr val="accent1"/>
+          </a:lnRef>
+          <a:fillRef idx="3">
+            <a:schemeClr val="accent1"/>
+          </a:fillRef>
+          <a:effectRef idx="2">
+            <a:schemeClr val="accent1"/>
+          </a:effectRef>
+          <a:fontRef idx="minor">
+            <a:schemeClr val="lt1"/>
+          </a:fontRef>
+        </p:style>
+        <p:txBody>
+          <a:bodyPr rtlCol="0" anchor="ctr"/>
+          <a:lstStyle/>
+          <a:p>
+            <a:pPr algn="ctr"/>
+          </a:p>
+        </p:txBody>
+      </p:sp>
+      <p:sp>
+        <p:nvSpPr>
+          <p:cNvPr id="5" name="TextBox 4"/>
           <p:cNvSpPr txBox="1"/>
           <p:nvPr/>
         </p:nvSpPr>
         <p:spPr>
           <a:xfrm>
-            <a:off x="548640" y="685800"/>
-            <a:ext cx="10058400" cy="731520"/>
+            <a:off x="548640" y="868680"/>
+            <a:ext cx="5486400" cy="320040"/>
           </a:xfrm>
           <a:prstGeom prst="rect">
             <a:avLst/>
@@ -3772,27 +5446,27 @@
           <a:p>
             <a:pPr algn="l"/>
             <a:r>
-              <a:rPr sz="3000" b="1">
-                <a:solidFill>
-                  <a:srgbClr val="0F1B3D"/>
+              <a:rPr sz="1200" b="1">
+                <a:solidFill>
+                  <a:srgbClr val="E8622C"/>
                 </a:solidFill>
                 <a:latin typeface="Calibri"/>
               </a:rPr>
-              <a:t>Calypso es difícil de aprender</a:t>
-            </a:r>
-          </a:p>
-        </p:txBody>
-      </p:sp>
-      <p:sp>
-        <p:nvSpPr>
-          <p:cNvPr id="4" name="TextBox 3"/>
+              <a:t>EL PROBLEMA</a:t>
+            </a:r>
+          </a:p>
+        </p:txBody>
+      </p:sp>
+      <p:sp>
+        <p:nvSpPr>
+          <p:cNvPr id="6" name="TextBox 5"/>
           <p:cNvSpPr txBox="1"/>
           <p:nvPr/>
         </p:nvSpPr>
         <p:spPr>
           <a:xfrm>
-            <a:off x="548640" y="1554480"/>
-            <a:ext cx="10789920" cy="4114800"/>
+            <a:off x="548640" y="1188720"/>
+            <a:ext cx="10515600" cy="640080"/>
           </a:xfrm>
           <a:prstGeom prst="rect">
             <a:avLst/>
@@ -3805,51 +5479,438 @@
           </a:bodyPr>
           <a:lstStyle/>
           <a:p>
-            <a:pPr>
-              <a:spcAft>
-                <a:spcPts val="1000"/>
-              </a:spcAft>
-              <a:defRPr sz="2000">
-                <a:solidFill>
-                  <a:srgbClr val="475569"/>
+            <a:pPr algn="l"/>
+            <a:r>
+              <a:rPr sz="2800" b="1">
+                <a:solidFill>
+                  <a:srgbClr val="1F2430"/>
                 </a:solidFill>
                 <a:latin typeface="Calibri"/>
-              </a:defRPr>
-            </a:pPr>
-            <a:r>
-              <a:t>•  Calypso es una plataforma compleja, con una curva de aprendizaje alta para nuevos analistas y consultores.</a:t>
-            </a:r>
-          </a:p>
-          <a:p>
-            <a:pPr>
-              <a:spcAft>
-                <a:spcPts val="1000"/>
-              </a:spcAft>
-              <a:defRPr sz="2000">
-                <a:solidFill>
-                  <a:srgbClr val="475569"/>
-                </a:solidFill>
-                <a:latin typeface="Calibri"/>
-              </a:defRPr>
-            </a:pPr>
-            <a:r>
-              <a:t>•  Los conceptos financieros que la sustentan (Forward FX, NDF, tasas, pricing) no son intuitivos para quien no tiene formación financiera previa.</a:t>
-            </a:r>
-          </a:p>
-          <a:p>
-            <a:pPr>
-              <a:spcAft>
-                <a:spcPts val="1000"/>
-              </a:spcAft>
-              <a:defRPr sz="2000">
-                <a:solidFill>
-                  <a:srgbClr val="475569"/>
-                </a:solidFill>
-                <a:latin typeface="Calibri"/>
-              </a:defRPr>
-            </a:pPr>
-            <a:r>
-              <a:t>•  No existe hoy una herramienta interna interactiva para capacitar en estos conceptos — el conocimiento vive disperso en documentos y personas.</a:t>
+              </a:rPr>
+              <a:t>Calypso es difícil de aprender</a:t>
+            </a:r>
+          </a:p>
+        </p:txBody>
+      </p:sp>
+      <p:sp>
+        <p:nvSpPr>
+          <p:cNvPr id="7" name="Rounded Rectangle 6"/>
+          <p:cNvSpPr/>
+          <p:nvPr/>
+        </p:nvSpPr>
+        <p:spPr>
+          <a:xfrm>
+            <a:off x="548640" y="1965960"/>
+            <a:ext cx="7863840" cy="713232"/>
+          </a:xfrm>
+          <a:prstGeom prst="roundRect">
+            <a:avLst/>
+          </a:prstGeom>
+          <a:solidFill>
+            <a:srgbClr val="FFFFFF"/>
+          </a:solidFill>
+          <a:ln w="12700">
+            <a:solidFill>
+              <a:srgbClr val="ECE7E2"/>
+            </a:solidFill>
+          </a:ln>
+          <a:effectLst/>
+        </p:spPr>
+        <p:style>
+          <a:lnRef idx="1">
+            <a:schemeClr val="accent1"/>
+          </a:lnRef>
+          <a:fillRef idx="3">
+            <a:schemeClr val="accent1"/>
+          </a:fillRef>
+          <a:effectRef idx="2">
+            <a:schemeClr val="accent1"/>
+          </a:effectRef>
+          <a:fontRef idx="minor">
+            <a:schemeClr val="lt1"/>
+          </a:fontRef>
+        </p:style>
+        <p:txBody>
+          <a:bodyPr rtlCol="0" anchor="ctr"/>
+          <a:lstStyle/>
+          <a:p>
+            <a:pPr algn="ctr"/>
+          </a:p>
+        </p:txBody>
+      </p:sp>
+      <p:sp>
+        <p:nvSpPr>
+          <p:cNvPr id="8" name="Rounded Rectangle 7"/>
+          <p:cNvSpPr/>
+          <p:nvPr/>
+        </p:nvSpPr>
+        <p:spPr>
+          <a:xfrm>
+            <a:off x="685800" y="2075688"/>
+            <a:ext cx="411480" cy="365760"/>
+          </a:xfrm>
+          <a:prstGeom prst="roundRect">
+            <a:avLst/>
+          </a:prstGeom>
+          <a:solidFill>
+            <a:srgbClr val="FBEAE2"/>
+          </a:solidFill>
+          <a:ln>
+            <a:noFill/>
+          </a:ln>
+          <a:effectLst/>
+        </p:spPr>
+        <p:style>
+          <a:lnRef idx="1">
+            <a:schemeClr val="accent1"/>
+          </a:lnRef>
+          <a:fillRef idx="3">
+            <a:schemeClr val="accent1"/>
+          </a:fillRef>
+          <a:effectRef idx="2">
+            <a:schemeClr val="accent1"/>
+          </a:effectRef>
+          <a:fontRef idx="minor">
+            <a:schemeClr val="lt1"/>
+          </a:fontRef>
+        </p:style>
+        <p:txBody>
+          <a:bodyPr rtlCol="0" anchor="ctr"/>
+          <a:lstStyle/>
+          <a:p>
+            <a:pPr algn="ctr"/>
+            <a:r>
+              <a:rPr sz="1200" b="1">
+                <a:solidFill>
+                  <a:srgbClr val="C84A1E"/>
+                </a:solidFill>
+              </a:rPr>
+              <a:t>01</a:t>
+            </a:r>
+          </a:p>
+        </p:txBody>
+      </p:sp>
+      <p:sp>
+        <p:nvSpPr>
+          <p:cNvPr id="9" name="TextBox 8"/>
+          <p:cNvSpPr txBox="1"/>
+          <p:nvPr/>
+        </p:nvSpPr>
+        <p:spPr>
+          <a:xfrm>
+            <a:off x="1234440" y="2029968"/>
+            <a:ext cx="6995160" cy="585216"/>
+          </a:xfrm>
+          <a:prstGeom prst="rect">
+            <a:avLst/>
+          </a:prstGeom>
+          <a:noFill/>
+        </p:spPr>
+        <p:txBody>
+          <a:bodyPr wrap="square">
+            <a:spAutoFit/>
+          </a:bodyPr>
+          <a:lstStyle/>
+          <a:p>
+            <a:r>
+              <a:rPr b="1" sz="1300">
+                <a:solidFill>
+                  <a:srgbClr val="1F2430"/>
+                </a:solidFill>
+              </a:rPr>
+              <a:t>Curva de aprendizaje alta</a:t>
+            </a:r>
+          </a:p>
+          <a:p>
+            <a:r>
+              <a:rPr sz="1100">
+                <a:solidFill>
+                  <a:srgbClr val="6B7280"/>
+                </a:solidFill>
+              </a:rPr>
+              <a:t>Calypso es una plataforma compleja para nuevos analistas y consultores.</a:t>
+            </a:r>
+          </a:p>
+        </p:txBody>
+      </p:sp>
+      <p:sp>
+        <p:nvSpPr>
+          <p:cNvPr id="10" name="Rounded Rectangle 9"/>
+          <p:cNvSpPr/>
+          <p:nvPr/>
+        </p:nvSpPr>
+        <p:spPr>
+          <a:xfrm>
+            <a:off x="548640" y="2807208"/>
+            <a:ext cx="7863840" cy="713232"/>
+          </a:xfrm>
+          <a:prstGeom prst="roundRect">
+            <a:avLst/>
+          </a:prstGeom>
+          <a:solidFill>
+            <a:srgbClr val="FFFFFF"/>
+          </a:solidFill>
+          <a:ln w="12700">
+            <a:solidFill>
+              <a:srgbClr val="ECE7E2"/>
+            </a:solidFill>
+          </a:ln>
+          <a:effectLst/>
+        </p:spPr>
+        <p:style>
+          <a:lnRef idx="1">
+            <a:schemeClr val="accent1"/>
+          </a:lnRef>
+          <a:fillRef idx="3">
+            <a:schemeClr val="accent1"/>
+          </a:fillRef>
+          <a:effectRef idx="2">
+            <a:schemeClr val="accent1"/>
+          </a:effectRef>
+          <a:fontRef idx="minor">
+            <a:schemeClr val="lt1"/>
+          </a:fontRef>
+        </p:style>
+        <p:txBody>
+          <a:bodyPr rtlCol="0" anchor="ctr"/>
+          <a:lstStyle/>
+          <a:p>
+            <a:pPr algn="ctr"/>
+          </a:p>
+        </p:txBody>
+      </p:sp>
+      <p:sp>
+        <p:nvSpPr>
+          <p:cNvPr id="11" name="Rounded Rectangle 10"/>
+          <p:cNvSpPr/>
+          <p:nvPr/>
+        </p:nvSpPr>
+        <p:spPr>
+          <a:xfrm>
+            <a:off x="685800" y="2916936"/>
+            <a:ext cx="411480" cy="365760"/>
+          </a:xfrm>
+          <a:prstGeom prst="roundRect">
+            <a:avLst/>
+          </a:prstGeom>
+          <a:solidFill>
+            <a:srgbClr val="FBEAE2"/>
+          </a:solidFill>
+          <a:ln>
+            <a:noFill/>
+          </a:ln>
+          <a:effectLst/>
+        </p:spPr>
+        <p:style>
+          <a:lnRef idx="1">
+            <a:schemeClr val="accent1"/>
+          </a:lnRef>
+          <a:fillRef idx="3">
+            <a:schemeClr val="accent1"/>
+          </a:fillRef>
+          <a:effectRef idx="2">
+            <a:schemeClr val="accent1"/>
+          </a:effectRef>
+          <a:fontRef idx="minor">
+            <a:schemeClr val="lt1"/>
+          </a:fontRef>
+        </p:style>
+        <p:txBody>
+          <a:bodyPr rtlCol="0" anchor="ctr"/>
+          <a:lstStyle/>
+          <a:p>
+            <a:pPr algn="ctr"/>
+            <a:r>
+              <a:rPr sz="1200" b="1">
+                <a:solidFill>
+                  <a:srgbClr val="C84A1E"/>
+                </a:solidFill>
+              </a:rPr>
+              <a:t>02</a:t>
+            </a:r>
+          </a:p>
+        </p:txBody>
+      </p:sp>
+      <p:sp>
+        <p:nvSpPr>
+          <p:cNvPr id="12" name="TextBox 11"/>
+          <p:cNvSpPr txBox="1"/>
+          <p:nvPr/>
+        </p:nvSpPr>
+        <p:spPr>
+          <a:xfrm>
+            <a:off x="1234440" y="2871216"/>
+            <a:ext cx="6995160" cy="585216"/>
+          </a:xfrm>
+          <a:prstGeom prst="rect">
+            <a:avLst/>
+          </a:prstGeom>
+          <a:noFill/>
+        </p:spPr>
+        <p:txBody>
+          <a:bodyPr wrap="square">
+            <a:spAutoFit/>
+          </a:bodyPr>
+          <a:lstStyle/>
+          <a:p>
+            <a:r>
+              <a:rPr b="1" sz="1300">
+                <a:solidFill>
+                  <a:srgbClr val="1F2430"/>
+                </a:solidFill>
+              </a:rPr>
+              <a:t>Conceptos poco intuitivos</a:t>
+            </a:r>
+          </a:p>
+          <a:p>
+            <a:r>
+              <a:rPr sz="1100">
+                <a:solidFill>
+                  <a:srgbClr val="6B7280"/>
+                </a:solidFill>
+              </a:rPr>
+              <a:t>Forward FX, NDF, tasas y pricing no son fáciles de entender sin formación financiera previa.</a:t>
+            </a:r>
+          </a:p>
+        </p:txBody>
+      </p:sp>
+      <p:sp>
+        <p:nvSpPr>
+          <p:cNvPr id="13" name="Rounded Rectangle 12"/>
+          <p:cNvSpPr/>
+          <p:nvPr/>
+        </p:nvSpPr>
+        <p:spPr>
+          <a:xfrm>
+            <a:off x="548640" y="3648456"/>
+            <a:ext cx="7863840" cy="713232"/>
+          </a:xfrm>
+          <a:prstGeom prst="roundRect">
+            <a:avLst/>
+          </a:prstGeom>
+          <a:solidFill>
+            <a:srgbClr val="FFFFFF"/>
+          </a:solidFill>
+          <a:ln w="12700">
+            <a:solidFill>
+              <a:srgbClr val="ECE7E2"/>
+            </a:solidFill>
+          </a:ln>
+          <a:effectLst/>
+        </p:spPr>
+        <p:style>
+          <a:lnRef idx="1">
+            <a:schemeClr val="accent1"/>
+          </a:lnRef>
+          <a:fillRef idx="3">
+            <a:schemeClr val="accent1"/>
+          </a:fillRef>
+          <a:effectRef idx="2">
+            <a:schemeClr val="accent1"/>
+          </a:effectRef>
+          <a:fontRef idx="minor">
+            <a:schemeClr val="lt1"/>
+          </a:fontRef>
+        </p:style>
+        <p:txBody>
+          <a:bodyPr rtlCol="0" anchor="ctr"/>
+          <a:lstStyle/>
+          <a:p>
+            <a:pPr algn="ctr"/>
+          </a:p>
+        </p:txBody>
+      </p:sp>
+      <p:sp>
+        <p:nvSpPr>
+          <p:cNvPr id="14" name="Rounded Rectangle 13"/>
+          <p:cNvSpPr/>
+          <p:nvPr/>
+        </p:nvSpPr>
+        <p:spPr>
+          <a:xfrm>
+            <a:off x="685800" y="3758184"/>
+            <a:ext cx="411480" cy="365760"/>
+          </a:xfrm>
+          <a:prstGeom prst="roundRect">
+            <a:avLst/>
+          </a:prstGeom>
+          <a:solidFill>
+            <a:srgbClr val="FBEAE2"/>
+          </a:solidFill>
+          <a:ln>
+            <a:noFill/>
+          </a:ln>
+          <a:effectLst/>
+        </p:spPr>
+        <p:style>
+          <a:lnRef idx="1">
+            <a:schemeClr val="accent1"/>
+          </a:lnRef>
+          <a:fillRef idx="3">
+            <a:schemeClr val="accent1"/>
+          </a:fillRef>
+          <a:effectRef idx="2">
+            <a:schemeClr val="accent1"/>
+          </a:effectRef>
+          <a:fontRef idx="minor">
+            <a:schemeClr val="lt1"/>
+          </a:fontRef>
+        </p:style>
+        <p:txBody>
+          <a:bodyPr rtlCol="0" anchor="ctr"/>
+          <a:lstStyle/>
+          <a:p>
+            <a:pPr algn="ctr"/>
+            <a:r>
+              <a:rPr sz="1200" b="1">
+                <a:solidFill>
+                  <a:srgbClr val="C84A1E"/>
+                </a:solidFill>
+              </a:rPr>
+              <a:t>03</a:t>
+            </a:r>
+          </a:p>
+        </p:txBody>
+      </p:sp>
+      <p:sp>
+        <p:nvSpPr>
+          <p:cNvPr id="15" name="TextBox 14"/>
+          <p:cNvSpPr txBox="1"/>
+          <p:nvPr/>
+        </p:nvSpPr>
+        <p:spPr>
+          <a:xfrm>
+            <a:off x="1234440" y="3712464"/>
+            <a:ext cx="6995160" cy="585216"/>
+          </a:xfrm>
+          <a:prstGeom prst="rect">
+            <a:avLst/>
+          </a:prstGeom>
+          <a:noFill/>
+        </p:spPr>
+        <p:txBody>
+          <a:bodyPr wrap="square">
+            <a:spAutoFit/>
+          </a:bodyPr>
+          <a:lstStyle/>
+          <a:p>
+            <a:r>
+              <a:rPr b="1" sz="1300">
+                <a:solidFill>
+                  <a:srgbClr val="1F2430"/>
+                </a:solidFill>
+              </a:rPr>
+              <a:t>Sin herramienta interna</a:t>
+            </a:r>
+          </a:p>
+          <a:p>
+            <a:r>
+              <a:rPr sz="1100">
+                <a:solidFill>
+                  <a:srgbClr val="6B7280"/>
+                </a:solidFill>
+              </a:rPr>
+              <a:t>El conocimiento vive disperso en documentos y personas, no en una herramienta interactiva.</a:t>
             </a:r>
           </a:p>
         </p:txBody>
@@ -3874,14 +5935,58 @@
       <p:grpSpPr/>
       <p:sp>
         <p:nvSpPr>
-          <p:cNvPr id="2" name="TextBox 1"/>
+          <p:cNvPr id="2" name="Rectangle 1"/>
+          <p:cNvSpPr/>
+          <p:nvPr/>
+        </p:nvSpPr>
+        <p:spPr>
+          <a:xfrm>
+            <a:off x="548640" y="320040"/>
+            <a:ext cx="109728" cy="109728"/>
+          </a:xfrm>
+          <a:prstGeom prst="rect">
+            <a:avLst/>
+          </a:prstGeom>
+          <a:solidFill>
+            <a:srgbClr val="E8622C"/>
+          </a:solidFill>
+          <a:ln>
+            <a:noFill/>
+          </a:ln>
+          <a:effectLst/>
+        </p:spPr>
+        <p:style>
+          <a:lnRef idx="1">
+            <a:schemeClr val="accent1"/>
+          </a:lnRef>
+          <a:fillRef idx="3">
+            <a:schemeClr val="accent1"/>
+          </a:fillRef>
+          <a:effectRef idx="2">
+            <a:schemeClr val="accent1"/>
+          </a:effectRef>
+          <a:fontRef idx="minor">
+            <a:schemeClr val="lt1"/>
+          </a:fontRef>
+        </p:style>
+        <p:txBody>
+          <a:bodyPr rtlCol="0" anchor="ctr"/>
+          <a:lstStyle/>
+          <a:p>
+            <a:pPr algn="ctr"/>
+          </a:p>
+        </p:txBody>
+      </p:sp>
+      <p:sp>
+        <p:nvSpPr>
+          <p:cNvPr id="3" name="TextBox 2"/>
           <p:cNvSpPr txBox="1"/>
           <p:nvPr/>
         </p:nvSpPr>
         <p:spPr>
           <a:xfrm>
-            <a:off x="548640" y="365760"/>
-            <a:ext cx="5486400" cy="365760"/>
+            <a:off x="749808" y="256032"/>
+            <a:ext cx="1828800" cy="274320"/>
           </a:xfrm>
           <a:prstGeom prst="rect">
             <a:avLst/>
@@ -3896,27 +6001,71 @@
           <a:p>
             <a:pPr algn="l"/>
             <a:r>
-              <a:rPr sz="1300" b="1">
-                <a:solidFill>
-                  <a:srgbClr val="2563EB"/>
+              <a:rPr sz="1100" b="1">
+                <a:solidFill>
+                  <a:srgbClr val="6B7280"/>
                 </a:solidFill>
                 <a:latin typeface="Calibri"/>
               </a:rPr>
-              <a:t>LA SOLUCIÓN</a:t>
-            </a:r>
-          </a:p>
-        </p:txBody>
-      </p:sp>
-      <p:sp>
-        <p:nvSpPr>
-          <p:cNvPr id="3" name="TextBox 2"/>
+              <a:t>CALYPSO HUB</a:t>
+            </a:r>
+          </a:p>
+        </p:txBody>
+      </p:sp>
+      <p:sp>
+        <p:nvSpPr>
+          <p:cNvPr id="4" name="Rectangle 3"/>
+          <p:cNvSpPr/>
+          <p:nvPr/>
+        </p:nvSpPr>
+        <p:spPr>
+          <a:xfrm>
+            <a:off x="11612880" y="0"/>
+            <a:ext cx="576072" cy="502920"/>
+          </a:xfrm>
+          <a:prstGeom prst="rect">
+            <a:avLst/>
+          </a:prstGeom>
+          <a:solidFill>
+            <a:srgbClr val="E8622C"/>
+          </a:solidFill>
+          <a:ln>
+            <a:noFill/>
+          </a:ln>
+          <a:effectLst/>
+        </p:spPr>
+        <p:style>
+          <a:lnRef idx="1">
+            <a:schemeClr val="accent1"/>
+          </a:lnRef>
+          <a:fillRef idx="3">
+            <a:schemeClr val="accent1"/>
+          </a:fillRef>
+          <a:effectRef idx="2">
+            <a:schemeClr val="accent1"/>
+          </a:effectRef>
+          <a:fontRef idx="minor">
+            <a:schemeClr val="lt1"/>
+          </a:fontRef>
+        </p:style>
+        <p:txBody>
+          <a:bodyPr rtlCol="0" anchor="ctr"/>
+          <a:lstStyle/>
+          <a:p>
+            <a:pPr algn="ctr"/>
+          </a:p>
+        </p:txBody>
+      </p:sp>
+      <p:sp>
+        <p:nvSpPr>
+          <p:cNvPr id="5" name="TextBox 4"/>
           <p:cNvSpPr txBox="1"/>
           <p:nvPr/>
         </p:nvSpPr>
         <p:spPr>
           <a:xfrm>
-            <a:off x="548640" y="685800"/>
-            <a:ext cx="10058400" cy="731520"/>
+            <a:off x="548640" y="868680"/>
+            <a:ext cx="5486400" cy="320040"/>
           </a:xfrm>
           <a:prstGeom prst="rect">
             <a:avLst/>
@@ -3931,27 +6080,71 @@
           <a:p>
             <a:pPr algn="l"/>
             <a:r>
-              <a:rPr sz="3000" b="1">
-                <a:solidFill>
-                  <a:srgbClr val="0F1B3D"/>
+              <a:rPr sz="1200" b="1">
+                <a:solidFill>
+                  <a:srgbClr val="E8622C"/>
                 </a:solidFill>
                 <a:latin typeface="Calibri"/>
               </a:rPr>
-              <a:t>Calypso Knowledge Hub</a:t>
-            </a:r>
-          </a:p>
-        </p:txBody>
-      </p:sp>
-      <p:sp>
-        <p:nvSpPr>
-          <p:cNvPr id="4" name="TextBox 3"/>
+              <a:t>LA SOLUCIÓN</a:t>
+            </a:r>
+          </a:p>
+        </p:txBody>
+      </p:sp>
+      <p:sp>
+        <p:nvSpPr>
+          <p:cNvPr id="6" name="Rounded Rectangle 5"/>
+          <p:cNvSpPr/>
+          <p:nvPr/>
+        </p:nvSpPr>
+        <p:spPr>
+          <a:xfrm>
+            <a:off x="548640" y="1188720"/>
+            <a:ext cx="11064240" cy="4937760"/>
+          </a:xfrm>
+          <a:prstGeom prst="roundRect">
+            <a:avLst/>
+          </a:prstGeom>
+          <a:solidFill>
+            <a:srgbClr val="E8622C"/>
+          </a:solidFill>
+          <a:ln>
+            <a:noFill/>
+          </a:ln>
+          <a:effectLst/>
+        </p:spPr>
+        <p:style>
+          <a:lnRef idx="1">
+            <a:schemeClr val="accent1"/>
+          </a:lnRef>
+          <a:fillRef idx="3">
+            <a:schemeClr val="accent1"/>
+          </a:fillRef>
+          <a:effectRef idx="2">
+            <a:schemeClr val="accent1"/>
+          </a:effectRef>
+          <a:fontRef idx="minor">
+            <a:schemeClr val="lt1"/>
+          </a:fontRef>
+        </p:style>
+        <p:txBody>
+          <a:bodyPr rtlCol="0" anchor="ctr"/>
+          <a:lstStyle/>
+          <a:p>
+            <a:pPr algn="ctr"/>
+          </a:p>
+        </p:txBody>
+      </p:sp>
+      <p:sp>
+        <p:nvSpPr>
+          <p:cNvPr id="7" name="TextBox 6"/>
           <p:cNvSpPr txBox="1"/>
           <p:nvPr/>
         </p:nvSpPr>
         <p:spPr>
           <a:xfrm>
-            <a:off x="548640" y="1554480"/>
-            <a:ext cx="10789920" cy="4114800"/>
+            <a:off x="914400" y="1554480"/>
+            <a:ext cx="6583680" cy="548640"/>
           </a:xfrm>
           <a:prstGeom prst="rect">
             <a:avLst/>
@@ -3964,51 +6157,412 @@
           </a:bodyPr>
           <a:lstStyle/>
           <a:p>
+            <a:pPr algn="l"/>
+            <a:r>
+              <a:rPr sz="2600" b="1">
+                <a:solidFill>
+                  <a:srgbClr val="FFFFFF"/>
+                </a:solidFill>
+                <a:latin typeface="Calibri"/>
+              </a:rPr>
+              <a:t>Calypso Knowledge Hub</a:t>
+            </a:r>
+          </a:p>
+        </p:txBody>
+      </p:sp>
+      <p:sp>
+        <p:nvSpPr>
+          <p:cNvPr id="8" name="TextBox 7"/>
+          <p:cNvSpPr txBox="1"/>
+          <p:nvPr/>
+        </p:nvSpPr>
+        <p:spPr>
+          <a:xfrm>
+            <a:off x="914400" y="2194560"/>
+            <a:ext cx="6583680" cy="3474720"/>
+          </a:xfrm>
+          <a:prstGeom prst="rect">
+            <a:avLst/>
+          </a:prstGeom>
+          <a:noFill/>
+        </p:spPr>
+        <p:txBody>
+          <a:bodyPr wrap="square">
+            <a:spAutoFit/>
+          </a:bodyPr>
+          <a:lstStyle/>
+          <a:p>
             <a:pPr>
               <a:spcAft>
-                <a:spcPts val="1000"/>
+                <a:spcPts val="600"/>
               </a:spcAft>
-              <a:defRPr sz="2000">
-                <a:solidFill>
-                  <a:srgbClr val="475569"/>
+            </a:pPr>
+            <a:r>
+              <a:rPr sz="1500">
+                <a:solidFill>
+                  <a:srgbClr val="FFFFFF"/>
                 </a:solidFill>
                 <a:latin typeface="Calibri"/>
-              </a:defRPr>
-            </a:pPr>
-            <a:r>
-              <a:t>•  Plataforma de capacitación interactiva construida con IA agéntica (Claude Code).</a:t>
+              </a:rPr>
+              <a:t>Plataforma de capacitación interactiva construida con IA agéntica (Claude Code). Esta demo de hackatón corre 100% local, sin backend ni costos de infraestructura — pensada para uso interno de la empresa.</a:t>
             </a:r>
           </a:p>
           <a:p>
             <a:pPr>
               <a:spcAft>
-                <a:spcPts val="1000"/>
+                <a:spcPts val="600"/>
               </a:spcAft>
-              <a:defRPr sz="2000">
-                <a:solidFill>
-                  <a:srgbClr val="475569"/>
+            </a:pPr>
+            <a:r>
+              <a:rPr sz="1500">
+                <a:solidFill>
+                  <a:srgbClr val="FFFFFF"/>
                 </a:solidFill>
                 <a:latin typeface="Calibri"/>
-              </a:defRPr>
-            </a:pPr>
-            <a:r>
-              <a:t>•  Esta demo de hackatón corre 100% local, sin backend ni costos de infraestructura — pensada para uso interno de la empresa.</a:t>
-            </a:r>
-          </a:p>
-          <a:p>
-            <a:pPr>
-              <a:spcAft>
-                <a:spcPts val="1000"/>
-              </a:spcAft>
-              <a:defRPr sz="2000">
-                <a:solidFill>
-                  <a:srgbClr val="475569"/>
+              </a:rPr>
+              <a:t>La arquitectura ya está preparada para evolucionar hacia un back office real (usuarios, persistencia, versionado de contenido) cuando se quiera llevar a producción.</a:t>
+            </a:r>
+          </a:p>
+        </p:txBody>
+      </p:sp>
+      <p:sp>
+        <p:nvSpPr>
+          <p:cNvPr id="9" name="Rounded Rectangle 8"/>
+          <p:cNvSpPr/>
+          <p:nvPr/>
+        </p:nvSpPr>
+        <p:spPr>
+          <a:xfrm>
+            <a:off x="7955279" y="1691640"/>
+            <a:ext cx="3200400" cy="1051560"/>
+          </a:xfrm>
+          <a:prstGeom prst="roundRect">
+            <a:avLst/>
+          </a:prstGeom>
+          <a:solidFill>
+            <a:srgbClr val="F08A5E"/>
+          </a:solidFill>
+          <a:ln>
+            <a:noFill/>
+          </a:ln>
+          <a:effectLst/>
+        </p:spPr>
+        <p:style>
+          <a:lnRef idx="1">
+            <a:schemeClr val="accent1"/>
+          </a:lnRef>
+          <a:fillRef idx="3">
+            <a:schemeClr val="accent1"/>
+          </a:fillRef>
+          <a:effectRef idx="2">
+            <a:schemeClr val="accent1"/>
+          </a:effectRef>
+          <a:fontRef idx="minor">
+            <a:schemeClr val="lt1"/>
+          </a:fontRef>
+        </p:style>
+        <p:txBody>
+          <a:bodyPr rtlCol="0" anchor="ctr"/>
+          <a:lstStyle/>
+          <a:p>
+            <a:pPr algn="ctr"/>
+          </a:p>
+        </p:txBody>
+      </p:sp>
+      <p:sp>
+        <p:nvSpPr>
+          <p:cNvPr id="10" name="TextBox 9"/>
+          <p:cNvSpPr txBox="1"/>
+          <p:nvPr/>
+        </p:nvSpPr>
+        <p:spPr>
+          <a:xfrm>
+            <a:off x="8183879" y="1764792"/>
+            <a:ext cx="2743200" cy="457200"/>
+          </a:xfrm>
+          <a:prstGeom prst="rect">
+            <a:avLst/>
+          </a:prstGeom>
+          <a:noFill/>
+        </p:spPr>
+        <p:txBody>
+          <a:bodyPr wrap="square">
+            <a:spAutoFit/>
+          </a:bodyPr>
+          <a:lstStyle/>
+          <a:p>
+            <a:pPr algn="l"/>
+            <a:r>
+              <a:rPr sz="2200" b="1">
+                <a:solidFill>
+                  <a:srgbClr val="FFFFFF"/>
                 </a:solidFill>
                 <a:latin typeface="Calibri"/>
-              </a:defRPr>
-            </a:pPr>
-            <a:r>
-              <a:t>•  La arquitectura ya está preparada para evolucionar hacia un back office real (usuarios, persistencia, versionado de contenido) cuando se quiera llevar a producción.</a:t>
+              </a:rPr>
+              <a:t>4</a:t>
+            </a:r>
+          </a:p>
+        </p:txBody>
+      </p:sp>
+      <p:sp>
+        <p:nvSpPr>
+          <p:cNvPr id="11" name="TextBox 10"/>
+          <p:cNvSpPr txBox="1"/>
+          <p:nvPr/>
+        </p:nvSpPr>
+        <p:spPr>
+          <a:xfrm>
+            <a:off x="8183879" y="2258568"/>
+            <a:ext cx="2743200" cy="365760"/>
+          </a:xfrm>
+          <a:prstGeom prst="rect">
+            <a:avLst/>
+          </a:prstGeom>
+          <a:noFill/>
+        </p:spPr>
+        <p:txBody>
+          <a:bodyPr wrap="square">
+            <a:spAutoFit/>
+          </a:bodyPr>
+          <a:lstStyle/>
+          <a:p>
+            <a:pPr algn="l"/>
+            <a:r>
+              <a:rPr sz="1100" b="0">
+                <a:solidFill>
+                  <a:srgbClr val="FFFFFF"/>
+                </a:solidFill>
+                <a:latin typeface="Calibri"/>
+              </a:rPr>
+              <a:t>Módulos funcionales</a:t>
+            </a:r>
+          </a:p>
+        </p:txBody>
+      </p:sp>
+      <p:sp>
+        <p:nvSpPr>
+          <p:cNvPr id="12" name="Rounded Rectangle 11"/>
+          <p:cNvSpPr/>
+          <p:nvPr/>
+        </p:nvSpPr>
+        <p:spPr>
+          <a:xfrm>
+            <a:off x="7955279" y="2926080"/>
+            <a:ext cx="3200400" cy="1051560"/>
+          </a:xfrm>
+          <a:prstGeom prst="roundRect">
+            <a:avLst/>
+          </a:prstGeom>
+          <a:solidFill>
+            <a:srgbClr val="F08A5E"/>
+          </a:solidFill>
+          <a:ln>
+            <a:noFill/>
+          </a:ln>
+          <a:effectLst/>
+        </p:spPr>
+        <p:style>
+          <a:lnRef idx="1">
+            <a:schemeClr val="accent1"/>
+          </a:lnRef>
+          <a:fillRef idx="3">
+            <a:schemeClr val="accent1"/>
+          </a:fillRef>
+          <a:effectRef idx="2">
+            <a:schemeClr val="accent1"/>
+          </a:effectRef>
+          <a:fontRef idx="minor">
+            <a:schemeClr val="lt1"/>
+          </a:fontRef>
+        </p:style>
+        <p:txBody>
+          <a:bodyPr rtlCol="0" anchor="ctr"/>
+          <a:lstStyle/>
+          <a:p>
+            <a:pPr algn="ctr"/>
+          </a:p>
+        </p:txBody>
+      </p:sp>
+      <p:sp>
+        <p:nvSpPr>
+          <p:cNvPr id="13" name="TextBox 12"/>
+          <p:cNvSpPr txBox="1"/>
+          <p:nvPr/>
+        </p:nvSpPr>
+        <p:spPr>
+          <a:xfrm>
+            <a:off x="8183879" y="2999232"/>
+            <a:ext cx="2743200" cy="457200"/>
+          </a:xfrm>
+          <a:prstGeom prst="rect">
+            <a:avLst/>
+          </a:prstGeom>
+          <a:noFill/>
+        </p:spPr>
+        <p:txBody>
+          <a:bodyPr wrap="square">
+            <a:spAutoFit/>
+          </a:bodyPr>
+          <a:lstStyle/>
+          <a:p>
+            <a:pPr algn="l"/>
+            <a:r>
+              <a:rPr sz="2200" b="1">
+                <a:solidFill>
+                  <a:srgbClr val="FFFFFF"/>
+                </a:solidFill>
+                <a:latin typeface="Calibri"/>
+              </a:rPr>
+              <a:t>100%</a:t>
+            </a:r>
+          </a:p>
+        </p:txBody>
+      </p:sp>
+      <p:sp>
+        <p:nvSpPr>
+          <p:cNvPr id="14" name="TextBox 13"/>
+          <p:cNvSpPr txBox="1"/>
+          <p:nvPr/>
+        </p:nvSpPr>
+        <p:spPr>
+          <a:xfrm>
+            <a:off x="8183879" y="3493008"/>
+            <a:ext cx="2743200" cy="365760"/>
+          </a:xfrm>
+          <a:prstGeom prst="rect">
+            <a:avLst/>
+          </a:prstGeom>
+          <a:noFill/>
+        </p:spPr>
+        <p:txBody>
+          <a:bodyPr wrap="square">
+            <a:spAutoFit/>
+          </a:bodyPr>
+          <a:lstStyle/>
+          <a:p>
+            <a:pPr algn="l"/>
+            <a:r>
+              <a:rPr sz="1100" b="0">
+                <a:solidFill>
+                  <a:srgbClr val="FFFFFF"/>
+                </a:solidFill>
+                <a:latin typeface="Calibri"/>
+              </a:rPr>
+              <a:t>Local, sin backend pagado</a:t>
+            </a:r>
+          </a:p>
+        </p:txBody>
+      </p:sp>
+      <p:sp>
+        <p:nvSpPr>
+          <p:cNvPr id="15" name="Rounded Rectangle 14"/>
+          <p:cNvSpPr/>
+          <p:nvPr/>
+        </p:nvSpPr>
+        <p:spPr>
+          <a:xfrm>
+            <a:off x="7955279" y="4160520"/>
+            <a:ext cx="3200400" cy="1051560"/>
+          </a:xfrm>
+          <a:prstGeom prst="roundRect">
+            <a:avLst/>
+          </a:prstGeom>
+          <a:solidFill>
+            <a:srgbClr val="F08A5E"/>
+          </a:solidFill>
+          <a:ln>
+            <a:noFill/>
+          </a:ln>
+          <a:effectLst/>
+        </p:spPr>
+        <p:style>
+          <a:lnRef idx="1">
+            <a:schemeClr val="accent1"/>
+          </a:lnRef>
+          <a:fillRef idx="3">
+            <a:schemeClr val="accent1"/>
+          </a:fillRef>
+          <a:effectRef idx="2">
+            <a:schemeClr val="accent1"/>
+          </a:effectRef>
+          <a:fontRef idx="minor">
+            <a:schemeClr val="lt1"/>
+          </a:fontRef>
+        </p:style>
+        <p:txBody>
+          <a:bodyPr rtlCol="0" anchor="ctr"/>
+          <a:lstStyle/>
+          <a:p>
+            <a:pPr algn="ctr"/>
+          </a:p>
+        </p:txBody>
+      </p:sp>
+      <p:sp>
+        <p:nvSpPr>
+          <p:cNvPr id="16" name="TextBox 15"/>
+          <p:cNvSpPr txBox="1"/>
+          <p:nvPr/>
+        </p:nvSpPr>
+        <p:spPr>
+          <a:xfrm>
+            <a:off x="8183879" y="4233672"/>
+            <a:ext cx="2743200" cy="457200"/>
+          </a:xfrm>
+          <a:prstGeom prst="rect">
+            <a:avLst/>
+          </a:prstGeom>
+          <a:noFill/>
+        </p:spPr>
+        <p:txBody>
+          <a:bodyPr wrap="square">
+            <a:spAutoFit/>
+          </a:bodyPr>
+          <a:lstStyle/>
+          <a:p>
+            <a:pPr algn="l"/>
+            <a:r>
+              <a:rPr sz="2200" b="1">
+                <a:solidFill>
+                  <a:srgbClr val="FFFFFF"/>
+                </a:solidFill>
+                <a:latin typeface="Calibri"/>
+              </a:rPr>
+              <a:t>14</a:t>
+            </a:r>
+          </a:p>
+        </p:txBody>
+      </p:sp>
+      <p:sp>
+        <p:nvSpPr>
+          <p:cNvPr id="17" name="TextBox 16"/>
+          <p:cNvSpPr txBox="1"/>
+          <p:nvPr/>
+        </p:nvSpPr>
+        <p:spPr>
+          <a:xfrm>
+            <a:off x="8183879" y="4727448"/>
+            <a:ext cx="2743200" cy="365760"/>
+          </a:xfrm>
+          <a:prstGeom prst="rect">
+            <a:avLst/>
+          </a:prstGeom>
+          <a:noFill/>
+        </p:spPr>
+        <p:txBody>
+          <a:bodyPr wrap="square">
+            <a:spAutoFit/>
+          </a:bodyPr>
+          <a:lstStyle/>
+          <a:p>
+            <a:pPr algn="l"/>
+            <a:r>
+              <a:rPr sz="1100" b="0">
+                <a:solidFill>
+                  <a:srgbClr val="FFFFFF"/>
+                </a:solidFill>
+                <a:latin typeface="Calibri"/>
+              </a:rPr>
+              <a:t>Pull Requests entregados</a:t>
             </a:r>
           </a:p>
         </p:txBody>
@@ -4033,96 +6587,25 @@
       <p:grpSpPr/>
       <p:sp>
         <p:nvSpPr>
-          <p:cNvPr id="2" name="TextBox 1"/>
-          <p:cNvSpPr txBox="1"/>
-          <p:nvPr/>
-        </p:nvSpPr>
-        <p:spPr>
-          <a:xfrm>
-            <a:off x="548640" y="365760"/>
-            <a:ext cx="5486400" cy="365760"/>
-          </a:xfrm>
-          <a:prstGeom prst="rect">
-            <a:avLst/>
-          </a:prstGeom>
-          <a:noFill/>
-        </p:spPr>
-        <p:txBody>
-          <a:bodyPr wrap="square">
-            <a:spAutoFit/>
-          </a:bodyPr>
-          <a:lstStyle/>
-          <a:p>
-            <a:pPr algn="l"/>
-            <a:r>
-              <a:rPr sz="1300" b="1">
-                <a:solidFill>
-                  <a:srgbClr val="2563EB"/>
-                </a:solidFill>
-                <a:latin typeface="Calibri"/>
-              </a:rPr>
-              <a:t>FUNCIONALIDADES</a:t>
-            </a:r>
-          </a:p>
-        </p:txBody>
-      </p:sp>
-      <p:sp>
-        <p:nvSpPr>
-          <p:cNvPr id="3" name="TextBox 2"/>
-          <p:cNvSpPr txBox="1"/>
-          <p:nvPr/>
-        </p:nvSpPr>
-        <p:spPr>
-          <a:xfrm>
-            <a:off x="548640" y="685800"/>
-            <a:ext cx="10058400" cy="731520"/>
-          </a:xfrm>
-          <a:prstGeom prst="rect">
-            <a:avLst/>
-          </a:prstGeom>
-          <a:noFill/>
-        </p:spPr>
-        <p:txBody>
-          <a:bodyPr wrap="square">
-            <a:spAutoFit/>
-          </a:bodyPr>
-          <a:lstStyle/>
-          <a:p>
-            <a:pPr algn="l"/>
-            <a:r>
-              <a:rPr sz="3000" b="1">
-                <a:solidFill>
-                  <a:srgbClr val="0F1B3D"/>
-                </a:solidFill>
-                <a:latin typeface="Calibri"/>
-              </a:rPr>
-              <a:t>Qué incluye el MVP</a:t>
-            </a:r>
-          </a:p>
-        </p:txBody>
-      </p:sp>
-      <p:sp>
-        <p:nvSpPr>
-          <p:cNvPr id="4" name="Rectangle 3"/>
+          <p:cNvPr id="2" name="Rectangle 1"/>
           <p:cNvSpPr/>
           <p:nvPr/>
         </p:nvSpPr>
         <p:spPr>
           <a:xfrm>
-            <a:off x="548640" y="1645920"/>
-            <a:ext cx="5394960" cy="1920240"/>
+            <a:off x="548640" y="320040"/>
+            <a:ext cx="109728" cy="109728"/>
           </a:xfrm>
           <a:prstGeom prst="rect">
             <a:avLst/>
           </a:prstGeom>
           <a:solidFill>
-            <a:srgbClr val="FFFFFF"/>
+            <a:srgbClr val="E8622C"/>
           </a:solidFill>
           <a:ln>
-            <a:solidFill>
-              <a:srgbClr val="E2E8F0"/>
-            </a:solidFill>
+            <a:noFill/>
           </a:ln>
+          <a:effectLst/>
         </p:spPr>
         <p:style>
           <a:lnRef idx="1">
@@ -4139,53 +6622,69 @@
           </a:fontRef>
         </p:style>
         <p:txBody>
-          <a:bodyPr rtlCol="0" anchor="ctr" wrap="square" lIns="177800" tIns="152400"/>
+          <a:bodyPr rtlCol="0" anchor="ctr"/>
           <a:lstStyle/>
           <a:p>
             <a:pPr algn="ctr"/>
-            <a:r>
-              <a:rPr b="1" sz="1800">
-                <a:solidFill>
-                  <a:srgbClr val="0F1B3D"/>
-                </a:solidFill>
-              </a:rPr>
-              <a:t>Simulador FX</a:t>
-            </a:r>
-          </a:p>
-          <a:p>
-            <a:r>
-              <a:rPr sz="1400">
-                <a:solidFill>
-                  <a:srgbClr val="475569"/>
-                </a:solidFill>
-              </a:rPr>
-              <a:t>FX Spot, Forward FX y FX NDF, con cálculo de cashflows en tiempo real.</a:t>
-            </a:r>
-          </a:p>
-        </p:txBody>
-      </p:sp>
-      <p:sp>
-        <p:nvSpPr>
-          <p:cNvPr id="5" name="Rectangle 4"/>
+          </a:p>
+        </p:txBody>
+      </p:sp>
+      <p:sp>
+        <p:nvSpPr>
+          <p:cNvPr id="3" name="TextBox 2"/>
+          <p:cNvSpPr txBox="1"/>
+          <p:nvPr/>
+        </p:nvSpPr>
+        <p:spPr>
+          <a:xfrm>
+            <a:off x="749808" y="256032"/>
+            <a:ext cx="1828800" cy="274320"/>
+          </a:xfrm>
+          <a:prstGeom prst="rect">
+            <a:avLst/>
+          </a:prstGeom>
+          <a:noFill/>
+        </p:spPr>
+        <p:txBody>
+          <a:bodyPr wrap="square">
+            <a:spAutoFit/>
+          </a:bodyPr>
+          <a:lstStyle/>
+          <a:p>
+            <a:pPr algn="l"/>
+            <a:r>
+              <a:rPr sz="1100" b="1">
+                <a:solidFill>
+                  <a:srgbClr val="6B7280"/>
+                </a:solidFill>
+                <a:latin typeface="Calibri"/>
+              </a:rPr>
+              <a:t>CALYPSO HUB</a:t>
+            </a:r>
+          </a:p>
+        </p:txBody>
+      </p:sp>
+      <p:sp>
+        <p:nvSpPr>
+          <p:cNvPr id="4" name="Rectangle 3"/>
           <p:cNvSpPr/>
           <p:nvPr/>
         </p:nvSpPr>
         <p:spPr>
           <a:xfrm>
-            <a:off x="6217920" y="1645920"/>
-            <a:ext cx="5394960" cy="1920240"/>
+            <a:off x="11612880" y="0"/>
+            <a:ext cx="576072" cy="502920"/>
           </a:xfrm>
           <a:prstGeom prst="rect">
             <a:avLst/>
           </a:prstGeom>
           <a:solidFill>
-            <a:srgbClr val="FFFFFF"/>
+            <a:srgbClr val="E8622C"/>
           </a:solidFill>
           <a:ln>
-            <a:solidFill>
-              <a:srgbClr val="E2E8F0"/>
-            </a:solidFill>
+            <a:noFill/>
           </a:ln>
+          <a:effectLst/>
         </p:spPr>
         <p:style>
           <a:lnRef idx="1">
@@ -4202,53 +6701,106 @@
           </a:fontRef>
         </p:style>
         <p:txBody>
-          <a:bodyPr rtlCol="0" anchor="ctr" wrap="square" lIns="177800" tIns="152400"/>
+          <a:bodyPr rtlCol="0" anchor="ctr"/>
           <a:lstStyle/>
           <a:p>
             <a:pPr algn="ctr"/>
-            <a:r>
-              <a:rPr b="1" sz="1800">
-                <a:solidFill>
-                  <a:srgbClr val="0F1B3D"/>
-                </a:solidFill>
-              </a:rPr>
-              <a:t>Diccionario interactivo</a:t>
-            </a:r>
-          </a:p>
-          <a:p>
-            <a:r>
-              <a:rPr sz="1400">
-                <a:solidFill>
-                  <a:srgbClr val="475569"/>
-                </a:solidFill>
-              </a:rPr>
-              <a:t>Hover sobre cualquier valor calculado: definición, fórmula y origen del dato.</a:t>
-            </a:r>
-          </a:p>
-        </p:txBody>
-      </p:sp>
-      <p:sp>
-        <p:nvSpPr>
-          <p:cNvPr id="6" name="Rectangle 5"/>
+          </a:p>
+        </p:txBody>
+      </p:sp>
+      <p:sp>
+        <p:nvSpPr>
+          <p:cNvPr id="5" name="TextBox 4"/>
+          <p:cNvSpPr txBox="1"/>
+          <p:nvPr/>
+        </p:nvSpPr>
+        <p:spPr>
+          <a:xfrm>
+            <a:off x="548640" y="868680"/>
+            <a:ext cx="5486400" cy="320040"/>
+          </a:xfrm>
+          <a:prstGeom prst="rect">
+            <a:avLst/>
+          </a:prstGeom>
+          <a:noFill/>
+        </p:spPr>
+        <p:txBody>
+          <a:bodyPr wrap="square">
+            <a:spAutoFit/>
+          </a:bodyPr>
+          <a:lstStyle/>
+          <a:p>
+            <a:pPr algn="l"/>
+            <a:r>
+              <a:rPr sz="1200" b="1">
+                <a:solidFill>
+                  <a:srgbClr val="E8622C"/>
+                </a:solidFill>
+                <a:latin typeface="Calibri"/>
+              </a:rPr>
+              <a:t>FUNCIONALIDADES</a:t>
+            </a:r>
+          </a:p>
+        </p:txBody>
+      </p:sp>
+      <p:sp>
+        <p:nvSpPr>
+          <p:cNvPr id="6" name="TextBox 5"/>
+          <p:cNvSpPr txBox="1"/>
+          <p:nvPr/>
+        </p:nvSpPr>
+        <p:spPr>
+          <a:xfrm>
+            <a:off x="548640" y="1188720"/>
+            <a:ext cx="10515600" cy="640080"/>
+          </a:xfrm>
+          <a:prstGeom prst="rect">
+            <a:avLst/>
+          </a:prstGeom>
+          <a:noFill/>
+        </p:spPr>
+        <p:txBody>
+          <a:bodyPr wrap="square">
+            <a:spAutoFit/>
+          </a:bodyPr>
+          <a:lstStyle/>
+          <a:p>
+            <a:pPr algn="l"/>
+            <a:r>
+              <a:rPr sz="2800" b="1">
+                <a:solidFill>
+                  <a:srgbClr val="1F2430"/>
+                </a:solidFill>
+                <a:latin typeface="Calibri"/>
+              </a:rPr>
+              <a:t>Qué incluye el MVP</a:t>
+            </a:r>
+          </a:p>
+        </p:txBody>
+      </p:sp>
+      <p:sp>
+        <p:nvSpPr>
+          <p:cNvPr id="7" name="Rounded Rectangle 6"/>
           <p:cNvSpPr/>
           <p:nvPr/>
         </p:nvSpPr>
         <p:spPr>
           <a:xfrm>
-            <a:off x="548640" y="3840480"/>
-            <a:ext cx="5394960" cy="1920240"/>
-          </a:xfrm>
-          <a:prstGeom prst="rect">
+            <a:off x="548640" y="2103120"/>
+            <a:ext cx="2606040" cy="3291840"/>
+          </a:xfrm>
+          <a:prstGeom prst="roundRect">
             <a:avLst/>
           </a:prstGeom>
           <a:solidFill>
             <a:srgbClr val="FFFFFF"/>
           </a:solidFill>
-          <a:ln>
+          <a:ln w="12700">
             <a:solidFill>
-              <a:srgbClr val="E2E8F0"/>
+              <a:srgbClr val="ECE7E2"/>
             </a:solidFill>
           </a:ln>
+          <a:effectLst/>
         </p:spPr>
         <p:style>
           <a:lnRef idx="1">
@@ -4265,53 +6817,34 @@
           </a:fontRef>
         </p:style>
         <p:txBody>
-          <a:bodyPr rtlCol="0" anchor="ctr" wrap="square" lIns="177800" tIns="152400"/>
+          <a:bodyPr rtlCol="0" anchor="ctr"/>
           <a:lstStyle/>
           <a:p>
             <a:pPr algn="ctr"/>
-            <a:r>
-              <a:rPr b="1" sz="1800">
-                <a:solidFill>
-                  <a:srgbClr val="0F1B3D"/>
-                </a:solidFill>
-              </a:rPr>
-              <a:t>Editor de XML de trades</a:t>
-            </a:r>
-          </a:p>
-          <a:p>
-            <a:r>
-              <a:rPr sz="1400">
-                <a:solidFill>
-                  <a:srgbClr val="475569"/>
-                </a:solidFill>
-              </a:rPr>
-              <a:t>Carga, edita y exporta trades de Calypso en formato CDUF.</a:t>
-            </a:r>
-          </a:p>
-        </p:txBody>
-      </p:sp>
-      <p:sp>
-        <p:nvSpPr>
-          <p:cNvPr id="7" name="Rectangle 6"/>
+          </a:p>
+        </p:txBody>
+      </p:sp>
+      <p:sp>
+        <p:nvSpPr>
+          <p:cNvPr id="8" name="Rounded Rectangle 7"/>
           <p:cNvSpPr/>
           <p:nvPr/>
         </p:nvSpPr>
         <p:spPr>
           <a:xfrm>
-            <a:off x="6217920" y="3840480"/>
-            <a:ext cx="5394960" cy="1920240"/>
-          </a:xfrm>
-          <a:prstGeom prst="rect">
+            <a:off x="777240" y="2377440"/>
+            <a:ext cx="502920" cy="502920"/>
+          </a:xfrm>
+          <a:prstGeom prst="roundRect">
             <a:avLst/>
           </a:prstGeom>
           <a:solidFill>
-            <a:srgbClr val="FFFFFF"/>
+            <a:srgbClr val="E8622C"/>
           </a:solidFill>
           <a:ln>
-            <a:solidFill>
-              <a:srgbClr val="E2E8F0"/>
-            </a:solidFill>
+            <a:noFill/>
           </a:ln>
+          <a:effectLst/>
         </p:spPr>
         <p:style>
           <a:lnRef idx="1">
@@ -4328,25 +6861,573 @@
           </a:fontRef>
         </p:style>
         <p:txBody>
-          <a:bodyPr rtlCol="0" anchor="ctr" wrap="square" lIns="177800" tIns="152400"/>
+          <a:bodyPr rtlCol="0" anchor="ctr"/>
           <a:lstStyle/>
           <a:p>
             <a:pPr algn="ctr"/>
-            <a:r>
-              <a:rPr b="1" sz="1800">
-                <a:solidFill>
-                  <a:srgbClr val="0F1B3D"/>
-                </a:solidFill>
+          </a:p>
+        </p:txBody>
+      </p:sp>
+      <p:sp>
+        <p:nvSpPr>
+          <p:cNvPr id="9" name="TextBox 8"/>
+          <p:cNvSpPr txBox="1"/>
+          <p:nvPr/>
+        </p:nvSpPr>
+        <p:spPr>
+          <a:xfrm>
+            <a:off x="777240" y="3063240"/>
+            <a:ext cx="2194560" cy="548640"/>
+          </a:xfrm>
+          <a:prstGeom prst="rect">
+            <a:avLst/>
+          </a:prstGeom>
+          <a:noFill/>
+        </p:spPr>
+        <p:txBody>
+          <a:bodyPr wrap="square">
+            <a:spAutoFit/>
+          </a:bodyPr>
+          <a:lstStyle/>
+          <a:p>
+            <a:pPr algn="l"/>
+            <a:r>
+              <a:rPr sz="1400" b="1">
+                <a:solidFill>
+                  <a:srgbClr val="1F2430"/>
+                </a:solidFill>
+                <a:latin typeface="Calibri"/>
+              </a:rPr>
+              <a:t>Simulador FX</a:t>
+            </a:r>
+          </a:p>
+        </p:txBody>
+      </p:sp>
+      <p:sp>
+        <p:nvSpPr>
+          <p:cNvPr id="10" name="TextBox 9"/>
+          <p:cNvSpPr txBox="1"/>
+          <p:nvPr/>
+        </p:nvSpPr>
+        <p:spPr>
+          <a:xfrm>
+            <a:off x="777240" y="3611880"/>
+            <a:ext cx="2194560" cy="1554480"/>
+          </a:xfrm>
+          <a:prstGeom prst="rect">
+            <a:avLst/>
+          </a:prstGeom>
+          <a:noFill/>
+        </p:spPr>
+        <p:txBody>
+          <a:bodyPr wrap="square">
+            <a:spAutoFit/>
+          </a:bodyPr>
+          <a:lstStyle/>
+          <a:p>
+            <a:pPr>
+              <a:spcAft>
+                <a:spcPts val="600"/>
+              </a:spcAft>
+            </a:pPr>
+            <a:r>
+              <a:rPr sz="1150">
+                <a:solidFill>
+                  <a:srgbClr val="6B7280"/>
+                </a:solidFill>
+                <a:latin typeface="Calibri"/>
+              </a:rPr>
+              <a:t>FX Spot, Forward FX y FX NDF, con cálculo de cashflows en tiempo real.</a:t>
+            </a:r>
+          </a:p>
+        </p:txBody>
+      </p:sp>
+      <p:sp>
+        <p:nvSpPr>
+          <p:cNvPr id="11" name="Rounded Rectangle 10"/>
+          <p:cNvSpPr/>
+          <p:nvPr/>
+        </p:nvSpPr>
+        <p:spPr>
+          <a:xfrm>
+            <a:off x="3291840" y="2103120"/>
+            <a:ext cx="2606040" cy="3291840"/>
+          </a:xfrm>
+          <a:prstGeom prst="roundRect">
+            <a:avLst/>
+          </a:prstGeom>
+          <a:solidFill>
+            <a:srgbClr val="FFFFFF"/>
+          </a:solidFill>
+          <a:ln w="12700">
+            <a:solidFill>
+              <a:srgbClr val="ECE7E2"/>
+            </a:solidFill>
+          </a:ln>
+          <a:effectLst/>
+        </p:spPr>
+        <p:style>
+          <a:lnRef idx="1">
+            <a:schemeClr val="accent1"/>
+          </a:lnRef>
+          <a:fillRef idx="3">
+            <a:schemeClr val="accent1"/>
+          </a:fillRef>
+          <a:effectRef idx="2">
+            <a:schemeClr val="accent1"/>
+          </a:effectRef>
+          <a:fontRef idx="minor">
+            <a:schemeClr val="lt1"/>
+          </a:fontRef>
+        </p:style>
+        <p:txBody>
+          <a:bodyPr rtlCol="0" anchor="ctr"/>
+          <a:lstStyle/>
+          <a:p>
+            <a:pPr algn="ctr"/>
+          </a:p>
+        </p:txBody>
+      </p:sp>
+      <p:sp>
+        <p:nvSpPr>
+          <p:cNvPr id="12" name="Rounded Rectangle 11"/>
+          <p:cNvSpPr/>
+          <p:nvPr/>
+        </p:nvSpPr>
+        <p:spPr>
+          <a:xfrm>
+            <a:off x="3520440" y="2377440"/>
+            <a:ext cx="502920" cy="502920"/>
+          </a:xfrm>
+          <a:prstGeom prst="roundRect">
+            <a:avLst/>
+          </a:prstGeom>
+          <a:solidFill>
+            <a:srgbClr val="E8622C"/>
+          </a:solidFill>
+          <a:ln>
+            <a:noFill/>
+          </a:ln>
+          <a:effectLst/>
+        </p:spPr>
+        <p:style>
+          <a:lnRef idx="1">
+            <a:schemeClr val="accent1"/>
+          </a:lnRef>
+          <a:fillRef idx="3">
+            <a:schemeClr val="accent1"/>
+          </a:fillRef>
+          <a:effectRef idx="2">
+            <a:schemeClr val="accent1"/>
+          </a:effectRef>
+          <a:fontRef idx="minor">
+            <a:schemeClr val="lt1"/>
+          </a:fontRef>
+        </p:style>
+        <p:txBody>
+          <a:bodyPr rtlCol="0" anchor="ctr"/>
+          <a:lstStyle/>
+          <a:p>
+            <a:pPr algn="ctr"/>
+          </a:p>
+        </p:txBody>
+      </p:sp>
+      <p:sp>
+        <p:nvSpPr>
+          <p:cNvPr id="13" name="TextBox 12"/>
+          <p:cNvSpPr txBox="1"/>
+          <p:nvPr/>
+        </p:nvSpPr>
+        <p:spPr>
+          <a:xfrm>
+            <a:off x="3520440" y="3063240"/>
+            <a:ext cx="2194560" cy="548640"/>
+          </a:xfrm>
+          <a:prstGeom prst="rect">
+            <a:avLst/>
+          </a:prstGeom>
+          <a:noFill/>
+        </p:spPr>
+        <p:txBody>
+          <a:bodyPr wrap="square">
+            <a:spAutoFit/>
+          </a:bodyPr>
+          <a:lstStyle/>
+          <a:p>
+            <a:pPr algn="l"/>
+            <a:r>
+              <a:rPr sz="1400" b="1">
+                <a:solidFill>
+                  <a:srgbClr val="1F2430"/>
+                </a:solidFill>
+                <a:latin typeface="Calibri"/>
+              </a:rPr>
+              <a:t>Diccionario interactivo</a:t>
+            </a:r>
+          </a:p>
+        </p:txBody>
+      </p:sp>
+      <p:sp>
+        <p:nvSpPr>
+          <p:cNvPr id="14" name="TextBox 13"/>
+          <p:cNvSpPr txBox="1"/>
+          <p:nvPr/>
+        </p:nvSpPr>
+        <p:spPr>
+          <a:xfrm>
+            <a:off x="3520440" y="3611880"/>
+            <a:ext cx="2194560" cy="1554480"/>
+          </a:xfrm>
+          <a:prstGeom prst="rect">
+            <a:avLst/>
+          </a:prstGeom>
+          <a:noFill/>
+        </p:spPr>
+        <p:txBody>
+          <a:bodyPr wrap="square">
+            <a:spAutoFit/>
+          </a:bodyPr>
+          <a:lstStyle/>
+          <a:p>
+            <a:pPr>
+              <a:spcAft>
+                <a:spcPts val="600"/>
+              </a:spcAft>
+            </a:pPr>
+            <a:r>
+              <a:rPr sz="1150">
+                <a:solidFill>
+                  <a:srgbClr val="6B7280"/>
+                </a:solidFill>
+                <a:latin typeface="Calibri"/>
+              </a:rPr>
+              <a:t>Hover sobre cualquier valor calculado: definición, fórmula y origen del dato.</a:t>
+            </a:r>
+          </a:p>
+        </p:txBody>
+      </p:sp>
+      <p:sp>
+        <p:nvSpPr>
+          <p:cNvPr id="15" name="Rounded Rectangle 14"/>
+          <p:cNvSpPr/>
+          <p:nvPr/>
+        </p:nvSpPr>
+        <p:spPr>
+          <a:xfrm>
+            <a:off x="6035040" y="2103120"/>
+            <a:ext cx="2606040" cy="3291840"/>
+          </a:xfrm>
+          <a:prstGeom prst="roundRect">
+            <a:avLst/>
+          </a:prstGeom>
+          <a:solidFill>
+            <a:srgbClr val="FFFFFF"/>
+          </a:solidFill>
+          <a:ln w="12700">
+            <a:solidFill>
+              <a:srgbClr val="ECE7E2"/>
+            </a:solidFill>
+          </a:ln>
+          <a:effectLst/>
+        </p:spPr>
+        <p:style>
+          <a:lnRef idx="1">
+            <a:schemeClr val="accent1"/>
+          </a:lnRef>
+          <a:fillRef idx="3">
+            <a:schemeClr val="accent1"/>
+          </a:fillRef>
+          <a:effectRef idx="2">
+            <a:schemeClr val="accent1"/>
+          </a:effectRef>
+          <a:fontRef idx="minor">
+            <a:schemeClr val="lt1"/>
+          </a:fontRef>
+        </p:style>
+        <p:txBody>
+          <a:bodyPr rtlCol="0" anchor="ctr"/>
+          <a:lstStyle/>
+          <a:p>
+            <a:pPr algn="ctr"/>
+          </a:p>
+        </p:txBody>
+      </p:sp>
+      <p:sp>
+        <p:nvSpPr>
+          <p:cNvPr id="16" name="Rounded Rectangle 15"/>
+          <p:cNvSpPr/>
+          <p:nvPr/>
+        </p:nvSpPr>
+        <p:spPr>
+          <a:xfrm>
+            <a:off x="6263640" y="2377440"/>
+            <a:ext cx="502920" cy="502920"/>
+          </a:xfrm>
+          <a:prstGeom prst="roundRect">
+            <a:avLst/>
+          </a:prstGeom>
+          <a:solidFill>
+            <a:srgbClr val="E8622C"/>
+          </a:solidFill>
+          <a:ln>
+            <a:noFill/>
+          </a:ln>
+          <a:effectLst/>
+        </p:spPr>
+        <p:style>
+          <a:lnRef idx="1">
+            <a:schemeClr val="accent1"/>
+          </a:lnRef>
+          <a:fillRef idx="3">
+            <a:schemeClr val="accent1"/>
+          </a:fillRef>
+          <a:effectRef idx="2">
+            <a:schemeClr val="accent1"/>
+          </a:effectRef>
+          <a:fontRef idx="minor">
+            <a:schemeClr val="lt1"/>
+          </a:fontRef>
+        </p:style>
+        <p:txBody>
+          <a:bodyPr rtlCol="0" anchor="ctr"/>
+          <a:lstStyle/>
+          <a:p>
+            <a:pPr algn="ctr"/>
+          </a:p>
+        </p:txBody>
+      </p:sp>
+      <p:sp>
+        <p:nvSpPr>
+          <p:cNvPr id="17" name="TextBox 16"/>
+          <p:cNvSpPr txBox="1"/>
+          <p:nvPr/>
+        </p:nvSpPr>
+        <p:spPr>
+          <a:xfrm>
+            <a:off x="6263640" y="3063240"/>
+            <a:ext cx="2194560" cy="548640"/>
+          </a:xfrm>
+          <a:prstGeom prst="rect">
+            <a:avLst/>
+          </a:prstGeom>
+          <a:noFill/>
+        </p:spPr>
+        <p:txBody>
+          <a:bodyPr wrap="square">
+            <a:spAutoFit/>
+          </a:bodyPr>
+          <a:lstStyle/>
+          <a:p>
+            <a:pPr algn="l"/>
+            <a:r>
+              <a:rPr sz="1400" b="1">
+                <a:solidFill>
+                  <a:srgbClr val="1F2430"/>
+                </a:solidFill>
+                <a:latin typeface="Calibri"/>
+              </a:rPr>
+              <a:t>Editor de XML (CDUF)</a:t>
+            </a:r>
+          </a:p>
+        </p:txBody>
+      </p:sp>
+      <p:sp>
+        <p:nvSpPr>
+          <p:cNvPr id="18" name="TextBox 17"/>
+          <p:cNvSpPr txBox="1"/>
+          <p:nvPr/>
+        </p:nvSpPr>
+        <p:spPr>
+          <a:xfrm>
+            <a:off x="6263640" y="3611880"/>
+            <a:ext cx="2194560" cy="1554480"/>
+          </a:xfrm>
+          <a:prstGeom prst="rect">
+            <a:avLst/>
+          </a:prstGeom>
+          <a:noFill/>
+        </p:spPr>
+        <p:txBody>
+          <a:bodyPr wrap="square">
+            <a:spAutoFit/>
+          </a:bodyPr>
+          <a:lstStyle/>
+          <a:p>
+            <a:pPr>
+              <a:spcAft>
+                <a:spcPts val="600"/>
+              </a:spcAft>
+            </a:pPr>
+            <a:r>
+              <a:rPr sz="1150">
+                <a:solidFill>
+                  <a:srgbClr val="6B7280"/>
+                </a:solidFill>
+                <a:latin typeface="Calibri"/>
+              </a:rPr>
+              <a:t>Carga, edita y exporta trades de Calypso en formato CDUF.</a:t>
+            </a:r>
+          </a:p>
+        </p:txBody>
+      </p:sp>
+      <p:sp>
+        <p:nvSpPr>
+          <p:cNvPr id="19" name="Rounded Rectangle 18"/>
+          <p:cNvSpPr/>
+          <p:nvPr/>
+        </p:nvSpPr>
+        <p:spPr>
+          <a:xfrm>
+            <a:off x="8778240" y="2103120"/>
+            <a:ext cx="2606040" cy="3291840"/>
+          </a:xfrm>
+          <a:prstGeom prst="roundRect">
+            <a:avLst/>
+          </a:prstGeom>
+          <a:solidFill>
+            <a:srgbClr val="FFFFFF"/>
+          </a:solidFill>
+          <a:ln w="12700">
+            <a:solidFill>
+              <a:srgbClr val="ECE7E2"/>
+            </a:solidFill>
+          </a:ln>
+          <a:effectLst/>
+        </p:spPr>
+        <p:style>
+          <a:lnRef idx="1">
+            <a:schemeClr val="accent1"/>
+          </a:lnRef>
+          <a:fillRef idx="3">
+            <a:schemeClr val="accent1"/>
+          </a:fillRef>
+          <a:effectRef idx="2">
+            <a:schemeClr val="accent1"/>
+          </a:effectRef>
+          <a:fontRef idx="minor">
+            <a:schemeClr val="lt1"/>
+          </a:fontRef>
+        </p:style>
+        <p:txBody>
+          <a:bodyPr rtlCol="0" anchor="ctr"/>
+          <a:lstStyle/>
+          <a:p>
+            <a:pPr algn="ctr"/>
+          </a:p>
+        </p:txBody>
+      </p:sp>
+      <p:sp>
+        <p:nvSpPr>
+          <p:cNvPr id="20" name="Rounded Rectangle 19"/>
+          <p:cNvSpPr/>
+          <p:nvPr/>
+        </p:nvSpPr>
+        <p:spPr>
+          <a:xfrm>
+            <a:off x="9006840" y="2377440"/>
+            <a:ext cx="502920" cy="502920"/>
+          </a:xfrm>
+          <a:prstGeom prst="roundRect">
+            <a:avLst/>
+          </a:prstGeom>
+          <a:solidFill>
+            <a:srgbClr val="E8622C"/>
+          </a:solidFill>
+          <a:ln>
+            <a:noFill/>
+          </a:ln>
+          <a:effectLst/>
+        </p:spPr>
+        <p:style>
+          <a:lnRef idx="1">
+            <a:schemeClr val="accent1"/>
+          </a:lnRef>
+          <a:fillRef idx="3">
+            <a:schemeClr val="accent1"/>
+          </a:fillRef>
+          <a:effectRef idx="2">
+            <a:schemeClr val="accent1"/>
+          </a:effectRef>
+          <a:fontRef idx="minor">
+            <a:schemeClr val="lt1"/>
+          </a:fontRef>
+        </p:style>
+        <p:txBody>
+          <a:bodyPr rtlCol="0" anchor="ctr"/>
+          <a:lstStyle/>
+          <a:p>
+            <a:pPr algn="ctr"/>
+          </a:p>
+        </p:txBody>
+      </p:sp>
+      <p:sp>
+        <p:nvSpPr>
+          <p:cNvPr id="21" name="TextBox 20"/>
+          <p:cNvSpPr txBox="1"/>
+          <p:nvPr/>
+        </p:nvSpPr>
+        <p:spPr>
+          <a:xfrm>
+            <a:off x="9006840" y="3063240"/>
+            <a:ext cx="2194560" cy="548640"/>
+          </a:xfrm>
+          <a:prstGeom prst="rect">
+            <a:avLst/>
+          </a:prstGeom>
+          <a:noFill/>
+        </p:spPr>
+        <p:txBody>
+          <a:bodyPr wrap="square">
+            <a:spAutoFit/>
+          </a:bodyPr>
+          <a:lstStyle/>
+          <a:p>
+            <a:pPr algn="l"/>
+            <a:r>
+              <a:rPr sz="1400" b="1">
+                <a:solidFill>
+                  <a:srgbClr val="1F2430"/>
+                </a:solidFill>
+                <a:latin typeface="Calibri"/>
               </a:rPr>
               <a:t>Gestión de contenido</a:t>
             </a:r>
           </a:p>
-          <a:p>
-            <a:r>
-              <a:rPr sz="1400">
-                <a:solidFill>
-                  <a:srgbClr val="475569"/>
-                </a:solidFill>
+        </p:txBody>
+      </p:sp>
+      <p:sp>
+        <p:nvSpPr>
+          <p:cNvPr id="22" name="TextBox 21"/>
+          <p:cNvSpPr txBox="1"/>
+          <p:nvPr/>
+        </p:nvSpPr>
+        <p:spPr>
+          <a:xfrm>
+            <a:off x="9006840" y="3611880"/>
+            <a:ext cx="2194560" cy="1554480"/>
+          </a:xfrm>
+          <a:prstGeom prst="rect">
+            <a:avLst/>
+          </a:prstGeom>
+          <a:noFill/>
+        </p:spPr>
+        <p:txBody>
+          <a:bodyPr wrap="square">
+            <a:spAutoFit/>
+          </a:bodyPr>
+          <a:lstStyle/>
+          <a:p>
+            <a:pPr>
+              <a:spcAft>
+                <a:spcPts val="600"/>
+              </a:spcAft>
+            </a:pPr>
+            <a:r>
+              <a:rPr sz="1150">
+                <a:solidFill>
+                  <a:srgbClr val="6B7280"/>
+                </a:solidFill>
+                <a:latin typeface="Calibri"/>
               </a:rPr>
               <a:t>Página centralizada para proponer nuevos términos del diccionario.</a:t>
             </a:r>
@@ -4373,14 +7454,58 @@
       <p:grpSpPr/>
       <p:sp>
         <p:nvSpPr>
-          <p:cNvPr id="2" name="TextBox 1"/>
+          <p:cNvPr id="2" name="Rectangle 1"/>
+          <p:cNvSpPr/>
+          <p:nvPr/>
+        </p:nvSpPr>
+        <p:spPr>
+          <a:xfrm>
+            <a:off x="548640" y="320040"/>
+            <a:ext cx="109728" cy="109728"/>
+          </a:xfrm>
+          <a:prstGeom prst="rect">
+            <a:avLst/>
+          </a:prstGeom>
+          <a:solidFill>
+            <a:srgbClr val="E8622C"/>
+          </a:solidFill>
+          <a:ln>
+            <a:noFill/>
+          </a:ln>
+          <a:effectLst/>
+        </p:spPr>
+        <p:style>
+          <a:lnRef idx="1">
+            <a:schemeClr val="accent1"/>
+          </a:lnRef>
+          <a:fillRef idx="3">
+            <a:schemeClr val="accent1"/>
+          </a:fillRef>
+          <a:effectRef idx="2">
+            <a:schemeClr val="accent1"/>
+          </a:effectRef>
+          <a:fontRef idx="minor">
+            <a:schemeClr val="lt1"/>
+          </a:fontRef>
+        </p:style>
+        <p:txBody>
+          <a:bodyPr rtlCol="0" anchor="ctr"/>
+          <a:lstStyle/>
+          <a:p>
+            <a:pPr algn="ctr"/>
+          </a:p>
+        </p:txBody>
+      </p:sp>
+      <p:sp>
+        <p:nvSpPr>
+          <p:cNvPr id="3" name="TextBox 2"/>
           <p:cNvSpPr txBox="1"/>
           <p:nvPr/>
         </p:nvSpPr>
         <p:spPr>
           <a:xfrm>
-            <a:off x="548640" y="365760"/>
-            <a:ext cx="5486400" cy="365760"/>
+            <a:off x="749808" y="256032"/>
+            <a:ext cx="1828800" cy="274320"/>
           </a:xfrm>
           <a:prstGeom prst="rect">
             <a:avLst/>
@@ -4395,27 +7520,71 @@
           <a:p>
             <a:pPr algn="l"/>
             <a:r>
-              <a:rPr sz="1300" b="1">
-                <a:solidFill>
-                  <a:srgbClr val="2563EB"/>
+              <a:rPr sz="1100" b="1">
+                <a:solidFill>
+                  <a:srgbClr val="6B7280"/>
                 </a:solidFill>
                 <a:latin typeface="Calibri"/>
               </a:rPr>
-              <a:t>DEMO</a:t>
-            </a:r>
-          </a:p>
-        </p:txBody>
-      </p:sp>
-      <p:sp>
-        <p:nvSpPr>
-          <p:cNvPr id="3" name="TextBox 2"/>
+              <a:t>CALYPSO HUB</a:t>
+            </a:r>
+          </a:p>
+        </p:txBody>
+      </p:sp>
+      <p:sp>
+        <p:nvSpPr>
+          <p:cNvPr id="4" name="Rectangle 3"/>
+          <p:cNvSpPr/>
+          <p:nvPr/>
+        </p:nvSpPr>
+        <p:spPr>
+          <a:xfrm>
+            <a:off x="11612880" y="0"/>
+            <a:ext cx="576072" cy="502920"/>
+          </a:xfrm>
+          <a:prstGeom prst="rect">
+            <a:avLst/>
+          </a:prstGeom>
+          <a:solidFill>
+            <a:srgbClr val="E8622C"/>
+          </a:solidFill>
+          <a:ln>
+            <a:noFill/>
+          </a:ln>
+          <a:effectLst/>
+        </p:spPr>
+        <p:style>
+          <a:lnRef idx="1">
+            <a:schemeClr val="accent1"/>
+          </a:lnRef>
+          <a:fillRef idx="3">
+            <a:schemeClr val="accent1"/>
+          </a:fillRef>
+          <a:effectRef idx="2">
+            <a:schemeClr val="accent1"/>
+          </a:effectRef>
+          <a:fontRef idx="minor">
+            <a:schemeClr val="lt1"/>
+          </a:fontRef>
+        </p:style>
+        <p:txBody>
+          <a:bodyPr rtlCol="0" anchor="ctr"/>
+          <a:lstStyle/>
+          <a:p>
+            <a:pPr algn="ctr"/>
+          </a:p>
+        </p:txBody>
+      </p:sp>
+      <p:sp>
+        <p:nvSpPr>
+          <p:cNvPr id="5" name="TextBox 4"/>
           <p:cNvSpPr txBox="1"/>
           <p:nvPr/>
         </p:nvSpPr>
         <p:spPr>
           <a:xfrm>
-            <a:off x="548640" y="685800"/>
-            <a:ext cx="10058400" cy="731520"/>
+            <a:off x="548640" y="868680"/>
+            <a:ext cx="5486400" cy="320040"/>
           </a:xfrm>
           <a:prstGeom prst="rect">
             <a:avLst/>
@@ -4430,27 +7599,27 @@
           <a:p>
             <a:pPr algn="l"/>
             <a:r>
-              <a:rPr sz="3000" b="1">
-                <a:solidFill>
-                  <a:srgbClr val="0F1B3D"/>
+              <a:rPr sz="1200" b="1">
+                <a:solidFill>
+                  <a:srgbClr val="E8622C"/>
                 </a:solidFill>
                 <a:latin typeface="Calibri"/>
               </a:rPr>
-              <a:t>Simulador de Forward FX</a:t>
-            </a:r>
-          </a:p>
-        </p:txBody>
-      </p:sp>
-      <p:sp>
-        <p:nvSpPr>
-          <p:cNvPr id="4" name="TextBox 3"/>
+              <a:t>DEMO</a:t>
+            </a:r>
+          </a:p>
+        </p:txBody>
+      </p:sp>
+      <p:sp>
+        <p:nvSpPr>
+          <p:cNvPr id="6" name="TextBox 5"/>
           <p:cNvSpPr txBox="1"/>
           <p:nvPr/>
         </p:nvSpPr>
         <p:spPr>
           <a:xfrm>
-            <a:off x="548640" y="1737360"/>
-            <a:ext cx="5120640" cy="4114800"/>
+            <a:off x="548640" y="1188720"/>
+            <a:ext cx="10515600" cy="640080"/>
           </a:xfrm>
           <a:prstGeom prst="rect">
             <a:avLst/>
@@ -4463,42 +7632,77 @@
           </a:bodyPr>
           <a:lstStyle/>
           <a:p>
+            <a:pPr algn="l"/>
+            <a:r>
+              <a:rPr sz="2800" b="1">
+                <a:solidFill>
+                  <a:srgbClr val="1F2430"/>
+                </a:solidFill>
+                <a:latin typeface="Calibri"/>
+              </a:rPr>
+              <a:t>Simulador de Forward FX</a:t>
+            </a:r>
+          </a:p>
+        </p:txBody>
+      </p:sp>
+      <p:sp>
+        <p:nvSpPr>
+          <p:cNvPr id="7" name="TextBox 6"/>
+          <p:cNvSpPr txBox="1"/>
+          <p:nvPr/>
+        </p:nvSpPr>
+        <p:spPr>
+          <a:xfrm>
+            <a:off x="548640" y="2011680"/>
+            <a:ext cx="5120640" cy="4114800"/>
+          </a:xfrm>
+          <a:prstGeom prst="rect">
+            <a:avLst/>
+          </a:prstGeom>
+          <a:noFill/>
+        </p:spPr>
+        <p:txBody>
+          <a:bodyPr wrap="square">
+            <a:spAutoFit/>
+          </a:bodyPr>
+          <a:lstStyle/>
+          <a:p>
             <a:pPr>
               <a:spcAft>
-                <a:spcPts val="1000"/>
+                <a:spcPts val="600"/>
               </a:spcAft>
-              <a:defRPr sz="1700">
-                <a:solidFill>
-                  <a:srgbClr val="475569"/>
+            </a:pPr>
+            <a:r>
+              <a:rPr sz="1500">
+                <a:solidFill>
+                  <a:srgbClr val="6B7280"/>
                 </a:solidFill>
                 <a:latin typeface="Calibri"/>
-              </a:defRPr>
-            </a:pPr>
-            <a:r>
-              <a:t>•  Cálculo de Forward Rate con la fórmula de Covered Interest Rate Parity (CIP), mostrando paso a paso cómo se llega al resultado con los valores reales ingresados.</a:t>
+              </a:rPr>
+              <a:t>Cálculo de Forward Rate con la fórmula de Covered Interest Rate Parity (CIP), mostrando paso a paso cómo se llega al resultado con los valores reales ingresados.</a:t>
             </a:r>
           </a:p>
           <a:p>
             <a:pPr>
               <a:spcAft>
-                <a:spcPts val="1000"/>
+                <a:spcPts val="600"/>
               </a:spcAft>
-              <a:defRPr sz="1700">
-                <a:solidFill>
-                  <a:srgbClr val="475569"/>
+            </a:pPr>
+            <a:r>
+              <a:rPr sz="1500">
+                <a:solidFill>
+                  <a:srgbClr val="6B7280"/>
                 </a:solidFill>
                 <a:latin typeface="Calibri"/>
-              </a:defRPr>
-            </a:pPr>
-            <a:r>
-              <a:t>•  Soporta FX Spot, Forward FX y FX NDF desde el mismo motor, configurado por archivos JSON por producto.</a:t>
+              </a:rPr>
+              <a:t>Soporta FX Spot, Forward FX y FX NDF desde el mismo motor, configurado por archivos JSON por producto.</a:t>
             </a:r>
           </a:p>
         </p:txBody>
       </p:sp>
       <p:pic>
         <p:nvPicPr>
-          <p:cNvPr id="5" name="Picture 4" descr="simulador-forward.png"/>
+          <p:cNvPr id="8" name="Picture 7" descr="simulador-forward.png"/>
           <p:cNvPicPr>
             <a:picLocks noChangeAspect="1"/>
           </p:cNvPicPr>
@@ -4512,7 +7716,7 @@
         </p:blipFill>
         <p:spPr>
           <a:xfrm>
-            <a:off x="5943600" y="1554480"/>
+            <a:off x="5943600" y="1828800"/>
             <a:ext cx="5669280" cy="3543300"/>
           </a:xfrm>
           <a:prstGeom prst="rect">
@@ -4540,14 +7744,58 @@
       <p:grpSpPr/>
       <p:sp>
         <p:nvSpPr>
-          <p:cNvPr id="2" name="TextBox 1"/>
+          <p:cNvPr id="2" name="Rectangle 1"/>
+          <p:cNvSpPr/>
+          <p:nvPr/>
+        </p:nvSpPr>
+        <p:spPr>
+          <a:xfrm>
+            <a:off x="548640" y="320040"/>
+            <a:ext cx="109728" cy="109728"/>
+          </a:xfrm>
+          <a:prstGeom prst="rect">
+            <a:avLst/>
+          </a:prstGeom>
+          <a:solidFill>
+            <a:srgbClr val="E8622C"/>
+          </a:solidFill>
+          <a:ln>
+            <a:noFill/>
+          </a:ln>
+          <a:effectLst/>
+        </p:spPr>
+        <p:style>
+          <a:lnRef idx="1">
+            <a:schemeClr val="accent1"/>
+          </a:lnRef>
+          <a:fillRef idx="3">
+            <a:schemeClr val="accent1"/>
+          </a:fillRef>
+          <a:effectRef idx="2">
+            <a:schemeClr val="accent1"/>
+          </a:effectRef>
+          <a:fontRef idx="minor">
+            <a:schemeClr val="lt1"/>
+          </a:fontRef>
+        </p:style>
+        <p:txBody>
+          <a:bodyPr rtlCol="0" anchor="ctr"/>
+          <a:lstStyle/>
+          <a:p>
+            <a:pPr algn="ctr"/>
+          </a:p>
+        </p:txBody>
+      </p:sp>
+      <p:sp>
+        <p:nvSpPr>
+          <p:cNvPr id="3" name="TextBox 2"/>
           <p:cNvSpPr txBox="1"/>
           <p:nvPr/>
         </p:nvSpPr>
         <p:spPr>
           <a:xfrm>
-            <a:off x="548640" y="365760"/>
-            <a:ext cx="5486400" cy="365760"/>
+            <a:off x="749808" y="256032"/>
+            <a:ext cx="1828800" cy="274320"/>
           </a:xfrm>
           <a:prstGeom prst="rect">
             <a:avLst/>
@@ -4562,27 +7810,71 @@
           <a:p>
             <a:pPr algn="l"/>
             <a:r>
-              <a:rPr sz="1300" b="1">
-                <a:solidFill>
-                  <a:srgbClr val="2563EB"/>
+              <a:rPr sz="1100" b="1">
+                <a:solidFill>
+                  <a:srgbClr val="6B7280"/>
                 </a:solidFill>
                 <a:latin typeface="Calibri"/>
               </a:rPr>
-              <a:t>DEMO</a:t>
-            </a:r>
-          </a:p>
-        </p:txBody>
-      </p:sp>
-      <p:sp>
-        <p:nvSpPr>
-          <p:cNvPr id="3" name="TextBox 2"/>
+              <a:t>CALYPSO HUB</a:t>
+            </a:r>
+          </a:p>
+        </p:txBody>
+      </p:sp>
+      <p:sp>
+        <p:nvSpPr>
+          <p:cNvPr id="4" name="Rectangle 3"/>
+          <p:cNvSpPr/>
+          <p:nvPr/>
+        </p:nvSpPr>
+        <p:spPr>
+          <a:xfrm>
+            <a:off x="11612880" y="0"/>
+            <a:ext cx="576072" cy="502920"/>
+          </a:xfrm>
+          <a:prstGeom prst="rect">
+            <a:avLst/>
+          </a:prstGeom>
+          <a:solidFill>
+            <a:srgbClr val="E8622C"/>
+          </a:solidFill>
+          <a:ln>
+            <a:noFill/>
+          </a:ln>
+          <a:effectLst/>
+        </p:spPr>
+        <p:style>
+          <a:lnRef idx="1">
+            <a:schemeClr val="accent1"/>
+          </a:lnRef>
+          <a:fillRef idx="3">
+            <a:schemeClr val="accent1"/>
+          </a:fillRef>
+          <a:effectRef idx="2">
+            <a:schemeClr val="accent1"/>
+          </a:effectRef>
+          <a:fontRef idx="minor">
+            <a:schemeClr val="lt1"/>
+          </a:fontRef>
+        </p:style>
+        <p:txBody>
+          <a:bodyPr rtlCol="0" anchor="ctr"/>
+          <a:lstStyle/>
+          <a:p>
+            <a:pPr algn="ctr"/>
+          </a:p>
+        </p:txBody>
+      </p:sp>
+      <p:sp>
+        <p:nvSpPr>
+          <p:cNvPr id="5" name="TextBox 4"/>
           <p:cNvSpPr txBox="1"/>
           <p:nvPr/>
         </p:nvSpPr>
         <p:spPr>
           <a:xfrm>
-            <a:off x="548640" y="685800"/>
-            <a:ext cx="10058400" cy="731520"/>
+            <a:off x="548640" y="868680"/>
+            <a:ext cx="5486400" cy="320040"/>
           </a:xfrm>
           <a:prstGeom prst="rect">
             <a:avLst/>
@@ -4597,27 +7889,27 @@
           <a:p>
             <a:pPr algn="l"/>
             <a:r>
-              <a:rPr sz="3000" b="1">
-                <a:solidFill>
-                  <a:srgbClr val="0F1B3D"/>
+              <a:rPr sz="1200" b="1">
+                <a:solidFill>
+                  <a:srgbClr val="E8622C"/>
                 </a:solidFill>
                 <a:latin typeface="Calibri"/>
               </a:rPr>
-              <a:t>Diccionario interactivo</a:t>
-            </a:r>
-          </a:p>
-        </p:txBody>
-      </p:sp>
-      <p:sp>
-        <p:nvSpPr>
-          <p:cNvPr id="4" name="TextBox 3"/>
+              <a:t>DEMO</a:t>
+            </a:r>
+          </a:p>
+        </p:txBody>
+      </p:sp>
+      <p:sp>
+        <p:nvSpPr>
+          <p:cNvPr id="6" name="TextBox 5"/>
           <p:cNvSpPr txBox="1"/>
           <p:nvPr/>
         </p:nvSpPr>
         <p:spPr>
           <a:xfrm>
-            <a:off x="548640" y="1737360"/>
-            <a:ext cx="5120640" cy="4114800"/>
+            <a:off x="548640" y="1188720"/>
+            <a:ext cx="10515600" cy="640080"/>
           </a:xfrm>
           <a:prstGeom prst="rect">
             <a:avLst/>
@@ -4630,42 +7922,77 @@
           </a:bodyPr>
           <a:lstStyle/>
           <a:p>
+            <a:pPr algn="l"/>
+            <a:r>
+              <a:rPr sz="2800" b="1">
+                <a:solidFill>
+                  <a:srgbClr val="1F2430"/>
+                </a:solidFill>
+                <a:latin typeface="Calibri"/>
+              </a:rPr>
+              <a:t>Diccionario interactivo</a:t>
+            </a:r>
+          </a:p>
+        </p:txBody>
+      </p:sp>
+      <p:sp>
+        <p:nvSpPr>
+          <p:cNvPr id="7" name="TextBox 6"/>
+          <p:cNvSpPr txBox="1"/>
+          <p:nvPr/>
+        </p:nvSpPr>
+        <p:spPr>
+          <a:xfrm>
+            <a:off x="548640" y="2011680"/>
+            <a:ext cx="5120640" cy="4114800"/>
+          </a:xfrm>
+          <a:prstGeom prst="rect">
+            <a:avLst/>
+          </a:prstGeom>
+          <a:noFill/>
+        </p:spPr>
+        <p:txBody>
+          <a:bodyPr wrap="square">
+            <a:spAutoFit/>
+          </a:bodyPr>
+          <a:lstStyle/>
+          <a:p>
             <a:pPr>
               <a:spcAft>
-                <a:spcPts val="1000"/>
+                <a:spcPts val="600"/>
               </a:spcAft>
-              <a:defRPr sz="1700">
-                <a:solidFill>
-                  <a:srgbClr val="475569"/>
+            </a:pPr>
+            <a:r>
+              <a:rPr sz="1500">
+                <a:solidFill>
+                  <a:srgbClr val="6B7280"/>
                 </a:solidFill>
                 <a:latin typeface="Calibri"/>
-              </a:defRPr>
-            </a:pPr>
-            <a:r>
-              <a:t>•  Cada término del simulador tiene su definición, fórmula y origen del dato, organizados por módulo.</a:t>
+              </a:rPr>
+              <a:t>Cada término del simulador tiene su definición, fórmula y origen del dato, organizados por módulo.</a:t>
             </a:r>
           </a:p>
           <a:p>
             <a:pPr>
               <a:spcAft>
-                <a:spcPts val="1000"/>
+                <a:spcPts val="600"/>
               </a:spcAft>
-              <a:defRPr sz="1700">
-                <a:solidFill>
-                  <a:srgbClr val="475569"/>
+            </a:pPr>
+            <a:r>
+              <a:rPr sz="1500">
+                <a:solidFill>
+                  <a:srgbClr val="6B7280"/>
                 </a:solidFill>
                 <a:latin typeface="Calibri"/>
-              </a:defRPr>
-            </a:pPr>
-            <a:r>
-              <a:t>•  Etiquetado claro: TRANSFERIBLE para conceptos aplicables a otras plataformas, vs. específico de Calypso.</a:t>
+              </a:rPr>
+              <a:t>Etiquetado claro: TRANSFERIBLE para conceptos aplicables a otras plataformas, vs. específico de Calypso.</a:t>
             </a:r>
           </a:p>
         </p:txBody>
       </p:sp>
       <p:pic>
         <p:nvPicPr>
-          <p:cNvPr id="5" name="Picture 4" descr="diccionario.png"/>
+          <p:cNvPr id="8" name="Picture 7" descr="diccionario.png"/>
           <p:cNvPicPr>
             <a:picLocks noChangeAspect="1"/>
           </p:cNvPicPr>
@@ -4679,7 +8006,7 @@
         </p:blipFill>
         <p:spPr>
           <a:xfrm>
-            <a:off x="5943600" y="1554480"/>
+            <a:off x="5943600" y="1828800"/>
             <a:ext cx="5669280" cy="3543300"/>
           </a:xfrm>
           <a:prstGeom prst="rect">
@@ -4707,14 +8034,58 @@
       <p:grpSpPr/>
       <p:sp>
         <p:nvSpPr>
-          <p:cNvPr id="2" name="TextBox 1"/>
+          <p:cNvPr id="2" name="Rectangle 1"/>
+          <p:cNvSpPr/>
+          <p:nvPr/>
+        </p:nvSpPr>
+        <p:spPr>
+          <a:xfrm>
+            <a:off x="548640" y="320040"/>
+            <a:ext cx="109728" cy="109728"/>
+          </a:xfrm>
+          <a:prstGeom prst="rect">
+            <a:avLst/>
+          </a:prstGeom>
+          <a:solidFill>
+            <a:srgbClr val="E8622C"/>
+          </a:solidFill>
+          <a:ln>
+            <a:noFill/>
+          </a:ln>
+          <a:effectLst/>
+        </p:spPr>
+        <p:style>
+          <a:lnRef idx="1">
+            <a:schemeClr val="accent1"/>
+          </a:lnRef>
+          <a:fillRef idx="3">
+            <a:schemeClr val="accent1"/>
+          </a:fillRef>
+          <a:effectRef idx="2">
+            <a:schemeClr val="accent1"/>
+          </a:effectRef>
+          <a:fontRef idx="minor">
+            <a:schemeClr val="lt1"/>
+          </a:fontRef>
+        </p:style>
+        <p:txBody>
+          <a:bodyPr rtlCol="0" anchor="ctr"/>
+          <a:lstStyle/>
+          <a:p>
+            <a:pPr algn="ctr"/>
+          </a:p>
+        </p:txBody>
+      </p:sp>
+      <p:sp>
+        <p:nvSpPr>
+          <p:cNvPr id="3" name="TextBox 2"/>
           <p:cNvSpPr txBox="1"/>
           <p:nvPr/>
         </p:nvSpPr>
         <p:spPr>
           <a:xfrm>
-            <a:off x="548640" y="365760"/>
-            <a:ext cx="5486400" cy="365760"/>
+            <a:off x="749808" y="256032"/>
+            <a:ext cx="1828800" cy="274320"/>
           </a:xfrm>
           <a:prstGeom prst="rect">
             <a:avLst/>
@@ -4729,27 +8100,71 @@
           <a:p>
             <a:pPr algn="l"/>
             <a:r>
-              <a:rPr sz="1300" b="1">
-                <a:solidFill>
-                  <a:srgbClr val="2563EB"/>
+              <a:rPr sz="1100" b="1">
+                <a:solidFill>
+                  <a:srgbClr val="6B7280"/>
                 </a:solidFill>
                 <a:latin typeface="Calibri"/>
               </a:rPr>
-              <a:t>DEMO</a:t>
-            </a:r>
-          </a:p>
-        </p:txBody>
-      </p:sp>
-      <p:sp>
-        <p:nvSpPr>
-          <p:cNvPr id="3" name="TextBox 2"/>
+              <a:t>CALYPSO HUB</a:t>
+            </a:r>
+          </a:p>
+        </p:txBody>
+      </p:sp>
+      <p:sp>
+        <p:nvSpPr>
+          <p:cNvPr id="4" name="Rectangle 3"/>
+          <p:cNvSpPr/>
+          <p:nvPr/>
+        </p:nvSpPr>
+        <p:spPr>
+          <a:xfrm>
+            <a:off x="11612880" y="0"/>
+            <a:ext cx="576072" cy="502920"/>
+          </a:xfrm>
+          <a:prstGeom prst="rect">
+            <a:avLst/>
+          </a:prstGeom>
+          <a:solidFill>
+            <a:srgbClr val="E8622C"/>
+          </a:solidFill>
+          <a:ln>
+            <a:noFill/>
+          </a:ln>
+          <a:effectLst/>
+        </p:spPr>
+        <p:style>
+          <a:lnRef idx="1">
+            <a:schemeClr val="accent1"/>
+          </a:lnRef>
+          <a:fillRef idx="3">
+            <a:schemeClr val="accent1"/>
+          </a:fillRef>
+          <a:effectRef idx="2">
+            <a:schemeClr val="accent1"/>
+          </a:effectRef>
+          <a:fontRef idx="minor">
+            <a:schemeClr val="lt1"/>
+          </a:fontRef>
+        </p:style>
+        <p:txBody>
+          <a:bodyPr rtlCol="0" anchor="ctr"/>
+          <a:lstStyle/>
+          <a:p>
+            <a:pPr algn="ctr"/>
+          </a:p>
+        </p:txBody>
+      </p:sp>
+      <p:sp>
+        <p:nvSpPr>
+          <p:cNvPr id="5" name="TextBox 4"/>
           <p:cNvSpPr txBox="1"/>
           <p:nvPr/>
         </p:nvSpPr>
         <p:spPr>
           <a:xfrm>
-            <a:off x="548640" y="685800"/>
-            <a:ext cx="10058400" cy="731520"/>
+            <a:off x="548640" y="868680"/>
+            <a:ext cx="5486400" cy="320040"/>
           </a:xfrm>
           <a:prstGeom prst="rect">
             <a:avLst/>
@@ -4764,27 +8179,27 @@
           <a:p>
             <a:pPr algn="l"/>
             <a:r>
-              <a:rPr sz="3000" b="1">
-                <a:solidFill>
-                  <a:srgbClr val="0F1B3D"/>
+              <a:rPr sz="1200" b="1">
+                <a:solidFill>
+                  <a:srgbClr val="E8622C"/>
                 </a:solidFill>
                 <a:latin typeface="Calibri"/>
               </a:rPr>
-              <a:t>Editor de XML de trades (CDUF)</a:t>
-            </a:r>
-          </a:p>
-        </p:txBody>
-      </p:sp>
-      <p:sp>
-        <p:nvSpPr>
-          <p:cNvPr id="4" name="TextBox 3"/>
+              <a:t>DEMO</a:t>
+            </a:r>
+          </a:p>
+        </p:txBody>
+      </p:sp>
+      <p:sp>
+        <p:nvSpPr>
+          <p:cNvPr id="6" name="TextBox 5"/>
           <p:cNvSpPr txBox="1"/>
           <p:nvPr/>
         </p:nvSpPr>
         <p:spPr>
           <a:xfrm>
-            <a:off x="548640" y="1737360"/>
-            <a:ext cx="5120640" cy="4114800"/>
+            <a:off x="548640" y="1188720"/>
+            <a:ext cx="10515600" cy="640080"/>
           </a:xfrm>
           <a:prstGeom prst="rect">
             <a:avLst/>
@@ -4797,42 +8212,77 @@
           </a:bodyPr>
           <a:lstStyle/>
           <a:p>
+            <a:pPr algn="l"/>
+            <a:r>
+              <a:rPr sz="2800" b="1">
+                <a:solidFill>
+                  <a:srgbClr val="1F2430"/>
+                </a:solidFill>
+                <a:latin typeface="Calibri"/>
+              </a:rPr>
+              <a:t>Editor de XML de trades (CDUF)</a:t>
+            </a:r>
+          </a:p>
+        </p:txBody>
+      </p:sp>
+      <p:sp>
+        <p:nvSpPr>
+          <p:cNvPr id="7" name="TextBox 6"/>
+          <p:cNvSpPr txBox="1"/>
+          <p:nvPr/>
+        </p:nvSpPr>
+        <p:spPr>
+          <a:xfrm>
+            <a:off x="548640" y="2011680"/>
+            <a:ext cx="5120640" cy="4114800"/>
+          </a:xfrm>
+          <a:prstGeom prst="rect">
+            <a:avLst/>
+          </a:prstGeom>
+          <a:noFill/>
+        </p:spPr>
+        <p:txBody>
+          <a:bodyPr wrap="square">
+            <a:spAutoFit/>
+          </a:bodyPr>
+          <a:lstStyle/>
+          <a:p>
             <a:pPr>
               <a:spcAft>
-                <a:spcPts val="1000"/>
+                <a:spcPts val="600"/>
               </a:spcAft>
-              <a:defRPr sz="1700">
-                <a:solidFill>
-                  <a:srgbClr val="475569"/>
+            </a:pPr>
+            <a:r>
+              <a:rPr sz="1500">
+                <a:solidFill>
+                  <a:srgbClr val="6B7280"/>
                 </a:solidFill>
                 <a:latin typeface="Calibri"/>
-              </a:defRPr>
-            </a:pPr>
-            <a:r>
-              <a:t>•  Carga un XML de trade de Calypso y lo convierte en un formulario editable, con jerarquía visual de 3 niveles.</a:t>
+              </a:rPr>
+              <a:t>Carga un XML de trade de Calypso y lo convierte en un formulario editable, con jerarquía visual de 3 niveles.</a:t>
             </a:r>
           </a:p>
           <a:p>
             <a:pPr>
               <a:spcAft>
-                <a:spcPts val="1000"/>
+                <a:spcPts val="600"/>
               </a:spcAft>
-              <a:defRPr sz="1700">
-                <a:solidFill>
-                  <a:srgbClr val="475569"/>
+            </a:pPr>
+            <a:r>
+              <a:rPr sz="1500">
+                <a:solidFill>
+                  <a:srgbClr val="6B7280"/>
                 </a:solidFill>
                 <a:latin typeface="Calibri"/>
-              </a:defRPr>
-            </a:pPr>
-            <a:r>
-              <a:t>•  Campos y bloques repetibles (duplicar contrapartes, agregar valores), y exportación de vuelta a formato CDUF.</a:t>
+              </a:rPr>
+              <a:t>Campos y bloques repetibles (duplicar contrapartes, agregar valores), y exportación de vuelta a formato CDUF.</a:t>
             </a:r>
           </a:p>
         </p:txBody>
       </p:sp>
       <p:pic>
         <p:nvPicPr>
-          <p:cNvPr id="5" name="Picture 4" descr="xml-editor.png"/>
+          <p:cNvPr id="8" name="Picture 7" descr="xml-editor.png"/>
           <p:cNvPicPr>
             <a:picLocks noChangeAspect="1"/>
           </p:cNvPicPr>
@@ -4846,7 +8296,7 @@
         </p:blipFill>
         <p:spPr>
           <a:xfrm>
-            <a:off x="5943600" y="1554480"/>
+            <a:off x="5943600" y="1828800"/>
             <a:ext cx="5669280" cy="3937000"/>
           </a:xfrm>
           <a:prstGeom prst="rect">
@@ -4874,14 +8324,58 @@
       <p:grpSpPr/>
       <p:sp>
         <p:nvSpPr>
-          <p:cNvPr id="2" name="TextBox 1"/>
+          <p:cNvPr id="2" name="Rectangle 1"/>
+          <p:cNvSpPr/>
+          <p:nvPr/>
+        </p:nvSpPr>
+        <p:spPr>
+          <a:xfrm>
+            <a:off x="548640" y="320040"/>
+            <a:ext cx="109728" cy="109728"/>
+          </a:xfrm>
+          <a:prstGeom prst="rect">
+            <a:avLst/>
+          </a:prstGeom>
+          <a:solidFill>
+            <a:srgbClr val="E8622C"/>
+          </a:solidFill>
+          <a:ln>
+            <a:noFill/>
+          </a:ln>
+          <a:effectLst/>
+        </p:spPr>
+        <p:style>
+          <a:lnRef idx="1">
+            <a:schemeClr val="accent1"/>
+          </a:lnRef>
+          <a:fillRef idx="3">
+            <a:schemeClr val="accent1"/>
+          </a:fillRef>
+          <a:effectRef idx="2">
+            <a:schemeClr val="accent1"/>
+          </a:effectRef>
+          <a:fontRef idx="minor">
+            <a:schemeClr val="lt1"/>
+          </a:fontRef>
+        </p:style>
+        <p:txBody>
+          <a:bodyPr rtlCol="0" anchor="ctr"/>
+          <a:lstStyle/>
+          <a:p>
+            <a:pPr algn="ctr"/>
+          </a:p>
+        </p:txBody>
+      </p:sp>
+      <p:sp>
+        <p:nvSpPr>
+          <p:cNvPr id="3" name="TextBox 2"/>
           <p:cNvSpPr txBox="1"/>
           <p:nvPr/>
         </p:nvSpPr>
         <p:spPr>
           <a:xfrm>
-            <a:off x="548640" y="365760"/>
-            <a:ext cx="5486400" cy="365760"/>
+            <a:off x="749808" y="256032"/>
+            <a:ext cx="1828800" cy="274320"/>
           </a:xfrm>
           <a:prstGeom prst="rect">
             <a:avLst/>
@@ -4896,27 +8390,71 @@
           <a:p>
             <a:pPr algn="l"/>
             <a:r>
-              <a:rPr sz="1300" b="1">
-                <a:solidFill>
-                  <a:srgbClr val="2563EB"/>
+              <a:rPr sz="1100" b="1">
+                <a:solidFill>
+                  <a:srgbClr val="6B7280"/>
                 </a:solidFill>
                 <a:latin typeface="Calibri"/>
               </a:rPr>
-              <a:t>DEMO</a:t>
-            </a:r>
-          </a:p>
-        </p:txBody>
-      </p:sp>
-      <p:sp>
-        <p:nvSpPr>
-          <p:cNvPr id="3" name="TextBox 2"/>
+              <a:t>CALYPSO HUB</a:t>
+            </a:r>
+          </a:p>
+        </p:txBody>
+      </p:sp>
+      <p:sp>
+        <p:nvSpPr>
+          <p:cNvPr id="4" name="Rectangle 3"/>
+          <p:cNvSpPr/>
+          <p:nvPr/>
+        </p:nvSpPr>
+        <p:spPr>
+          <a:xfrm>
+            <a:off x="11612880" y="0"/>
+            <a:ext cx="576072" cy="502920"/>
+          </a:xfrm>
+          <a:prstGeom prst="rect">
+            <a:avLst/>
+          </a:prstGeom>
+          <a:solidFill>
+            <a:srgbClr val="E8622C"/>
+          </a:solidFill>
+          <a:ln>
+            <a:noFill/>
+          </a:ln>
+          <a:effectLst/>
+        </p:spPr>
+        <p:style>
+          <a:lnRef idx="1">
+            <a:schemeClr val="accent1"/>
+          </a:lnRef>
+          <a:fillRef idx="3">
+            <a:schemeClr val="accent1"/>
+          </a:fillRef>
+          <a:effectRef idx="2">
+            <a:schemeClr val="accent1"/>
+          </a:effectRef>
+          <a:fontRef idx="minor">
+            <a:schemeClr val="lt1"/>
+          </a:fontRef>
+        </p:style>
+        <p:txBody>
+          <a:bodyPr rtlCol="0" anchor="ctr"/>
+          <a:lstStyle/>
+          <a:p>
+            <a:pPr algn="ctr"/>
+          </a:p>
+        </p:txBody>
+      </p:sp>
+      <p:sp>
+        <p:nvSpPr>
+          <p:cNvPr id="5" name="TextBox 4"/>
           <p:cNvSpPr txBox="1"/>
           <p:nvPr/>
         </p:nvSpPr>
         <p:spPr>
           <a:xfrm>
-            <a:off x="548640" y="685800"/>
-            <a:ext cx="10058400" cy="731520"/>
+            <a:off x="548640" y="868680"/>
+            <a:ext cx="5486400" cy="320040"/>
           </a:xfrm>
           <a:prstGeom prst="rect">
             <a:avLst/>
@@ -4931,27 +8469,27 @@
           <a:p>
             <a:pPr algn="l"/>
             <a:r>
-              <a:rPr sz="3000" b="1">
-                <a:solidFill>
-                  <a:srgbClr val="0F1B3D"/>
+              <a:rPr sz="1200" b="1">
+                <a:solidFill>
+                  <a:srgbClr val="E8622C"/>
                 </a:solidFill>
                 <a:latin typeface="Calibri"/>
               </a:rPr>
-              <a:t>Gestión de contenido</a:t>
-            </a:r>
-          </a:p>
-        </p:txBody>
-      </p:sp>
-      <p:sp>
-        <p:nvSpPr>
-          <p:cNvPr id="4" name="TextBox 3"/>
+              <a:t>DEMO</a:t>
+            </a:r>
+          </a:p>
+        </p:txBody>
+      </p:sp>
+      <p:sp>
+        <p:nvSpPr>
+          <p:cNvPr id="6" name="TextBox 5"/>
           <p:cNvSpPr txBox="1"/>
           <p:nvPr/>
         </p:nvSpPr>
         <p:spPr>
           <a:xfrm>
-            <a:off x="548640" y="1737360"/>
-            <a:ext cx="5120640" cy="4114800"/>
+            <a:off x="548640" y="1188720"/>
+            <a:ext cx="10515600" cy="640080"/>
           </a:xfrm>
           <a:prstGeom prst="rect">
             <a:avLst/>
@@ -4964,42 +8502,77 @@
           </a:bodyPr>
           <a:lstStyle/>
           <a:p>
+            <a:pPr algn="l"/>
+            <a:r>
+              <a:rPr sz="2800" b="1">
+                <a:solidFill>
+                  <a:srgbClr val="1F2430"/>
+                </a:solidFill>
+                <a:latin typeface="Calibri"/>
+              </a:rPr>
+              <a:t>Gestión de contenido</a:t>
+            </a:r>
+          </a:p>
+        </p:txBody>
+      </p:sp>
+      <p:sp>
+        <p:nvSpPr>
+          <p:cNvPr id="7" name="TextBox 6"/>
+          <p:cNvSpPr txBox="1"/>
+          <p:nvPr/>
+        </p:nvSpPr>
+        <p:spPr>
+          <a:xfrm>
+            <a:off x="548640" y="2011680"/>
+            <a:ext cx="5120640" cy="4114800"/>
+          </a:xfrm>
+          <a:prstGeom prst="rect">
+            <a:avLst/>
+          </a:prstGeom>
+          <a:noFill/>
+        </p:spPr>
+        <p:txBody>
+          <a:bodyPr wrap="square">
+            <a:spAutoFit/>
+          </a:bodyPr>
+          <a:lstStyle/>
+          <a:p>
             <a:pPr>
               <a:spcAft>
-                <a:spcPts val="1000"/>
+                <a:spcPts val="600"/>
               </a:spcAft>
-              <a:defRPr sz="1700">
-                <a:solidFill>
-                  <a:srgbClr val="475569"/>
+            </a:pPr>
+            <a:r>
+              <a:rPr sz="1500">
+                <a:solidFill>
+                  <a:srgbClr val="6B7280"/>
                 </a:solidFill>
                 <a:latin typeface="Calibri"/>
-              </a:defRPr>
-            </a:pPr>
-            <a:r>
-              <a:t>•  Formulario para proponer nuevos términos al diccionario sin tocar código.</a:t>
+              </a:rPr>
+              <a:t>Formulario para proponer nuevos términos al diccionario sin tocar código.</a:t>
             </a:r>
           </a:p>
           <a:p>
             <a:pPr>
               <a:spcAft>
-                <a:spcPts val="1000"/>
+                <a:spcPts val="600"/>
               </a:spcAft>
-              <a:defRPr sz="1700">
-                <a:solidFill>
-                  <a:srgbClr val="475569"/>
+            </a:pPr>
+            <a:r>
+              <a:rPr sz="1500">
+                <a:solidFill>
+                  <a:srgbClr val="6B7280"/>
                 </a:solidFill>
                 <a:latin typeface="Calibri"/>
-              </a:defRPr>
-            </a:pPr>
-            <a:r>
-              <a:t>•  Pensado para recibir entradas generadas externamente con IA, manteniendo el control de calidad humano.</a:t>
+              </a:rPr>
+              <a:t>Pensado para recibir entradas generadas externamente con IA, manteniendo el control de calidad humano.</a:t>
             </a:r>
           </a:p>
         </p:txBody>
       </p:sp>
       <p:pic>
         <p:nvPicPr>
-          <p:cNvPr id="5" name="Picture 4" descr="gestion.png"/>
+          <p:cNvPr id="8" name="Picture 7" descr="gestion.png"/>
           <p:cNvPicPr>
             <a:picLocks noChangeAspect="1"/>
           </p:cNvPicPr>
@@ -5013,7 +8586,7 @@
         </p:blipFill>
         <p:spPr>
           <a:xfrm>
-            <a:off x="5943600" y="1554480"/>
+            <a:off x="5943600" y="1828800"/>
             <a:ext cx="5669280" cy="3937000"/>
           </a:xfrm>
           <a:prstGeom prst="rect">
@@ -5041,14 +8614,58 @@
       <p:grpSpPr/>
       <p:sp>
         <p:nvSpPr>
-          <p:cNvPr id="2" name="TextBox 1"/>
+          <p:cNvPr id="2" name="Rectangle 1"/>
+          <p:cNvSpPr/>
+          <p:nvPr/>
+        </p:nvSpPr>
+        <p:spPr>
+          <a:xfrm>
+            <a:off x="548640" y="320040"/>
+            <a:ext cx="109728" cy="109728"/>
+          </a:xfrm>
+          <a:prstGeom prst="rect">
+            <a:avLst/>
+          </a:prstGeom>
+          <a:solidFill>
+            <a:srgbClr val="E8622C"/>
+          </a:solidFill>
+          <a:ln>
+            <a:noFill/>
+          </a:ln>
+          <a:effectLst/>
+        </p:spPr>
+        <p:style>
+          <a:lnRef idx="1">
+            <a:schemeClr val="accent1"/>
+          </a:lnRef>
+          <a:fillRef idx="3">
+            <a:schemeClr val="accent1"/>
+          </a:fillRef>
+          <a:effectRef idx="2">
+            <a:schemeClr val="accent1"/>
+          </a:effectRef>
+          <a:fontRef idx="minor">
+            <a:schemeClr val="lt1"/>
+          </a:fontRef>
+        </p:style>
+        <p:txBody>
+          <a:bodyPr rtlCol="0" anchor="ctr"/>
+          <a:lstStyle/>
+          <a:p>
+            <a:pPr algn="ctr"/>
+          </a:p>
+        </p:txBody>
+      </p:sp>
+      <p:sp>
+        <p:nvSpPr>
+          <p:cNvPr id="3" name="TextBox 2"/>
           <p:cNvSpPr txBox="1"/>
           <p:nvPr/>
         </p:nvSpPr>
         <p:spPr>
           <a:xfrm>
-            <a:off x="548640" y="365760"/>
-            <a:ext cx="5486400" cy="365760"/>
+            <a:off x="749808" y="256032"/>
+            <a:ext cx="1828800" cy="274320"/>
           </a:xfrm>
           <a:prstGeom prst="rect">
             <a:avLst/>
@@ -5063,27 +8680,71 @@
           <a:p>
             <a:pPr algn="l"/>
             <a:r>
-              <a:rPr sz="1300" b="1">
-                <a:solidFill>
-                  <a:srgbClr val="2563EB"/>
+              <a:rPr sz="1100" b="1">
+                <a:solidFill>
+                  <a:srgbClr val="6B7280"/>
                 </a:solidFill>
                 <a:latin typeface="Calibri"/>
               </a:rPr>
-              <a:t>CÓMO SE CONSTRUYÓ</a:t>
-            </a:r>
-          </a:p>
-        </p:txBody>
-      </p:sp>
-      <p:sp>
-        <p:nvSpPr>
-          <p:cNvPr id="3" name="TextBox 2"/>
+              <a:t>CALYPSO HUB</a:t>
+            </a:r>
+          </a:p>
+        </p:txBody>
+      </p:sp>
+      <p:sp>
+        <p:nvSpPr>
+          <p:cNvPr id="4" name="Rectangle 3"/>
+          <p:cNvSpPr/>
+          <p:nvPr/>
+        </p:nvSpPr>
+        <p:spPr>
+          <a:xfrm>
+            <a:off x="11612880" y="0"/>
+            <a:ext cx="576072" cy="502920"/>
+          </a:xfrm>
+          <a:prstGeom prst="rect">
+            <a:avLst/>
+          </a:prstGeom>
+          <a:solidFill>
+            <a:srgbClr val="E8622C"/>
+          </a:solidFill>
+          <a:ln>
+            <a:noFill/>
+          </a:ln>
+          <a:effectLst/>
+        </p:spPr>
+        <p:style>
+          <a:lnRef idx="1">
+            <a:schemeClr val="accent1"/>
+          </a:lnRef>
+          <a:fillRef idx="3">
+            <a:schemeClr val="accent1"/>
+          </a:fillRef>
+          <a:effectRef idx="2">
+            <a:schemeClr val="accent1"/>
+          </a:effectRef>
+          <a:fontRef idx="minor">
+            <a:schemeClr val="lt1"/>
+          </a:fontRef>
+        </p:style>
+        <p:txBody>
+          <a:bodyPr rtlCol="0" anchor="ctr"/>
+          <a:lstStyle/>
+          <a:p>
+            <a:pPr algn="ctr"/>
+          </a:p>
+        </p:txBody>
+      </p:sp>
+      <p:sp>
+        <p:nvSpPr>
+          <p:cNvPr id="5" name="TextBox 4"/>
           <p:cNvSpPr txBox="1"/>
           <p:nvPr/>
         </p:nvSpPr>
         <p:spPr>
           <a:xfrm>
-            <a:off x="548640" y="685800"/>
-            <a:ext cx="10058400" cy="731520"/>
+            <a:off x="548640" y="868680"/>
+            <a:ext cx="5486400" cy="320040"/>
           </a:xfrm>
           <a:prstGeom prst="rect">
             <a:avLst/>
@@ -5098,27 +8759,27 @@
           <a:p>
             <a:pPr algn="l"/>
             <a:r>
-              <a:rPr sz="3000" b="1">
-                <a:solidFill>
-                  <a:srgbClr val="0F1B3D"/>
+              <a:rPr sz="1200" b="1">
+                <a:solidFill>
+                  <a:srgbClr val="E8622C"/>
                 </a:solidFill>
                 <a:latin typeface="Calibri"/>
               </a:rPr>
-              <a:t>Buenas prácticas de IA agéntica</a:t>
-            </a:r>
-          </a:p>
-        </p:txBody>
-      </p:sp>
-      <p:sp>
-        <p:nvSpPr>
-          <p:cNvPr id="4" name="TextBox 3"/>
+              <a:t>CÓMO SE CONSTRUYÓ</a:t>
+            </a:r>
+          </a:p>
+        </p:txBody>
+      </p:sp>
+      <p:sp>
+        <p:nvSpPr>
+          <p:cNvPr id="6" name="TextBox 5"/>
           <p:cNvSpPr txBox="1"/>
           <p:nvPr/>
         </p:nvSpPr>
         <p:spPr>
           <a:xfrm>
-            <a:off x="548640" y="1554480"/>
-            <a:ext cx="10789920" cy="4572000"/>
+            <a:off x="548640" y="1188720"/>
+            <a:ext cx="10515600" cy="640080"/>
           </a:xfrm>
           <a:prstGeom prst="rect">
             <a:avLst/>
@@ -5131,83 +8792,720 @@
           </a:bodyPr>
           <a:lstStyle/>
           <a:p>
-            <a:pPr>
-              <a:spcAft>
-                <a:spcPts val="1000"/>
-              </a:spcAft>
-              <a:defRPr sz="1800">
-                <a:solidFill>
-                  <a:srgbClr val="475569"/>
+            <a:pPr algn="l"/>
+            <a:r>
+              <a:rPr sz="2800" b="1">
+                <a:solidFill>
+                  <a:srgbClr val="1F2430"/>
                 </a:solidFill>
                 <a:latin typeface="Calibri"/>
-              </a:defRPr>
-            </a:pPr>
-            <a:r>
-              <a:t>•  Plan antes de código: ningún cambio se implementó sin presentar el plan y obtener confirmación explícita.</a:t>
-            </a:r>
-          </a:p>
-          <a:p>
-            <a:pPr>
-              <a:spcAft>
-                <a:spcPts val="1000"/>
-              </a:spcAft>
-              <a:defRPr sz="1800">
-                <a:solidFill>
-                  <a:srgbClr val="475569"/>
-                </a:solidFill>
-                <a:latin typeface="Calibri"/>
-              </a:defRPr>
-            </a:pPr>
-            <a:r>
-              <a:t>•  Validación financiera humana obligatoria: cada fórmula se explicó en términos simples y se confirmó su fuente antes de implementarla — ninguna fórmula se inventó.</a:t>
-            </a:r>
-          </a:p>
-          <a:p>
-            <a:pPr>
-              <a:spcAft>
-                <a:spcPts val="1000"/>
-              </a:spcAft>
-              <a:defRPr sz="1800">
-                <a:solidFill>
-                  <a:srgbClr val="475569"/>
-                </a:solidFill>
-                <a:latin typeface="Calibri"/>
-              </a:defRPr>
-            </a:pPr>
-            <a:r>
-              <a:t>•  Una feature por sesión/commit: 14 Pull Requests en el historial, cambios pequeños y revisables.</a:t>
-            </a:r>
-          </a:p>
-          <a:p>
-            <a:pPr>
-              <a:spcAft>
-                <a:spcPts val="1000"/>
-              </a:spcAft>
-              <a:defRPr sz="1800">
-                <a:solidFill>
-                  <a:srgbClr val="475569"/>
-                </a:solidFill>
-                <a:latin typeface="Calibri"/>
-              </a:defRPr>
-            </a:pPr>
-            <a:r>
-              <a:t>•  Arquitectura por configuración: agregar un producto financiero nuevo no requiere tocar el motor de cálculo.</a:t>
-            </a:r>
-          </a:p>
-          <a:p>
-            <a:pPr>
-              <a:spcAft>
-                <a:spcPts val="1000"/>
-              </a:spcAft>
-              <a:defRPr sz="1800">
-                <a:solidFill>
-                  <a:srgbClr val="475569"/>
-                </a:solidFill>
-                <a:latin typeface="Calibri"/>
-              </a:defRPr>
-            </a:pPr>
-            <a:r>
-              <a:t>•  Convenciones consistentes: commits en español, ramas descriptivas, hooks de verificación antes de cada push.</a:t>
+              </a:rPr>
+              <a:t>Buenas prácticas de IA agéntica</a:t>
+            </a:r>
+          </a:p>
+        </p:txBody>
+      </p:sp>
+      <p:sp>
+        <p:nvSpPr>
+          <p:cNvPr id="7" name="Rounded Rectangle 6"/>
+          <p:cNvSpPr/>
+          <p:nvPr/>
+        </p:nvSpPr>
+        <p:spPr>
+          <a:xfrm>
+            <a:off x="548640" y="1965960"/>
+            <a:ext cx="7863840" cy="640080"/>
+          </a:xfrm>
+          <a:prstGeom prst="roundRect">
+            <a:avLst/>
+          </a:prstGeom>
+          <a:solidFill>
+            <a:srgbClr val="FFFFFF"/>
+          </a:solidFill>
+          <a:ln w="12700">
+            <a:solidFill>
+              <a:srgbClr val="ECE7E2"/>
+            </a:solidFill>
+          </a:ln>
+          <a:effectLst/>
+        </p:spPr>
+        <p:style>
+          <a:lnRef idx="1">
+            <a:schemeClr val="accent1"/>
+          </a:lnRef>
+          <a:fillRef idx="3">
+            <a:schemeClr val="accent1"/>
+          </a:fillRef>
+          <a:effectRef idx="2">
+            <a:schemeClr val="accent1"/>
+          </a:effectRef>
+          <a:fontRef idx="minor">
+            <a:schemeClr val="lt1"/>
+          </a:fontRef>
+        </p:style>
+        <p:txBody>
+          <a:bodyPr rtlCol="0" anchor="ctr"/>
+          <a:lstStyle/>
+          <a:p>
+            <a:pPr algn="ctr"/>
+          </a:p>
+        </p:txBody>
+      </p:sp>
+      <p:sp>
+        <p:nvSpPr>
+          <p:cNvPr id="8" name="Rounded Rectangle 7"/>
+          <p:cNvSpPr/>
+          <p:nvPr/>
+        </p:nvSpPr>
+        <p:spPr>
+          <a:xfrm>
+            <a:off x="685800" y="2075688"/>
+            <a:ext cx="411480" cy="365760"/>
+          </a:xfrm>
+          <a:prstGeom prst="roundRect">
+            <a:avLst/>
+          </a:prstGeom>
+          <a:solidFill>
+            <a:srgbClr val="FBEAE2"/>
+          </a:solidFill>
+          <a:ln>
+            <a:noFill/>
+          </a:ln>
+          <a:effectLst/>
+        </p:spPr>
+        <p:style>
+          <a:lnRef idx="1">
+            <a:schemeClr val="accent1"/>
+          </a:lnRef>
+          <a:fillRef idx="3">
+            <a:schemeClr val="accent1"/>
+          </a:fillRef>
+          <a:effectRef idx="2">
+            <a:schemeClr val="accent1"/>
+          </a:effectRef>
+          <a:fontRef idx="minor">
+            <a:schemeClr val="lt1"/>
+          </a:fontRef>
+        </p:style>
+        <p:txBody>
+          <a:bodyPr rtlCol="0" anchor="ctr"/>
+          <a:lstStyle/>
+          <a:p>
+            <a:pPr algn="ctr"/>
+            <a:r>
+              <a:rPr sz="1200" b="1">
+                <a:solidFill>
+                  <a:srgbClr val="C84A1E"/>
+                </a:solidFill>
+              </a:rPr>
+              <a:t>01</a:t>
+            </a:r>
+          </a:p>
+        </p:txBody>
+      </p:sp>
+      <p:sp>
+        <p:nvSpPr>
+          <p:cNvPr id="9" name="TextBox 8"/>
+          <p:cNvSpPr txBox="1"/>
+          <p:nvPr/>
+        </p:nvSpPr>
+        <p:spPr>
+          <a:xfrm>
+            <a:off x="1234440" y="2029968"/>
+            <a:ext cx="6995160" cy="512064"/>
+          </a:xfrm>
+          <a:prstGeom prst="rect">
+            <a:avLst/>
+          </a:prstGeom>
+          <a:noFill/>
+        </p:spPr>
+        <p:txBody>
+          <a:bodyPr wrap="square">
+            <a:spAutoFit/>
+          </a:bodyPr>
+          <a:lstStyle/>
+          <a:p>
+            <a:r>
+              <a:rPr b="1" sz="1300">
+                <a:solidFill>
+                  <a:srgbClr val="1F2430"/>
+                </a:solidFill>
+              </a:rPr>
+              <a:t>Plan antes de código</a:t>
+            </a:r>
+          </a:p>
+          <a:p>
+            <a:r>
+              <a:rPr sz="1100">
+                <a:solidFill>
+                  <a:srgbClr val="6B7280"/>
+                </a:solidFill>
+              </a:rPr>
+              <a:t>Ningún cambio se implementó sin presentar el plan y obtener confirmación explícita.</a:t>
+            </a:r>
+          </a:p>
+        </p:txBody>
+      </p:sp>
+      <p:sp>
+        <p:nvSpPr>
+          <p:cNvPr id="10" name="Rounded Rectangle 9"/>
+          <p:cNvSpPr/>
+          <p:nvPr/>
+        </p:nvSpPr>
+        <p:spPr>
+          <a:xfrm>
+            <a:off x="548640" y="2697479"/>
+            <a:ext cx="7863840" cy="640080"/>
+          </a:xfrm>
+          <a:prstGeom prst="roundRect">
+            <a:avLst/>
+          </a:prstGeom>
+          <a:solidFill>
+            <a:srgbClr val="FFFFFF"/>
+          </a:solidFill>
+          <a:ln w="12700">
+            <a:solidFill>
+              <a:srgbClr val="ECE7E2"/>
+            </a:solidFill>
+          </a:ln>
+          <a:effectLst/>
+        </p:spPr>
+        <p:style>
+          <a:lnRef idx="1">
+            <a:schemeClr val="accent1"/>
+          </a:lnRef>
+          <a:fillRef idx="3">
+            <a:schemeClr val="accent1"/>
+          </a:fillRef>
+          <a:effectRef idx="2">
+            <a:schemeClr val="accent1"/>
+          </a:effectRef>
+          <a:fontRef idx="minor">
+            <a:schemeClr val="lt1"/>
+          </a:fontRef>
+        </p:style>
+        <p:txBody>
+          <a:bodyPr rtlCol="0" anchor="ctr"/>
+          <a:lstStyle/>
+          <a:p>
+            <a:pPr algn="ctr"/>
+          </a:p>
+        </p:txBody>
+      </p:sp>
+      <p:sp>
+        <p:nvSpPr>
+          <p:cNvPr id="11" name="Rounded Rectangle 10"/>
+          <p:cNvSpPr/>
+          <p:nvPr/>
+        </p:nvSpPr>
+        <p:spPr>
+          <a:xfrm>
+            <a:off x="685800" y="2807207"/>
+            <a:ext cx="411480" cy="365760"/>
+          </a:xfrm>
+          <a:prstGeom prst="roundRect">
+            <a:avLst/>
+          </a:prstGeom>
+          <a:solidFill>
+            <a:srgbClr val="FBEAE2"/>
+          </a:solidFill>
+          <a:ln>
+            <a:noFill/>
+          </a:ln>
+          <a:effectLst/>
+        </p:spPr>
+        <p:style>
+          <a:lnRef idx="1">
+            <a:schemeClr val="accent1"/>
+          </a:lnRef>
+          <a:fillRef idx="3">
+            <a:schemeClr val="accent1"/>
+          </a:fillRef>
+          <a:effectRef idx="2">
+            <a:schemeClr val="accent1"/>
+          </a:effectRef>
+          <a:fontRef idx="minor">
+            <a:schemeClr val="lt1"/>
+          </a:fontRef>
+        </p:style>
+        <p:txBody>
+          <a:bodyPr rtlCol="0" anchor="ctr"/>
+          <a:lstStyle/>
+          <a:p>
+            <a:pPr algn="ctr"/>
+            <a:r>
+              <a:rPr sz="1200" b="1">
+                <a:solidFill>
+                  <a:srgbClr val="C84A1E"/>
+                </a:solidFill>
+              </a:rPr>
+              <a:t>02</a:t>
+            </a:r>
+          </a:p>
+        </p:txBody>
+      </p:sp>
+      <p:sp>
+        <p:nvSpPr>
+          <p:cNvPr id="12" name="TextBox 11"/>
+          <p:cNvSpPr txBox="1"/>
+          <p:nvPr/>
+        </p:nvSpPr>
+        <p:spPr>
+          <a:xfrm>
+            <a:off x="1234440" y="2761487"/>
+            <a:ext cx="6995160" cy="512064"/>
+          </a:xfrm>
+          <a:prstGeom prst="rect">
+            <a:avLst/>
+          </a:prstGeom>
+          <a:noFill/>
+        </p:spPr>
+        <p:txBody>
+          <a:bodyPr wrap="square">
+            <a:spAutoFit/>
+          </a:bodyPr>
+          <a:lstStyle/>
+          <a:p>
+            <a:r>
+              <a:rPr b="1" sz="1300">
+                <a:solidFill>
+                  <a:srgbClr val="1F2430"/>
+                </a:solidFill>
+              </a:rPr>
+              <a:t>Validación financiera humana</a:t>
+            </a:r>
+          </a:p>
+          <a:p>
+            <a:r>
+              <a:rPr sz="1100">
+                <a:solidFill>
+                  <a:srgbClr val="6B7280"/>
+                </a:solidFill>
+              </a:rPr>
+              <a:t>Cada fórmula se explicó en términos simples y se confirmó su fuente antes de implementarla — ninguna se inventó.</a:t>
+            </a:r>
+          </a:p>
+        </p:txBody>
+      </p:sp>
+      <p:sp>
+        <p:nvSpPr>
+          <p:cNvPr id="13" name="Rounded Rectangle 12"/>
+          <p:cNvSpPr/>
+          <p:nvPr/>
+        </p:nvSpPr>
+        <p:spPr>
+          <a:xfrm>
+            <a:off x="548640" y="3428999"/>
+            <a:ext cx="7863840" cy="640080"/>
+          </a:xfrm>
+          <a:prstGeom prst="roundRect">
+            <a:avLst/>
+          </a:prstGeom>
+          <a:solidFill>
+            <a:srgbClr val="FFFFFF"/>
+          </a:solidFill>
+          <a:ln w="12700">
+            <a:solidFill>
+              <a:srgbClr val="ECE7E2"/>
+            </a:solidFill>
+          </a:ln>
+          <a:effectLst/>
+        </p:spPr>
+        <p:style>
+          <a:lnRef idx="1">
+            <a:schemeClr val="accent1"/>
+          </a:lnRef>
+          <a:fillRef idx="3">
+            <a:schemeClr val="accent1"/>
+          </a:fillRef>
+          <a:effectRef idx="2">
+            <a:schemeClr val="accent1"/>
+          </a:effectRef>
+          <a:fontRef idx="minor">
+            <a:schemeClr val="lt1"/>
+          </a:fontRef>
+        </p:style>
+        <p:txBody>
+          <a:bodyPr rtlCol="0" anchor="ctr"/>
+          <a:lstStyle/>
+          <a:p>
+            <a:pPr algn="ctr"/>
+          </a:p>
+        </p:txBody>
+      </p:sp>
+      <p:sp>
+        <p:nvSpPr>
+          <p:cNvPr id="14" name="Rounded Rectangle 13"/>
+          <p:cNvSpPr/>
+          <p:nvPr/>
+        </p:nvSpPr>
+        <p:spPr>
+          <a:xfrm>
+            <a:off x="685800" y="3538727"/>
+            <a:ext cx="411480" cy="365760"/>
+          </a:xfrm>
+          <a:prstGeom prst="roundRect">
+            <a:avLst/>
+          </a:prstGeom>
+          <a:solidFill>
+            <a:srgbClr val="FBEAE2"/>
+          </a:solidFill>
+          <a:ln>
+            <a:noFill/>
+          </a:ln>
+          <a:effectLst/>
+        </p:spPr>
+        <p:style>
+          <a:lnRef idx="1">
+            <a:schemeClr val="accent1"/>
+          </a:lnRef>
+          <a:fillRef idx="3">
+            <a:schemeClr val="accent1"/>
+          </a:fillRef>
+          <a:effectRef idx="2">
+            <a:schemeClr val="accent1"/>
+          </a:effectRef>
+          <a:fontRef idx="minor">
+            <a:schemeClr val="lt1"/>
+          </a:fontRef>
+        </p:style>
+        <p:txBody>
+          <a:bodyPr rtlCol="0" anchor="ctr"/>
+          <a:lstStyle/>
+          <a:p>
+            <a:pPr algn="ctr"/>
+            <a:r>
+              <a:rPr sz="1200" b="1">
+                <a:solidFill>
+                  <a:srgbClr val="C84A1E"/>
+                </a:solidFill>
+              </a:rPr>
+              <a:t>03</a:t>
+            </a:r>
+          </a:p>
+        </p:txBody>
+      </p:sp>
+      <p:sp>
+        <p:nvSpPr>
+          <p:cNvPr id="15" name="TextBox 14"/>
+          <p:cNvSpPr txBox="1"/>
+          <p:nvPr/>
+        </p:nvSpPr>
+        <p:spPr>
+          <a:xfrm>
+            <a:off x="1234440" y="3493007"/>
+            <a:ext cx="6995160" cy="512064"/>
+          </a:xfrm>
+          <a:prstGeom prst="rect">
+            <a:avLst/>
+          </a:prstGeom>
+          <a:noFill/>
+        </p:spPr>
+        <p:txBody>
+          <a:bodyPr wrap="square">
+            <a:spAutoFit/>
+          </a:bodyPr>
+          <a:lstStyle/>
+          <a:p>
+            <a:r>
+              <a:rPr b="1" sz="1300">
+                <a:solidFill>
+                  <a:srgbClr val="1F2430"/>
+                </a:solidFill>
+              </a:rPr>
+              <a:t>Una feature por commit</a:t>
+            </a:r>
+          </a:p>
+          <a:p>
+            <a:r>
+              <a:rPr sz="1100">
+                <a:solidFill>
+                  <a:srgbClr val="6B7280"/>
+                </a:solidFill>
+              </a:rPr>
+              <a:t>14 Pull Requests en el historial, cambios pequeños y revisables.</a:t>
+            </a:r>
+          </a:p>
+        </p:txBody>
+      </p:sp>
+      <p:sp>
+        <p:nvSpPr>
+          <p:cNvPr id="16" name="Rounded Rectangle 15"/>
+          <p:cNvSpPr/>
+          <p:nvPr/>
+        </p:nvSpPr>
+        <p:spPr>
+          <a:xfrm>
+            <a:off x="548640" y="4160520"/>
+            <a:ext cx="7863840" cy="640080"/>
+          </a:xfrm>
+          <a:prstGeom prst="roundRect">
+            <a:avLst/>
+          </a:prstGeom>
+          <a:solidFill>
+            <a:srgbClr val="FFFFFF"/>
+          </a:solidFill>
+          <a:ln w="12700">
+            <a:solidFill>
+              <a:srgbClr val="ECE7E2"/>
+            </a:solidFill>
+          </a:ln>
+          <a:effectLst/>
+        </p:spPr>
+        <p:style>
+          <a:lnRef idx="1">
+            <a:schemeClr val="accent1"/>
+          </a:lnRef>
+          <a:fillRef idx="3">
+            <a:schemeClr val="accent1"/>
+          </a:fillRef>
+          <a:effectRef idx="2">
+            <a:schemeClr val="accent1"/>
+          </a:effectRef>
+          <a:fontRef idx="minor">
+            <a:schemeClr val="lt1"/>
+          </a:fontRef>
+        </p:style>
+        <p:txBody>
+          <a:bodyPr rtlCol="0" anchor="ctr"/>
+          <a:lstStyle/>
+          <a:p>
+            <a:pPr algn="ctr"/>
+          </a:p>
+        </p:txBody>
+      </p:sp>
+      <p:sp>
+        <p:nvSpPr>
+          <p:cNvPr id="17" name="Rounded Rectangle 16"/>
+          <p:cNvSpPr/>
+          <p:nvPr/>
+        </p:nvSpPr>
+        <p:spPr>
+          <a:xfrm>
+            <a:off x="685800" y="4270248"/>
+            <a:ext cx="411480" cy="365760"/>
+          </a:xfrm>
+          <a:prstGeom prst="roundRect">
+            <a:avLst/>
+          </a:prstGeom>
+          <a:solidFill>
+            <a:srgbClr val="FBEAE2"/>
+          </a:solidFill>
+          <a:ln>
+            <a:noFill/>
+          </a:ln>
+          <a:effectLst/>
+        </p:spPr>
+        <p:style>
+          <a:lnRef idx="1">
+            <a:schemeClr val="accent1"/>
+          </a:lnRef>
+          <a:fillRef idx="3">
+            <a:schemeClr val="accent1"/>
+          </a:fillRef>
+          <a:effectRef idx="2">
+            <a:schemeClr val="accent1"/>
+          </a:effectRef>
+          <a:fontRef idx="minor">
+            <a:schemeClr val="lt1"/>
+          </a:fontRef>
+        </p:style>
+        <p:txBody>
+          <a:bodyPr rtlCol="0" anchor="ctr"/>
+          <a:lstStyle/>
+          <a:p>
+            <a:pPr algn="ctr"/>
+            <a:r>
+              <a:rPr sz="1200" b="1">
+                <a:solidFill>
+                  <a:srgbClr val="C84A1E"/>
+                </a:solidFill>
+              </a:rPr>
+              <a:t>04</a:t>
+            </a:r>
+          </a:p>
+        </p:txBody>
+      </p:sp>
+      <p:sp>
+        <p:nvSpPr>
+          <p:cNvPr id="18" name="TextBox 17"/>
+          <p:cNvSpPr txBox="1"/>
+          <p:nvPr/>
+        </p:nvSpPr>
+        <p:spPr>
+          <a:xfrm>
+            <a:off x="1234440" y="4224528"/>
+            <a:ext cx="6995160" cy="512064"/>
+          </a:xfrm>
+          <a:prstGeom prst="rect">
+            <a:avLst/>
+          </a:prstGeom>
+          <a:noFill/>
+        </p:spPr>
+        <p:txBody>
+          <a:bodyPr wrap="square">
+            <a:spAutoFit/>
+          </a:bodyPr>
+          <a:lstStyle/>
+          <a:p>
+            <a:r>
+              <a:rPr b="1" sz="1300">
+                <a:solidFill>
+                  <a:srgbClr val="1F2430"/>
+                </a:solidFill>
+              </a:rPr>
+              <a:t>Arquitectura por configuración</a:t>
+            </a:r>
+          </a:p>
+          <a:p>
+            <a:r>
+              <a:rPr sz="1100">
+                <a:solidFill>
+                  <a:srgbClr val="6B7280"/>
+                </a:solidFill>
+              </a:rPr>
+              <a:t>Agregar un producto financiero nuevo no requiere tocar el motor de cálculo.</a:t>
+            </a:r>
+          </a:p>
+        </p:txBody>
+      </p:sp>
+      <p:sp>
+        <p:nvSpPr>
+          <p:cNvPr id="19" name="Rounded Rectangle 18"/>
+          <p:cNvSpPr/>
+          <p:nvPr/>
+        </p:nvSpPr>
+        <p:spPr>
+          <a:xfrm>
+            <a:off x="548640" y="4892040"/>
+            <a:ext cx="7863840" cy="640080"/>
+          </a:xfrm>
+          <a:prstGeom prst="roundRect">
+            <a:avLst/>
+          </a:prstGeom>
+          <a:solidFill>
+            <a:srgbClr val="FFFFFF"/>
+          </a:solidFill>
+          <a:ln w="12700">
+            <a:solidFill>
+              <a:srgbClr val="ECE7E2"/>
+            </a:solidFill>
+          </a:ln>
+          <a:effectLst/>
+        </p:spPr>
+        <p:style>
+          <a:lnRef idx="1">
+            <a:schemeClr val="accent1"/>
+          </a:lnRef>
+          <a:fillRef idx="3">
+            <a:schemeClr val="accent1"/>
+          </a:fillRef>
+          <a:effectRef idx="2">
+            <a:schemeClr val="accent1"/>
+          </a:effectRef>
+          <a:fontRef idx="minor">
+            <a:schemeClr val="lt1"/>
+          </a:fontRef>
+        </p:style>
+        <p:txBody>
+          <a:bodyPr rtlCol="0" anchor="ctr"/>
+          <a:lstStyle/>
+          <a:p>
+            <a:pPr algn="ctr"/>
+          </a:p>
+        </p:txBody>
+      </p:sp>
+      <p:sp>
+        <p:nvSpPr>
+          <p:cNvPr id="20" name="Rounded Rectangle 19"/>
+          <p:cNvSpPr/>
+          <p:nvPr/>
+        </p:nvSpPr>
+        <p:spPr>
+          <a:xfrm>
+            <a:off x="685800" y="5001768"/>
+            <a:ext cx="411480" cy="365760"/>
+          </a:xfrm>
+          <a:prstGeom prst="roundRect">
+            <a:avLst/>
+          </a:prstGeom>
+          <a:solidFill>
+            <a:srgbClr val="FBEAE2"/>
+          </a:solidFill>
+          <a:ln>
+            <a:noFill/>
+          </a:ln>
+          <a:effectLst/>
+        </p:spPr>
+        <p:style>
+          <a:lnRef idx="1">
+            <a:schemeClr val="accent1"/>
+          </a:lnRef>
+          <a:fillRef idx="3">
+            <a:schemeClr val="accent1"/>
+          </a:fillRef>
+          <a:effectRef idx="2">
+            <a:schemeClr val="accent1"/>
+          </a:effectRef>
+          <a:fontRef idx="minor">
+            <a:schemeClr val="lt1"/>
+          </a:fontRef>
+        </p:style>
+        <p:txBody>
+          <a:bodyPr rtlCol="0" anchor="ctr"/>
+          <a:lstStyle/>
+          <a:p>
+            <a:pPr algn="ctr"/>
+            <a:r>
+              <a:rPr sz="1200" b="1">
+                <a:solidFill>
+                  <a:srgbClr val="C84A1E"/>
+                </a:solidFill>
+              </a:rPr>
+              <a:t>05</a:t>
+            </a:r>
+          </a:p>
+        </p:txBody>
+      </p:sp>
+      <p:sp>
+        <p:nvSpPr>
+          <p:cNvPr id="21" name="TextBox 20"/>
+          <p:cNvSpPr txBox="1"/>
+          <p:nvPr/>
+        </p:nvSpPr>
+        <p:spPr>
+          <a:xfrm>
+            <a:off x="1234440" y="4956048"/>
+            <a:ext cx="6995160" cy="512064"/>
+          </a:xfrm>
+          <a:prstGeom prst="rect">
+            <a:avLst/>
+          </a:prstGeom>
+          <a:noFill/>
+        </p:spPr>
+        <p:txBody>
+          <a:bodyPr wrap="square">
+            <a:spAutoFit/>
+          </a:bodyPr>
+          <a:lstStyle/>
+          <a:p>
+            <a:r>
+              <a:rPr b="1" sz="1300">
+                <a:solidFill>
+                  <a:srgbClr val="1F2430"/>
+                </a:solidFill>
+              </a:rPr>
+              <a:t>Convenciones consistentes</a:t>
+            </a:r>
+          </a:p>
+          <a:p>
+            <a:r>
+              <a:rPr sz="1100">
+                <a:solidFill>
+                  <a:srgbClr val="6B7280"/>
+                </a:solidFill>
+              </a:rPr>
+              <a:t>Commits en español, ramas descriptivas, hooks de verificación antes de cada push.</a:t>
             </a:r>
           </a:p>
         </p:txBody>

--- a/presentation/calypso-knowledge-hub.pptx
+++ b/presentation/calypso-knowledge-hub.pptx
@@ -3840,7 +3840,7 @@
                 </a:solidFill>
                 <a:latin typeface="Calibri"/>
               </a:rPr>
-              <a:t>Productos escalables sin reescribir motor</a:t>
+              <a:t>Productos escalables agregando nuevos motores</a:t>
             </a:r>
           </a:p>
         </p:txBody>
@@ -4263,7 +4263,7 @@
                   <a:srgbClr val="6B7280"/>
                 </a:solidFill>
               </a:rPr>
-              <a:t>Arquitectura preparada para un back office real, sin reescribir motor ni interfaz.</a:t>
+              <a:t>Arquitectura preparada para un back office real y para sumar nuevos motores de producto sin tocar los existentes.</a:t>
             </a:r>
           </a:p>
         </p:txBody>
@@ -7695,7 +7695,7 @@
                 </a:solidFill>
                 <a:latin typeface="Calibri"/>
               </a:rPr>
-              <a:t>Soporta FX Spot, Forward FX y FX NDF desde el mismo motor, configurado por archivos JSON por producto.</a:t>
+              <a:t>Soporta FX Spot, Forward FX y FX NDF, configurados por archivos JSON por producto.</a:t>
             </a:r>
           </a:p>
         </p:txBody>
@@ -9354,7 +9354,7 @@
                   <a:srgbClr val="1F2430"/>
                 </a:solidFill>
               </a:rPr>
-              <a:t>Arquitectura por configuración</a:t>
+              <a:t>Arquitectura extensible por motores</a:t>
             </a:r>
           </a:p>
           <a:p>
@@ -9364,7 +9364,7 @@
                   <a:srgbClr val="6B7280"/>
                 </a:solidFill>
               </a:rPr>
-              <a:t>Agregar un producto financiero nuevo no requiere tocar el motor de cálculo.</a:t>
+              <a:t>Cada producto financiero tiene su propio motor de cálculo; agregar uno nuevo no modifica los existentes, solo se suma uno más.</a:t>
             </a:r>
           </a:p>
         </p:txBody>

--- a/presentation/calypso-knowledge-hub.pptx
+++ b/presentation/calypso-knowledge-hub.pptx
@@ -8220,7 +8220,7 @@
                 </a:solidFill>
                 <a:latin typeface="Calibri"/>
               </a:rPr>
-              <a:t>Editor de XML de trades (CDUF)</a:t>
+              <a:t>Simulación: generador de XML de trades (CDUF)</a:t>
             </a:r>
           </a:p>
         </p:txBody>
@@ -8233,8 +8233,8 @@
         </p:nvSpPr>
         <p:spPr>
           <a:xfrm>
-            <a:off x="548640" y="2011680"/>
-            <a:ext cx="5120640" cy="4114800"/>
+            <a:off x="548640" y="1783080"/>
+            <a:ext cx="10789920" cy="457200"/>
           </a:xfrm>
           <a:prstGeom prst="rect">
             <a:avLst/>
@@ -8247,42 +8247,109 @@
           </a:bodyPr>
           <a:lstStyle/>
           <a:p>
-            <a:pPr>
-              <a:spcAft>
-                <a:spcPts val="600"/>
-              </a:spcAft>
-            </a:pPr>
-            <a:r>
-              <a:rPr sz="1500">
+            <a:pPr algn="l"/>
+            <a:r>
+              <a:rPr sz="1400" b="0">
                 <a:solidFill>
                   <a:srgbClr val="6B7280"/>
                 </a:solidFill>
                 <a:latin typeface="Calibri"/>
               </a:rPr>
-              <a:t>Carga un XML de trade de Calypso y lo convierte en un formulario editable, con jerarquía visual de 3 niveles.</a:t>
-            </a:r>
-          </a:p>
-          <a:p>
-            <a:pPr>
-              <a:spcAft>
-                <a:spcPts val="600"/>
-              </a:spcAft>
-            </a:pPr>
-            <a:r>
-              <a:rPr sz="1500">
-                <a:solidFill>
-                  <a:srgbClr val="6B7280"/>
+              <a:t>Flujo completo de uso: cargar un XML real, editar/duplicar bloques y exportarlo de vuelta a CDUF.</a:t>
+            </a:r>
+          </a:p>
+        </p:txBody>
+      </p:sp>
+      <p:sp>
+        <p:nvSpPr>
+          <p:cNvPr id="8" name="Oval 7"/>
+          <p:cNvSpPr/>
+          <p:nvPr/>
+        </p:nvSpPr>
+        <p:spPr>
+          <a:xfrm>
+            <a:off x="548640" y="2331720"/>
+            <a:ext cx="256032" cy="256032"/>
+          </a:xfrm>
+          <a:prstGeom prst="ellipse">
+            <a:avLst/>
+          </a:prstGeom>
+          <a:solidFill>
+            <a:srgbClr val="E8622C"/>
+          </a:solidFill>
+          <a:ln>
+            <a:noFill/>
+          </a:ln>
+          <a:effectLst/>
+        </p:spPr>
+        <p:style>
+          <a:lnRef idx="1">
+            <a:schemeClr val="accent1"/>
+          </a:lnRef>
+          <a:fillRef idx="3">
+            <a:schemeClr val="accent1"/>
+          </a:fillRef>
+          <a:effectRef idx="2">
+            <a:schemeClr val="accent1"/>
+          </a:effectRef>
+          <a:fontRef idx="minor">
+            <a:schemeClr val="lt1"/>
+          </a:fontRef>
+        </p:style>
+        <p:txBody>
+          <a:bodyPr rtlCol="0" anchor="ctr"/>
+          <a:lstStyle/>
+          <a:p>
+            <a:pPr algn="ctr"/>
+            <a:r>
+              <a:rPr sz="1100" b="1">
+                <a:solidFill>
+                  <a:srgbClr val="FFFFFF"/>
+                </a:solidFill>
+              </a:rPr>
+              <a:t>1</a:t>
+            </a:r>
+          </a:p>
+        </p:txBody>
+      </p:sp>
+      <p:sp>
+        <p:nvSpPr>
+          <p:cNvPr id="9" name="TextBox 8"/>
+          <p:cNvSpPr txBox="1"/>
+          <p:nvPr/>
+        </p:nvSpPr>
+        <p:spPr>
+          <a:xfrm>
+            <a:off x="877824" y="2331720"/>
+            <a:ext cx="2377440" cy="274320"/>
+          </a:xfrm>
+          <a:prstGeom prst="rect">
+            <a:avLst/>
+          </a:prstGeom>
+          <a:noFill/>
+        </p:spPr>
+        <p:txBody>
+          <a:bodyPr wrap="square">
+            <a:spAutoFit/>
+          </a:bodyPr>
+          <a:lstStyle/>
+          <a:p>
+            <a:pPr algn="l"/>
+            <a:r>
+              <a:rPr sz="1100" b="1">
+                <a:solidFill>
+                  <a:srgbClr val="1F2430"/>
                 </a:solidFill>
                 <a:latin typeface="Calibri"/>
               </a:rPr>
-              <a:t>Campos y bloques repetibles (duplicar contrapartes, agregar valores), y exportación de vuelta a formato CDUF.</a:t>
+              <a:t>Cargar XML</a:t>
             </a:r>
           </a:p>
         </p:txBody>
       </p:sp>
       <p:pic>
         <p:nvPicPr>
-          <p:cNvPr id="8" name="Picture 7" descr="xml-editor.png"/>
+          <p:cNvPr id="10" name="Picture 9" descr="xml-1-upload.png"/>
           <p:cNvPicPr>
             <a:picLocks noChangeAspect="1"/>
           </p:cNvPicPr>
@@ -8296,8 +8363,341 @@
         </p:blipFill>
         <p:spPr>
           <a:xfrm>
-            <a:off x="5943600" y="1828800"/>
-            <a:ext cx="5669280" cy="3937000"/>
+            <a:off x="548640" y="2697480"/>
+            <a:ext cx="2651760" cy="1841500"/>
+          </a:xfrm>
+          <a:prstGeom prst="rect">
+            <a:avLst/>
+          </a:prstGeom>
+        </p:spPr>
+      </p:pic>
+      <p:sp>
+        <p:nvSpPr>
+          <p:cNvPr id="11" name="Oval 10"/>
+          <p:cNvSpPr/>
+          <p:nvPr/>
+        </p:nvSpPr>
+        <p:spPr>
+          <a:xfrm>
+            <a:off x="3337560" y="2331720"/>
+            <a:ext cx="256032" cy="256032"/>
+          </a:xfrm>
+          <a:prstGeom prst="ellipse">
+            <a:avLst/>
+          </a:prstGeom>
+          <a:solidFill>
+            <a:srgbClr val="E8622C"/>
+          </a:solidFill>
+          <a:ln>
+            <a:noFill/>
+          </a:ln>
+          <a:effectLst/>
+        </p:spPr>
+        <p:style>
+          <a:lnRef idx="1">
+            <a:schemeClr val="accent1"/>
+          </a:lnRef>
+          <a:fillRef idx="3">
+            <a:schemeClr val="accent1"/>
+          </a:fillRef>
+          <a:effectRef idx="2">
+            <a:schemeClr val="accent1"/>
+          </a:effectRef>
+          <a:fontRef idx="minor">
+            <a:schemeClr val="lt1"/>
+          </a:fontRef>
+        </p:style>
+        <p:txBody>
+          <a:bodyPr rtlCol="0" anchor="ctr"/>
+          <a:lstStyle/>
+          <a:p>
+            <a:pPr algn="ctr"/>
+            <a:r>
+              <a:rPr sz="1100" b="1">
+                <a:solidFill>
+                  <a:srgbClr val="FFFFFF"/>
+                </a:solidFill>
+              </a:rPr>
+              <a:t>2</a:t>
+            </a:r>
+          </a:p>
+        </p:txBody>
+      </p:sp>
+      <p:sp>
+        <p:nvSpPr>
+          <p:cNvPr id="12" name="TextBox 11"/>
+          <p:cNvSpPr txBox="1"/>
+          <p:nvPr/>
+        </p:nvSpPr>
+        <p:spPr>
+          <a:xfrm>
+            <a:off x="3666744" y="2331720"/>
+            <a:ext cx="2377440" cy="274320"/>
+          </a:xfrm>
+          <a:prstGeom prst="rect">
+            <a:avLst/>
+          </a:prstGeom>
+          <a:noFill/>
+        </p:spPr>
+        <p:txBody>
+          <a:bodyPr wrap="square">
+            <a:spAutoFit/>
+          </a:bodyPr>
+          <a:lstStyle/>
+          <a:p>
+            <a:pPr algn="l"/>
+            <a:r>
+              <a:rPr sz="1100" b="1">
+                <a:solidFill>
+                  <a:srgbClr val="1F2430"/>
+                </a:solidFill>
+                <a:latin typeface="Calibri"/>
+              </a:rPr>
+              <a:t>Estructura detectada</a:t>
+            </a:r>
+          </a:p>
+        </p:txBody>
+      </p:sp>
+      <p:pic>
+        <p:nvPicPr>
+          <p:cNvPr id="13" name="Picture 12" descr="xml-2-loaded.png"/>
+          <p:cNvPicPr>
+            <a:picLocks noChangeAspect="1"/>
+          </p:cNvPicPr>
+          <p:nvPr/>
+        </p:nvPicPr>
+        <p:blipFill>
+          <a:blip r:embed="rId3"/>
+          <a:stretch>
+            <a:fillRect/>
+          </a:stretch>
+        </p:blipFill>
+        <p:spPr>
+          <a:xfrm>
+            <a:off x="3337560" y="2697480"/>
+            <a:ext cx="2651760" cy="1841500"/>
+          </a:xfrm>
+          <a:prstGeom prst="rect">
+            <a:avLst/>
+          </a:prstGeom>
+        </p:spPr>
+      </p:pic>
+      <p:sp>
+        <p:nvSpPr>
+          <p:cNvPr id="14" name="Oval 13"/>
+          <p:cNvSpPr/>
+          <p:nvPr/>
+        </p:nvSpPr>
+        <p:spPr>
+          <a:xfrm>
+            <a:off x="6126479" y="2331720"/>
+            <a:ext cx="256032" cy="256032"/>
+          </a:xfrm>
+          <a:prstGeom prst="ellipse">
+            <a:avLst/>
+          </a:prstGeom>
+          <a:solidFill>
+            <a:srgbClr val="E8622C"/>
+          </a:solidFill>
+          <a:ln>
+            <a:noFill/>
+          </a:ln>
+          <a:effectLst/>
+        </p:spPr>
+        <p:style>
+          <a:lnRef idx="1">
+            <a:schemeClr val="accent1"/>
+          </a:lnRef>
+          <a:fillRef idx="3">
+            <a:schemeClr val="accent1"/>
+          </a:fillRef>
+          <a:effectRef idx="2">
+            <a:schemeClr val="accent1"/>
+          </a:effectRef>
+          <a:fontRef idx="minor">
+            <a:schemeClr val="lt1"/>
+          </a:fontRef>
+        </p:style>
+        <p:txBody>
+          <a:bodyPr rtlCol="0" anchor="ctr"/>
+          <a:lstStyle/>
+          <a:p>
+            <a:pPr algn="ctr"/>
+            <a:r>
+              <a:rPr sz="1100" b="1">
+                <a:solidFill>
+                  <a:srgbClr val="FFFFFF"/>
+                </a:solidFill>
+              </a:rPr>
+              <a:t>3</a:t>
+            </a:r>
+          </a:p>
+        </p:txBody>
+      </p:sp>
+      <p:sp>
+        <p:nvSpPr>
+          <p:cNvPr id="15" name="TextBox 14"/>
+          <p:cNvSpPr txBox="1"/>
+          <p:nvPr/>
+        </p:nvSpPr>
+        <p:spPr>
+          <a:xfrm>
+            <a:off x="6455664" y="2331720"/>
+            <a:ext cx="2377440" cy="274320"/>
+          </a:xfrm>
+          <a:prstGeom prst="rect">
+            <a:avLst/>
+          </a:prstGeom>
+          <a:noFill/>
+        </p:spPr>
+        <p:txBody>
+          <a:bodyPr wrap="square">
+            <a:spAutoFit/>
+          </a:bodyPr>
+          <a:lstStyle/>
+          <a:p>
+            <a:pPr algn="l"/>
+            <a:r>
+              <a:rPr sz="1100" b="1">
+                <a:solidFill>
+                  <a:srgbClr val="1F2430"/>
+                </a:solidFill>
+                <a:latin typeface="Calibri"/>
+              </a:rPr>
+              <a:t>Duplicar / editar bloques</a:t>
+            </a:r>
+          </a:p>
+        </p:txBody>
+      </p:sp>
+      <p:pic>
+        <p:nvPicPr>
+          <p:cNvPr id="16" name="Picture 15" descr="xml-3-editado.png"/>
+          <p:cNvPicPr>
+            <a:picLocks noChangeAspect="1"/>
+          </p:cNvPicPr>
+          <p:nvPr/>
+        </p:nvPicPr>
+        <p:blipFill>
+          <a:blip r:embed="rId4"/>
+          <a:stretch>
+            <a:fillRect/>
+          </a:stretch>
+        </p:blipFill>
+        <p:spPr>
+          <a:xfrm>
+            <a:off x="6126479" y="2697480"/>
+            <a:ext cx="2651760" cy="1841500"/>
+          </a:xfrm>
+          <a:prstGeom prst="rect">
+            <a:avLst/>
+          </a:prstGeom>
+        </p:spPr>
+      </p:pic>
+      <p:sp>
+        <p:nvSpPr>
+          <p:cNvPr id="17" name="Oval 16"/>
+          <p:cNvSpPr/>
+          <p:nvPr/>
+        </p:nvSpPr>
+        <p:spPr>
+          <a:xfrm>
+            <a:off x="8915400" y="2331720"/>
+            <a:ext cx="256032" cy="256032"/>
+          </a:xfrm>
+          <a:prstGeom prst="ellipse">
+            <a:avLst/>
+          </a:prstGeom>
+          <a:solidFill>
+            <a:srgbClr val="E8622C"/>
+          </a:solidFill>
+          <a:ln>
+            <a:noFill/>
+          </a:ln>
+          <a:effectLst/>
+        </p:spPr>
+        <p:style>
+          <a:lnRef idx="1">
+            <a:schemeClr val="accent1"/>
+          </a:lnRef>
+          <a:fillRef idx="3">
+            <a:schemeClr val="accent1"/>
+          </a:fillRef>
+          <a:effectRef idx="2">
+            <a:schemeClr val="accent1"/>
+          </a:effectRef>
+          <a:fontRef idx="minor">
+            <a:schemeClr val="lt1"/>
+          </a:fontRef>
+        </p:style>
+        <p:txBody>
+          <a:bodyPr rtlCol="0" anchor="ctr"/>
+          <a:lstStyle/>
+          <a:p>
+            <a:pPr algn="ctr"/>
+            <a:r>
+              <a:rPr sz="1100" b="1">
+                <a:solidFill>
+                  <a:srgbClr val="FFFFFF"/>
+                </a:solidFill>
+              </a:rPr>
+              <a:t>4</a:t>
+            </a:r>
+          </a:p>
+        </p:txBody>
+      </p:sp>
+      <p:sp>
+        <p:nvSpPr>
+          <p:cNvPr id="18" name="TextBox 17"/>
+          <p:cNvSpPr txBox="1"/>
+          <p:nvPr/>
+        </p:nvSpPr>
+        <p:spPr>
+          <a:xfrm>
+            <a:off x="9244584" y="2331720"/>
+            <a:ext cx="2377440" cy="274320"/>
+          </a:xfrm>
+          <a:prstGeom prst="rect">
+            <a:avLst/>
+          </a:prstGeom>
+          <a:noFill/>
+        </p:spPr>
+        <p:txBody>
+          <a:bodyPr wrap="square">
+            <a:spAutoFit/>
+          </a:bodyPr>
+          <a:lstStyle/>
+          <a:p>
+            <a:pPr algn="l"/>
+            <a:r>
+              <a:rPr sz="1100" b="1">
+                <a:solidFill>
+                  <a:srgbClr val="1F2430"/>
+                </a:solidFill>
+                <a:latin typeface="Calibri"/>
+              </a:rPr>
+              <a:t>Guardar y exportar CDUF</a:t>
+            </a:r>
+          </a:p>
+        </p:txBody>
+      </p:sp>
+      <p:pic>
+        <p:nvPicPr>
+          <p:cNvPr id="19" name="Picture 18" descr="xml-4-registro.png"/>
+          <p:cNvPicPr>
+            <a:picLocks noChangeAspect="1"/>
+          </p:cNvPicPr>
+          <p:nvPr/>
+        </p:nvPicPr>
+        <p:blipFill>
+          <a:blip r:embed="rId5"/>
+          <a:stretch>
+            <a:fillRect/>
+          </a:stretch>
+        </p:blipFill>
+        <p:spPr>
+          <a:xfrm>
+            <a:off x="8915400" y="2697480"/>
+            <a:ext cx="2651760" cy="1841500"/>
           </a:xfrm>
           <a:prstGeom prst="rect">
             <a:avLst/>
